--- a/gcse-slides/ocr-chemistry/OCR21C_C4.4_EndOfLife_Combined.pptx
+++ b/gcse-slides/ocr-chemistry/OCR21C_C4.4_EndOfLife_Combined.pptx
@@ -7100,7 +7100,7 @@
               <a:buChar char="▪"/>
             </a:pPr>
             <a:r>
-              <a:rPr lang="en-US" sz="1050" b="1" dirty="0">
+              <a:rPr lang="en-US" sz="1150" b="1" dirty="0">
                 <a:solidFill>
                   <a:srgbClr val="262B3A"/>
                 </a:solidFill>
@@ -7111,7 +7111,7 @@
               <a:t>Clean</a:t>
             </a:r>
             <a:r>
-              <a:rPr lang="en-US" sz="1050" dirty="0">
+              <a:rPr lang="en-US" sz="1150" dirty="0">
                 <a:solidFill>
                   <a:srgbClr val="262B3A"/>
                 </a:solidFill>
@@ -7121,7 +7121,7 @@
               </a:rPr>
               <a:t> five iron nails with emery paper. Weigh each nail (to 0.001 g).</a:t>
             </a:r>
-            <a:endParaRPr lang="en-US" sz="1050" dirty="0"/>
+            <a:endParaRPr lang="en-US" sz="1150" dirty="0"/>
           </a:p>
           <a:p>
             <a:pPr marL="152400" indent="-152400">
@@ -7132,7 +7132,7 @@
               <a:buChar char="▪"/>
             </a:pPr>
             <a:r>
-              <a:rPr lang="en-US" sz="1050" dirty="0">
+              <a:rPr lang="en-US" sz="1150" dirty="0">
                 <a:solidFill>
                   <a:srgbClr val="262B3A"/>
                 </a:solidFill>
@@ -7143,7 +7143,7 @@
               <a:t>Treat them: </a:t>
             </a:r>
             <a:r>
-              <a:rPr lang="en-US" sz="1050" b="1" dirty="0">
+              <a:rPr lang="en-US" sz="1150" b="1" dirty="0">
                 <a:solidFill>
                   <a:srgbClr val="262B3A"/>
                 </a:solidFill>
@@ -7154,7 +7154,7 @@
               <a:t>A</a:t>
             </a:r>
             <a:r>
-              <a:rPr lang="en-US" sz="1050" dirty="0">
+              <a:rPr lang="en-US" sz="1150" dirty="0">
                 <a:solidFill>
                   <a:srgbClr val="262B3A"/>
                 </a:solidFill>
@@ -7165,7 +7165,7 @@
               <a:t> untreated, </a:t>
             </a:r>
             <a:r>
-              <a:rPr lang="en-US" sz="1050" b="1" dirty="0">
+              <a:rPr lang="en-US" sz="1150" b="1" dirty="0">
                 <a:solidFill>
                   <a:srgbClr val="262B3A"/>
                 </a:solidFill>
@@ -7176,7 +7176,7 @@
               <a:t>B</a:t>
             </a:r>
             <a:r>
-              <a:rPr lang="en-US" sz="1050" dirty="0">
+              <a:rPr lang="en-US" sz="1150" dirty="0">
                 <a:solidFill>
                   <a:srgbClr val="262B3A"/>
                 </a:solidFill>
@@ -7187,7 +7187,7 @@
               <a:t> untreated in salt water, </a:t>
             </a:r>
             <a:r>
-              <a:rPr lang="en-US" sz="1050" b="1" dirty="0">
+              <a:rPr lang="en-US" sz="1150" b="1" dirty="0">
                 <a:solidFill>
                   <a:srgbClr val="262B3A"/>
                 </a:solidFill>
@@ -7198,7 +7198,7 @@
               <a:t>C</a:t>
             </a:r>
             <a:r>
-              <a:rPr lang="en-US" sz="1050" dirty="0">
+              <a:rPr lang="en-US" sz="1150" dirty="0">
                 <a:solidFill>
                   <a:srgbClr val="262B3A"/>
                 </a:solidFill>
@@ -7209,7 +7209,7 @@
               <a:t> painted, </a:t>
             </a:r>
             <a:r>
-              <a:rPr lang="en-US" sz="1050" b="1" dirty="0">
+              <a:rPr lang="en-US" sz="1150" b="1" dirty="0">
                 <a:solidFill>
                   <a:srgbClr val="262B3A"/>
                 </a:solidFill>
@@ -7220,7 +7220,7 @@
               <a:t>D</a:t>
             </a:r>
             <a:r>
-              <a:rPr lang="en-US" sz="1050" dirty="0">
+              <a:rPr lang="en-US" sz="1150" dirty="0">
                 <a:solidFill>
                   <a:srgbClr val="262B3A"/>
                 </a:solidFill>
@@ -7231,7 +7231,7 @@
               <a:t> wrapped with </a:t>
             </a:r>
             <a:r>
-              <a:rPr lang="en-US" sz="1050" b="1" dirty="0">
+              <a:rPr lang="en-US" sz="1150" b="1" dirty="0">
                 <a:solidFill>
                   <a:srgbClr val="262B3A"/>
                 </a:solidFill>
@@ -7242,7 +7242,7 @@
               <a:t>zinc</a:t>
             </a:r>
             <a:r>
-              <a:rPr lang="en-US" sz="1050" dirty="0">
+              <a:rPr lang="en-US" sz="1150" dirty="0">
                 <a:solidFill>
                   <a:srgbClr val="262B3A"/>
                 </a:solidFill>
@@ -7253,7 +7253,7 @@
               <a:t>, </a:t>
             </a:r>
             <a:r>
-              <a:rPr lang="en-US" sz="1050" b="1" dirty="0">
+              <a:rPr lang="en-US" sz="1150" b="1" dirty="0">
                 <a:solidFill>
                   <a:srgbClr val="262B3A"/>
                 </a:solidFill>
@@ -7264,7 +7264,7 @@
               <a:t>E</a:t>
             </a:r>
             <a:r>
-              <a:rPr lang="en-US" sz="1050" dirty="0">
+              <a:rPr lang="en-US" sz="1150" dirty="0">
                 <a:solidFill>
                   <a:srgbClr val="262B3A"/>
                 </a:solidFill>
@@ -7275,7 +7275,7 @@
               <a:t> wrapped with </a:t>
             </a:r>
             <a:r>
-              <a:rPr lang="en-US" sz="1050" b="1" dirty="0">
+              <a:rPr lang="en-US" sz="1150" b="1" dirty="0">
                 <a:solidFill>
                   <a:srgbClr val="262B3A"/>
                 </a:solidFill>
@@ -7286,7 +7286,7 @@
               <a:t>copper</a:t>
             </a:r>
             <a:r>
-              <a:rPr lang="en-US" sz="1050" dirty="0">
+              <a:rPr lang="en-US" sz="1150" dirty="0">
                 <a:solidFill>
                   <a:srgbClr val="262B3A"/>
                 </a:solidFill>
@@ -7296,7 +7296,7 @@
               </a:rPr>
               <a:t>.</a:t>
             </a:r>
-            <a:endParaRPr lang="en-US" sz="1050" dirty="0"/>
+            <a:endParaRPr lang="en-US" sz="1150" dirty="0"/>
           </a:p>
           <a:p>
             <a:pPr marL="152400" indent="-152400">
@@ -7307,7 +7307,7 @@
               <a:buChar char="▪"/>
             </a:pPr>
             <a:r>
-              <a:rPr lang="en-US" sz="1050" dirty="0">
+              <a:rPr lang="en-US" sz="1150" dirty="0">
                 <a:solidFill>
                   <a:srgbClr val="262B3A"/>
                 </a:solidFill>
@@ -7318,7 +7318,7 @@
               <a:t>Add the same volume of water to each tube. Leave for </a:t>
             </a:r>
             <a:r>
-              <a:rPr lang="en-US" sz="1050" b="1" dirty="0">
+              <a:rPr lang="en-US" sz="1150" b="1" dirty="0">
                 <a:solidFill>
                   <a:srgbClr val="262B3A"/>
                 </a:solidFill>
@@ -7329,7 +7329,7 @@
               <a:t>7 days</a:t>
             </a:r>
             <a:r>
-              <a:rPr lang="en-US" sz="1050" dirty="0">
+              <a:rPr lang="en-US" sz="1150" dirty="0">
                 <a:solidFill>
                   <a:srgbClr val="262B3A"/>
                 </a:solidFill>
@@ -7339,7 +7339,7 @@
               </a:rPr>
               <a:t>.</a:t>
             </a:r>
-            <a:endParaRPr lang="en-US" sz="1050" dirty="0"/>
+            <a:endParaRPr lang="en-US" sz="1150" dirty="0"/>
           </a:p>
           <a:p>
             <a:pPr marL="152400" indent="-152400">
@@ -7350,7 +7350,7 @@
               <a:buChar char="▪"/>
             </a:pPr>
             <a:r>
-              <a:rPr lang="en-US" sz="1050" dirty="0">
+              <a:rPr lang="en-US" sz="1150" dirty="0">
                 <a:solidFill>
                   <a:srgbClr val="262B3A"/>
                 </a:solidFill>
@@ -7361,7 +7361,7 @@
               <a:t>Remove, dry carefully </a:t>
             </a:r>
             <a:r>
-              <a:rPr lang="en-US" sz="1050" b="1" dirty="0">
+              <a:rPr lang="en-US" sz="1150" b="1" dirty="0">
                 <a:solidFill>
                   <a:srgbClr val="262B3A"/>
                 </a:solidFill>
@@ -7372,7 +7372,7 @@
               <a:t>without</a:t>
             </a:r>
             <a:r>
-              <a:rPr lang="en-US" sz="1050" dirty="0">
+              <a:rPr lang="en-US" sz="1150" dirty="0">
                 <a:solidFill>
                   <a:srgbClr val="262B3A"/>
                 </a:solidFill>
@@ -7383,7 +7383,7 @@
               <a:t> knocking off rust, and reweigh. </a:t>
             </a:r>
             <a:r>
-              <a:rPr lang="en-US" sz="1050" b="1" dirty="0">
+              <a:rPr lang="en-US" sz="1150" b="1" dirty="0">
                 <a:solidFill>
                   <a:srgbClr val="262B3A"/>
                 </a:solidFill>
@@ -7394,7 +7394,7 @@
               <a:t>Mass gain</a:t>
             </a:r>
             <a:r>
-              <a:rPr lang="en-US" sz="1050" dirty="0">
+              <a:rPr lang="en-US" sz="1150" dirty="0">
                 <a:solidFill>
                   <a:srgbClr val="262B3A"/>
                 </a:solidFill>
@@ -7404,7 +7404,7 @@
               </a:rPr>
               <a:t> = mass of oxygen and water added.</a:t>
             </a:r>
-            <a:endParaRPr lang="en-US" sz="1050" dirty="0"/>
+            <a:endParaRPr lang="en-US" sz="1150" dirty="0"/>
           </a:p>
           <a:p>
             <a:pPr marL="152400" indent="-152400">
@@ -7415,7 +7415,7 @@
               <a:buChar char="▪"/>
             </a:pPr>
             <a:r>
-              <a:rPr lang="en-US" sz="1050" b="1" dirty="0">
+              <a:rPr lang="en-US" sz="1150" b="1" dirty="0">
                 <a:solidFill>
                   <a:srgbClr val="262B3A"/>
                 </a:solidFill>
@@ -7426,7 +7426,7 @@
               <a:t>IV</a:t>
             </a:r>
             <a:r>
-              <a:rPr lang="en-US" sz="1050" dirty="0">
+              <a:rPr lang="en-US" sz="1150" dirty="0">
                 <a:solidFill>
                   <a:srgbClr val="262B3A"/>
                 </a:solidFill>
@@ -7437,7 +7437,7 @@
               <a:t>: protection method. </a:t>
             </a:r>
             <a:r>
-              <a:rPr lang="en-US" sz="1050" b="1" dirty="0">
+              <a:rPr lang="en-US" sz="1150" b="1" dirty="0">
                 <a:solidFill>
                   <a:srgbClr val="262B3A"/>
                 </a:solidFill>
@@ -7448,7 +7448,7 @@
               <a:t>DV</a:t>
             </a:r>
             <a:r>
-              <a:rPr lang="en-US" sz="1050" dirty="0">
+              <a:rPr lang="en-US" sz="1150" dirty="0">
                 <a:solidFill>
                   <a:srgbClr val="262B3A"/>
                 </a:solidFill>
@@ -7459,7 +7459,7 @@
               <a:t>: mass gain / mg. </a:t>
             </a:r>
             <a:r>
-              <a:rPr lang="en-US" sz="1050" b="1" dirty="0">
+              <a:rPr lang="en-US" sz="1150" b="1" dirty="0">
                 <a:solidFill>
                   <a:srgbClr val="262B3A"/>
                 </a:solidFill>
@@ -7470,7 +7470,7 @@
               <a:t>Control</a:t>
             </a:r>
             <a:r>
-              <a:rPr lang="en-US" sz="1050" dirty="0">
+              <a:rPr lang="en-US" sz="1150" dirty="0">
                 <a:solidFill>
                   <a:srgbClr val="262B3A"/>
                 </a:solidFill>
@@ -7480,7 +7480,7 @@
               </a:rPr>
               <a:t>: nail size, volume, temperature, time.</a:t>
             </a:r>
-            <a:endParaRPr lang="en-US" sz="1050" dirty="0"/>
+            <a:endParaRPr lang="en-US" sz="1150" dirty="0"/>
           </a:p>
           <a:p>
             <a:pPr marL="152400" indent="-152400">
@@ -7491,7 +7491,7 @@
               <a:buChar char="▪"/>
             </a:pPr>
             <a:r>
-              <a:rPr lang="en-US" sz="1050" b="1" dirty="0">
+              <a:rPr lang="en-US" sz="1150" b="1" dirty="0">
                 <a:solidFill>
                   <a:srgbClr val="262B3A"/>
                 </a:solidFill>
@@ -7502,7 +7502,7 @@
               <a:t>Safety</a:t>
             </a:r>
             <a:r>
-              <a:rPr lang="en-US" sz="1050" dirty="0">
+              <a:rPr lang="en-US" sz="1150" dirty="0">
                 <a:solidFill>
                   <a:srgbClr val="262B3A"/>
                 </a:solidFill>
@@ -7512,7 +7512,7 @@
               </a:rPr>
               <a:t>: eye protection; salt solution low hazard; wash hands; nails are sharp.</a:t>
             </a:r>
-            <a:endParaRPr lang="en-US" sz="1050" dirty="0"/>
+            <a:endParaRPr lang="en-US" sz="1150" dirty="0"/>
           </a:p>
         </p:txBody>
       </p:sp>
@@ -8195,7 +8195,7 @@
         <p:spPr>
           <a:xfrm>
             <a:off x="1325880" y="1417320"/>
-            <a:ext cx="4846320" cy="3246120"/>
+            <a:ext cx="4846320" cy="2651760"/>
           </a:xfrm>
           <a:prstGeom prst="rect">
             <a:avLst/>
@@ -8215,7 +8215,7 @@
         <p:spPr>
           <a:xfrm>
             <a:off x="1325880" y="1417320"/>
-            <a:ext cx="91" cy="3246120"/>
+            <a:ext cx="91" cy="2651760"/>
           </a:xfrm>
           <a:prstGeom prst="line">
             <a:avLst/>
@@ -8238,7 +8238,7 @@
         <p:spPr>
           <a:xfrm>
             <a:off x="1672046" y="1417320"/>
-            <a:ext cx="91" cy="3246120"/>
+            <a:ext cx="91" cy="2651760"/>
           </a:xfrm>
           <a:prstGeom prst="line">
             <a:avLst/>
@@ -8261,7 +8261,7 @@
         <p:spPr>
           <a:xfrm>
             <a:off x="2018211" y="1417320"/>
-            <a:ext cx="91" cy="3246120"/>
+            <a:ext cx="91" cy="2651760"/>
           </a:xfrm>
           <a:prstGeom prst="line">
             <a:avLst/>
@@ -8284,7 +8284,7 @@
         <p:spPr>
           <a:xfrm>
             <a:off x="2364377" y="1417320"/>
-            <a:ext cx="91" cy="3246120"/>
+            <a:ext cx="91" cy="2651760"/>
           </a:xfrm>
           <a:prstGeom prst="line">
             <a:avLst/>
@@ -8307,7 +8307,7 @@
         <p:spPr>
           <a:xfrm>
             <a:off x="2710543" y="1417320"/>
-            <a:ext cx="91" cy="3246120"/>
+            <a:ext cx="91" cy="2651760"/>
           </a:xfrm>
           <a:prstGeom prst="line">
             <a:avLst/>
@@ -8330,7 +8330,7 @@
         <p:spPr>
           <a:xfrm>
             <a:off x="3056709" y="1417320"/>
-            <a:ext cx="91" cy="3246120"/>
+            <a:ext cx="91" cy="2651760"/>
           </a:xfrm>
           <a:prstGeom prst="line">
             <a:avLst/>
@@ -8353,7 +8353,7 @@
         <p:spPr>
           <a:xfrm>
             <a:off x="3402874" y="1417320"/>
-            <a:ext cx="91" cy="3246120"/>
+            <a:ext cx="91" cy="2651760"/>
           </a:xfrm>
           <a:prstGeom prst="line">
             <a:avLst/>
@@ -8376,7 +8376,7 @@
         <p:spPr>
           <a:xfrm>
             <a:off x="3749040" y="1417320"/>
-            <a:ext cx="91" cy="3246120"/>
+            <a:ext cx="91" cy="2651760"/>
           </a:xfrm>
           <a:prstGeom prst="line">
             <a:avLst/>
@@ -8399,7 +8399,7 @@
         <p:spPr>
           <a:xfrm>
             <a:off x="4095206" y="1417320"/>
-            <a:ext cx="91" cy="3246120"/>
+            <a:ext cx="91" cy="2651760"/>
           </a:xfrm>
           <a:prstGeom prst="line">
             <a:avLst/>
@@ -8422,7 +8422,7 @@
         <p:spPr>
           <a:xfrm>
             <a:off x="4441371" y="1417320"/>
-            <a:ext cx="91" cy="3246120"/>
+            <a:ext cx="91" cy="2651760"/>
           </a:xfrm>
           <a:prstGeom prst="line">
             <a:avLst/>
@@ -8445,7 +8445,7 @@
         <p:spPr>
           <a:xfrm>
             <a:off x="4787537" y="1417320"/>
-            <a:ext cx="91" cy="3246120"/>
+            <a:ext cx="91" cy="2651760"/>
           </a:xfrm>
           <a:prstGeom prst="line">
             <a:avLst/>
@@ -8468,7 +8468,7 @@
         <p:spPr>
           <a:xfrm>
             <a:off x="5133703" y="1417320"/>
-            <a:ext cx="91" cy="3246120"/>
+            <a:ext cx="91" cy="2651760"/>
           </a:xfrm>
           <a:prstGeom prst="line">
             <a:avLst/>
@@ -8491,7 +8491,7 @@
         <p:spPr>
           <a:xfrm>
             <a:off x="5479869" y="1417320"/>
-            <a:ext cx="91" cy="3246120"/>
+            <a:ext cx="91" cy="2651760"/>
           </a:xfrm>
           <a:prstGeom prst="line">
             <a:avLst/>
@@ -8514,7 +8514,7 @@
         <p:spPr>
           <a:xfrm>
             <a:off x="5826034" y="1417320"/>
-            <a:ext cx="91" cy="3246120"/>
+            <a:ext cx="91" cy="2651760"/>
           </a:xfrm>
           <a:prstGeom prst="line">
             <a:avLst/>
@@ -8537,7 +8537,7 @@
         <p:spPr>
           <a:xfrm>
             <a:off x="6172200" y="1417320"/>
-            <a:ext cx="91" cy="3246120"/>
+            <a:ext cx="91" cy="2651760"/>
           </a:xfrm>
           <a:prstGeom prst="line">
             <a:avLst/>
@@ -8559,7 +8559,7 @@
         </p:nvSpPr>
         <p:spPr>
           <a:xfrm>
-            <a:off x="1325880" y="4663440"/>
+            <a:off x="1325880" y="4069080"/>
             <a:ext cx="4846320" cy="91"/>
           </a:xfrm>
           <a:prstGeom prst="line">
@@ -8582,7 +8582,7 @@
         </p:nvSpPr>
         <p:spPr>
           <a:xfrm>
-            <a:off x="1325880" y="4338828"/>
+            <a:off x="1325880" y="3803904"/>
             <a:ext cx="4846320" cy="91"/>
           </a:xfrm>
           <a:prstGeom prst="line">
@@ -8605,7 +8605,7 @@
         </p:nvSpPr>
         <p:spPr>
           <a:xfrm>
-            <a:off x="1325880" y="4014216"/>
+            <a:off x="1325880" y="3538728"/>
             <a:ext cx="4846320" cy="91"/>
           </a:xfrm>
           <a:prstGeom prst="line">
@@ -8628,7 +8628,7 @@
         </p:nvSpPr>
         <p:spPr>
           <a:xfrm>
-            <a:off x="1325880" y="3689604"/>
+            <a:off x="1325880" y="3273552"/>
             <a:ext cx="4846320" cy="91"/>
           </a:xfrm>
           <a:prstGeom prst="line">
@@ -8651,7 +8651,7 @@
         </p:nvSpPr>
         <p:spPr>
           <a:xfrm>
-            <a:off x="1325880" y="3364992"/>
+            <a:off x="1325880" y="3008376"/>
             <a:ext cx="4846320" cy="91"/>
           </a:xfrm>
           <a:prstGeom prst="line">
@@ -8674,7 +8674,7 @@
         </p:nvSpPr>
         <p:spPr>
           <a:xfrm>
-            <a:off x="1325880" y="3040380"/>
+            <a:off x="1325880" y="2743200"/>
             <a:ext cx="4846320" cy="91"/>
           </a:xfrm>
           <a:prstGeom prst="line">
@@ -8697,7 +8697,7 @@
         </p:nvSpPr>
         <p:spPr>
           <a:xfrm>
-            <a:off x="1325880" y="2715768"/>
+            <a:off x="1325880" y="2478024"/>
             <a:ext cx="4846320" cy="91"/>
           </a:xfrm>
           <a:prstGeom prst="line">
@@ -8720,7 +8720,7 @@
         </p:nvSpPr>
         <p:spPr>
           <a:xfrm>
-            <a:off x="1325880" y="2391156"/>
+            <a:off x="1325880" y="2212848"/>
             <a:ext cx="4846320" cy="91"/>
           </a:xfrm>
           <a:prstGeom prst="line">
@@ -8743,7 +8743,7 @@
         </p:nvSpPr>
         <p:spPr>
           <a:xfrm>
-            <a:off x="1325880" y="2066544"/>
+            <a:off x="1325880" y="1947672"/>
             <a:ext cx="4846320" cy="91"/>
           </a:xfrm>
           <a:prstGeom prst="line">
@@ -8766,7 +8766,7 @@
         </p:nvSpPr>
         <p:spPr>
           <a:xfrm>
-            <a:off x="1325880" y="1741932"/>
+            <a:off x="1325880" y="1682496"/>
             <a:ext cx="4846320" cy="91"/>
           </a:xfrm>
           <a:prstGeom prst="line">
@@ -8812,7 +8812,7 @@
         </p:nvSpPr>
         <p:spPr>
           <a:xfrm>
-            <a:off x="1325880" y="4663440"/>
+            <a:off x="1325880" y="4069080"/>
             <a:ext cx="4846320" cy="91"/>
           </a:xfrm>
           <a:prstGeom prst="line">
@@ -8836,7 +8836,7 @@
         <p:spPr>
           <a:xfrm flipV="1">
             <a:off x="1325880" y="1417320"/>
-            <a:ext cx="91" cy="3246120"/>
+            <a:ext cx="91" cy="2651760"/>
           </a:xfrm>
           <a:prstGeom prst="line">
             <a:avLst/>
@@ -8858,7 +8858,7 @@
         </p:nvSpPr>
         <p:spPr>
           <a:xfrm>
-            <a:off x="1325880" y="4663440"/>
+            <a:off x="1325880" y="4069080"/>
             <a:ext cx="91" cy="54864"/>
           </a:xfrm>
           <a:prstGeom prst="line">
@@ -8881,7 +8881,7 @@
         </p:nvSpPr>
         <p:spPr>
           <a:xfrm>
-            <a:off x="1051560" y="4718304"/>
+            <a:off x="1051560" y="4123944"/>
             <a:ext cx="548640" cy="182880"/>
           </a:xfrm>
           <a:prstGeom prst="rect">
@@ -8920,7 +8920,7 @@
         </p:nvSpPr>
         <p:spPr>
           <a:xfrm>
-            <a:off x="2018211" y="4663440"/>
+            <a:off x="2018211" y="4069080"/>
             <a:ext cx="91" cy="54864"/>
           </a:xfrm>
           <a:prstGeom prst="line">
@@ -8943,7 +8943,7 @@
         </p:nvSpPr>
         <p:spPr>
           <a:xfrm>
-            <a:off x="1743891" y="4718304"/>
+            <a:off x="1743891" y="4123944"/>
             <a:ext cx="548640" cy="182880"/>
           </a:xfrm>
           <a:prstGeom prst="rect">
@@ -8982,7 +8982,7 @@
         </p:nvSpPr>
         <p:spPr>
           <a:xfrm>
-            <a:off x="2710543" y="4663440"/>
+            <a:off x="2710543" y="4069080"/>
             <a:ext cx="91" cy="54864"/>
           </a:xfrm>
           <a:prstGeom prst="line">
@@ -9005,7 +9005,7 @@
         </p:nvSpPr>
         <p:spPr>
           <a:xfrm>
-            <a:off x="2436223" y="4718304"/>
+            <a:off x="2436223" y="4123944"/>
             <a:ext cx="548640" cy="182880"/>
           </a:xfrm>
           <a:prstGeom prst="rect">
@@ -9044,7 +9044,7 @@
         </p:nvSpPr>
         <p:spPr>
           <a:xfrm>
-            <a:off x="3402874" y="4663440"/>
+            <a:off x="3402874" y="4069080"/>
             <a:ext cx="91" cy="54864"/>
           </a:xfrm>
           <a:prstGeom prst="line">
@@ -9067,7 +9067,7 @@
         </p:nvSpPr>
         <p:spPr>
           <a:xfrm>
-            <a:off x="3128554" y="4718304"/>
+            <a:off x="3128554" y="4123944"/>
             <a:ext cx="548640" cy="182880"/>
           </a:xfrm>
           <a:prstGeom prst="rect">
@@ -9106,7 +9106,7 @@
         </p:nvSpPr>
         <p:spPr>
           <a:xfrm>
-            <a:off x="4095206" y="4663440"/>
+            <a:off x="4095206" y="4069080"/>
             <a:ext cx="91" cy="54864"/>
           </a:xfrm>
           <a:prstGeom prst="line">
@@ -9129,7 +9129,7 @@
         </p:nvSpPr>
         <p:spPr>
           <a:xfrm>
-            <a:off x="3820886" y="4718304"/>
+            <a:off x="3820886" y="4123944"/>
             <a:ext cx="548640" cy="182880"/>
           </a:xfrm>
           <a:prstGeom prst="rect">
@@ -9168,7 +9168,7 @@
         </p:nvSpPr>
         <p:spPr>
           <a:xfrm>
-            <a:off x="4787537" y="4663440"/>
+            <a:off x="4787537" y="4069080"/>
             <a:ext cx="91" cy="54864"/>
           </a:xfrm>
           <a:prstGeom prst="line">
@@ -9191,7 +9191,7 @@
         </p:nvSpPr>
         <p:spPr>
           <a:xfrm>
-            <a:off x="4513217" y="4718304"/>
+            <a:off x="4513217" y="4123944"/>
             <a:ext cx="548640" cy="182880"/>
           </a:xfrm>
           <a:prstGeom prst="rect">
@@ -9230,7 +9230,7 @@
         </p:nvSpPr>
         <p:spPr>
           <a:xfrm>
-            <a:off x="5479869" y="4663440"/>
+            <a:off x="5479869" y="4069080"/>
             <a:ext cx="91" cy="54864"/>
           </a:xfrm>
           <a:prstGeom prst="line">
@@ -9253,7 +9253,7 @@
         </p:nvSpPr>
         <p:spPr>
           <a:xfrm>
-            <a:off x="5205549" y="4718304"/>
+            <a:off x="5205549" y="4123944"/>
             <a:ext cx="548640" cy="182880"/>
           </a:xfrm>
           <a:prstGeom prst="rect">
@@ -9292,7 +9292,7 @@
         </p:nvSpPr>
         <p:spPr>
           <a:xfrm>
-            <a:off x="6172200" y="4663440"/>
+            <a:off x="6172200" y="4069080"/>
             <a:ext cx="91" cy="54864"/>
           </a:xfrm>
           <a:prstGeom prst="line">
@@ -9315,7 +9315,7 @@
         </p:nvSpPr>
         <p:spPr>
           <a:xfrm>
-            <a:off x="5897880" y="4718304"/>
+            <a:off x="5897880" y="4123944"/>
             <a:ext cx="548640" cy="182880"/>
           </a:xfrm>
           <a:prstGeom prst="rect">
@@ -9354,7 +9354,7 @@
         </p:nvSpPr>
         <p:spPr>
           <a:xfrm>
-            <a:off x="1271016" y="4663440"/>
+            <a:off x="1271016" y="4069080"/>
             <a:ext cx="54864" cy="91"/>
           </a:xfrm>
           <a:prstGeom prst="line">
@@ -9377,7 +9377,7 @@
         </p:nvSpPr>
         <p:spPr>
           <a:xfrm>
-            <a:off x="886968" y="4572000"/>
+            <a:off x="886968" y="3977640"/>
             <a:ext cx="365760" cy="182880"/>
           </a:xfrm>
           <a:prstGeom prst="rect">
@@ -9416,7 +9416,7 @@
         </p:nvSpPr>
         <p:spPr>
           <a:xfrm>
-            <a:off x="1271016" y="4014216"/>
+            <a:off x="1271016" y="3538728"/>
             <a:ext cx="54864" cy="91"/>
           </a:xfrm>
           <a:prstGeom prst="line">
@@ -9439,7 +9439,7 @@
         </p:nvSpPr>
         <p:spPr>
           <a:xfrm>
-            <a:off x="886968" y="3922776"/>
+            <a:off x="886968" y="3447288"/>
             <a:ext cx="365760" cy="182880"/>
           </a:xfrm>
           <a:prstGeom prst="rect">
@@ -9478,7 +9478,7 @@
         </p:nvSpPr>
         <p:spPr>
           <a:xfrm>
-            <a:off x="1271016" y="3364992"/>
+            <a:off x="1271016" y="3008376"/>
             <a:ext cx="54864" cy="91"/>
           </a:xfrm>
           <a:prstGeom prst="line">
@@ -9501,7 +9501,7 @@
         </p:nvSpPr>
         <p:spPr>
           <a:xfrm>
-            <a:off x="886968" y="3273552"/>
+            <a:off x="886968" y="2916936"/>
             <a:ext cx="365760" cy="182880"/>
           </a:xfrm>
           <a:prstGeom prst="rect">
@@ -9540,7 +9540,7 @@
         </p:nvSpPr>
         <p:spPr>
           <a:xfrm>
-            <a:off x="1271016" y="2715768"/>
+            <a:off x="1271016" y="2478024"/>
             <a:ext cx="54864" cy="91"/>
           </a:xfrm>
           <a:prstGeom prst="line">
@@ -9563,7 +9563,7 @@
         </p:nvSpPr>
         <p:spPr>
           <a:xfrm>
-            <a:off x="886968" y="2624328"/>
+            <a:off x="886968" y="2386584"/>
             <a:ext cx="365760" cy="182880"/>
           </a:xfrm>
           <a:prstGeom prst="rect">
@@ -9602,7 +9602,7 @@
         </p:nvSpPr>
         <p:spPr>
           <a:xfrm>
-            <a:off x="1271016" y="2066544"/>
+            <a:off x="1271016" y="1947672"/>
             <a:ext cx="54864" cy="91"/>
           </a:xfrm>
           <a:prstGeom prst="line">
@@ -9625,7 +9625,7 @@
         </p:nvSpPr>
         <p:spPr>
           <a:xfrm>
-            <a:off x="886968" y="1975104"/>
+            <a:off x="886968" y="1856232"/>
             <a:ext cx="365760" cy="182880"/>
           </a:xfrm>
           <a:prstGeom prst="rect">
@@ -9726,7 +9726,7 @@
         </p:nvSpPr>
         <p:spPr>
           <a:xfrm>
-            <a:off x="1325880" y="4910328"/>
+            <a:off x="1325880" y="4315968"/>
             <a:ext cx="4846320" cy="256032"/>
           </a:xfrm>
           <a:prstGeom prst="rect">
@@ -9765,8 +9765,8 @@
         </p:nvSpPr>
         <p:spPr>
           <a:xfrm rot="16200000">
-            <a:off x="-864108" y="2912364"/>
-            <a:ext cx="3246120" cy="256032"/>
+            <a:off x="-566928" y="2615184"/>
+            <a:ext cx="2651760" cy="256032"/>
           </a:xfrm>
           <a:prstGeom prst="rect">
             <a:avLst/>
@@ -9804,8 +9804,8 @@
         </p:nvSpPr>
         <p:spPr>
           <a:xfrm flipV="1">
-            <a:off x="1325880" y="3202686"/>
-            <a:ext cx="4846320" cy="1460754"/>
+            <a:off x="1325880" y="2875788"/>
+            <a:ext cx="4846320" cy="1193292"/>
           </a:xfrm>
           <a:prstGeom prst="line">
             <a:avLst/>
@@ -9827,7 +9827,7 @@
         </p:nvSpPr>
         <p:spPr>
           <a:xfrm>
-            <a:off x="1280160" y="4617720"/>
+            <a:off x="1280160" y="4023360"/>
             <a:ext cx="91440" cy="91440"/>
           </a:xfrm>
           <a:prstGeom prst="line">
@@ -9850,7 +9850,7 @@
         </p:nvSpPr>
         <p:spPr>
           <a:xfrm flipV="1">
-            <a:off x="1280160" y="4617720"/>
+            <a:off x="1280160" y="4023360"/>
             <a:ext cx="91440" cy="91440"/>
           </a:xfrm>
           <a:prstGeom prst="line">
@@ -9873,7 +9873,7 @@
         </p:nvSpPr>
         <p:spPr>
           <a:xfrm>
-            <a:off x="1972491" y="4422953"/>
+            <a:off x="1972491" y="3864254"/>
             <a:ext cx="91440" cy="91440"/>
           </a:xfrm>
           <a:prstGeom prst="line">
@@ -9896,7 +9896,7 @@
         </p:nvSpPr>
         <p:spPr>
           <a:xfrm flipV="1">
-            <a:off x="1972491" y="4422953"/>
+            <a:off x="1972491" y="3864254"/>
             <a:ext cx="91440" cy="91440"/>
           </a:xfrm>
           <a:prstGeom prst="line">
@@ -9919,7 +9919,7 @@
         </p:nvSpPr>
         <p:spPr>
           <a:xfrm>
-            <a:off x="2664823" y="4228186"/>
+            <a:off x="2664823" y="3705149"/>
             <a:ext cx="91440" cy="91440"/>
           </a:xfrm>
           <a:prstGeom prst="line">
@@ -9942,7 +9942,7 @@
         </p:nvSpPr>
         <p:spPr>
           <a:xfrm flipV="1">
-            <a:off x="2664823" y="4228186"/>
+            <a:off x="2664823" y="3705149"/>
             <a:ext cx="91440" cy="91440"/>
           </a:xfrm>
           <a:prstGeom prst="line">
@@ -9965,7 +9965,7 @@
         </p:nvSpPr>
         <p:spPr>
           <a:xfrm>
-            <a:off x="3357154" y="4000957"/>
+            <a:off x="3357154" y="3519526"/>
             <a:ext cx="91440" cy="91440"/>
           </a:xfrm>
           <a:prstGeom prst="line">
@@ -9988,7 +9988,7 @@
         </p:nvSpPr>
         <p:spPr>
           <a:xfrm flipV="1">
-            <a:off x="3357154" y="4000957"/>
+            <a:off x="3357154" y="3519526"/>
             <a:ext cx="91440" cy="91440"/>
           </a:xfrm>
           <a:prstGeom prst="line">
@@ -10011,7 +10011,7 @@
         </p:nvSpPr>
         <p:spPr>
           <a:xfrm>
-            <a:off x="4049486" y="3806190"/>
+            <a:off x="4049486" y="3360420"/>
             <a:ext cx="91440" cy="91440"/>
           </a:xfrm>
           <a:prstGeom prst="line">
@@ -10034,7 +10034,7 @@
         </p:nvSpPr>
         <p:spPr>
           <a:xfrm flipV="1">
-            <a:off x="4049486" y="3806190"/>
+            <a:off x="4049486" y="3360420"/>
             <a:ext cx="91440" cy="91440"/>
           </a:xfrm>
           <a:prstGeom prst="line">
@@ -10057,7 +10057,7 @@
         </p:nvSpPr>
         <p:spPr>
           <a:xfrm>
-            <a:off x="4741817" y="3578962"/>
+            <a:off x="4741817" y="3174797"/>
             <a:ext cx="91440" cy="91440"/>
           </a:xfrm>
           <a:prstGeom prst="line">
@@ -10080,7 +10080,7 @@
         </p:nvSpPr>
         <p:spPr>
           <a:xfrm flipV="1">
-            <a:off x="4741817" y="3578962"/>
+            <a:off x="4741817" y="3174797"/>
             <a:ext cx="91440" cy="91440"/>
           </a:xfrm>
           <a:prstGeom prst="line">
@@ -10103,7 +10103,7 @@
         </p:nvSpPr>
         <p:spPr>
           <a:xfrm>
-            <a:off x="5434149" y="3384194"/>
+            <a:off x="5434149" y="3015691"/>
             <a:ext cx="91440" cy="91440"/>
           </a:xfrm>
           <a:prstGeom prst="line">
@@ -10126,7 +10126,7 @@
         </p:nvSpPr>
         <p:spPr>
           <a:xfrm flipV="1">
-            <a:off x="5434149" y="3384194"/>
+            <a:off x="5434149" y="3015691"/>
             <a:ext cx="91440" cy="91440"/>
           </a:xfrm>
           <a:prstGeom prst="line">
@@ -10149,7 +10149,7 @@
         </p:nvSpPr>
         <p:spPr>
           <a:xfrm>
-            <a:off x="6126480" y="3156966"/>
+            <a:off x="6126480" y="2830068"/>
             <a:ext cx="91440" cy="91440"/>
           </a:xfrm>
           <a:prstGeom prst="line">
@@ -10172,7 +10172,7 @@
         </p:nvSpPr>
         <p:spPr>
           <a:xfrm flipV="1">
-            <a:off x="6126480" y="3156966"/>
+            <a:off x="6126480" y="2830068"/>
             <a:ext cx="91440" cy="91440"/>
           </a:xfrm>
           <a:prstGeom prst="line">
@@ -10195,8 +10195,8 @@
         </p:nvSpPr>
         <p:spPr>
           <a:xfrm flipV="1">
-            <a:off x="1325880" y="1741932"/>
-            <a:ext cx="4846320" cy="2921508"/>
+            <a:off x="1325880" y="1682496"/>
+            <a:ext cx="4846320" cy="2386584"/>
           </a:xfrm>
           <a:prstGeom prst="line">
             <a:avLst/>
@@ -10218,7 +10218,7 @@
         </p:nvSpPr>
         <p:spPr>
           <a:xfrm>
-            <a:off x="1280160" y="4617720"/>
+            <a:off x="1280160" y="4023360"/>
             <a:ext cx="91440" cy="91440"/>
           </a:xfrm>
           <a:prstGeom prst="line">
@@ -10241,7 +10241,7 @@
         </p:nvSpPr>
         <p:spPr>
           <a:xfrm flipV="1">
-            <a:off x="1280160" y="4617720"/>
+            <a:off x="1280160" y="4023360"/>
             <a:ext cx="91440" cy="91440"/>
           </a:xfrm>
           <a:prstGeom prst="line">
@@ -10264,7 +10264,7 @@
         </p:nvSpPr>
         <p:spPr>
           <a:xfrm>
-            <a:off x="1972491" y="4228186"/>
+            <a:off x="1972491" y="3705149"/>
             <a:ext cx="91440" cy="91440"/>
           </a:xfrm>
           <a:prstGeom prst="line">
@@ -10287,7 +10287,7 @@
         </p:nvSpPr>
         <p:spPr>
           <a:xfrm flipV="1">
-            <a:off x="1972491" y="4228186"/>
+            <a:off x="1972491" y="3705149"/>
             <a:ext cx="91440" cy="91440"/>
           </a:xfrm>
           <a:prstGeom prst="line">
@@ -10310,7 +10310,7 @@
         </p:nvSpPr>
         <p:spPr>
           <a:xfrm>
-            <a:off x="2664823" y="3806190"/>
+            <a:off x="2664823" y="3360420"/>
             <a:ext cx="91440" cy="91440"/>
           </a:xfrm>
           <a:prstGeom prst="line">
@@ -10333,7 +10333,7 @@
         </p:nvSpPr>
         <p:spPr>
           <a:xfrm flipV="1">
-            <a:off x="2664823" y="3806190"/>
+            <a:off x="2664823" y="3360420"/>
             <a:ext cx="91440" cy="91440"/>
           </a:xfrm>
           <a:prstGeom prst="line">
@@ -10356,7 +10356,7 @@
         </p:nvSpPr>
         <p:spPr>
           <a:xfrm>
-            <a:off x="3357154" y="3384194"/>
+            <a:off x="3357154" y="3015691"/>
             <a:ext cx="91440" cy="91440"/>
           </a:xfrm>
           <a:prstGeom prst="line">
@@ -10379,7 +10379,7 @@
         </p:nvSpPr>
         <p:spPr>
           <a:xfrm flipV="1">
-            <a:off x="3357154" y="3384194"/>
+            <a:off x="3357154" y="3015691"/>
             <a:ext cx="91440" cy="91440"/>
           </a:xfrm>
           <a:prstGeom prst="line">
@@ -10402,7 +10402,7 @@
         </p:nvSpPr>
         <p:spPr>
           <a:xfrm>
-            <a:off x="4049486" y="2962199"/>
+            <a:off x="4049486" y="2670962"/>
             <a:ext cx="91440" cy="91440"/>
           </a:xfrm>
           <a:prstGeom prst="line">
@@ -10425,7 +10425,7 @@
         </p:nvSpPr>
         <p:spPr>
           <a:xfrm flipV="1">
-            <a:off x="4049486" y="2962199"/>
+            <a:off x="4049486" y="2670962"/>
             <a:ext cx="91440" cy="91440"/>
           </a:xfrm>
           <a:prstGeom prst="line">
@@ -10448,7 +10448,7 @@
         </p:nvSpPr>
         <p:spPr>
           <a:xfrm>
-            <a:off x="4741817" y="2540203"/>
+            <a:off x="4741817" y="2326234"/>
             <a:ext cx="91440" cy="91440"/>
           </a:xfrm>
           <a:prstGeom prst="line">
@@ -10471,7 +10471,7 @@
         </p:nvSpPr>
         <p:spPr>
           <a:xfrm flipV="1">
-            <a:off x="4741817" y="2540203"/>
+            <a:off x="4741817" y="2326234"/>
             <a:ext cx="91440" cy="91440"/>
           </a:xfrm>
           <a:prstGeom prst="line">
@@ -10494,7 +10494,7 @@
         </p:nvSpPr>
         <p:spPr>
           <a:xfrm>
-            <a:off x="5434149" y="2118208"/>
+            <a:off x="5434149" y="1981505"/>
             <a:ext cx="91440" cy="91440"/>
           </a:xfrm>
           <a:prstGeom prst="line">
@@ -10517,7 +10517,7 @@
         </p:nvSpPr>
         <p:spPr>
           <a:xfrm flipV="1">
-            <a:off x="5434149" y="2118208"/>
+            <a:off x="5434149" y="1981505"/>
             <a:ext cx="91440" cy="91440"/>
           </a:xfrm>
           <a:prstGeom prst="line">
@@ -10540,7 +10540,7 @@
         </p:nvSpPr>
         <p:spPr>
           <a:xfrm>
-            <a:off x="6126480" y="1696212"/>
+            <a:off x="6126480" y="1636776"/>
             <a:ext cx="91440" cy="91440"/>
           </a:xfrm>
           <a:prstGeom prst="line">
@@ -10563,7 +10563,7 @@
         </p:nvSpPr>
         <p:spPr>
           <a:xfrm flipV="1">
-            <a:off x="6126480" y="1696212"/>
+            <a:off x="6126480" y="1636776"/>
             <a:ext cx="91440" cy="91440"/>
           </a:xfrm>
           <a:prstGeom prst="line">
@@ -10586,7 +10586,7 @@
         </p:nvSpPr>
         <p:spPr>
           <a:xfrm>
-            <a:off x="4510605" y="2066544"/>
+            <a:off x="4510605" y="1947672"/>
             <a:ext cx="1463040" cy="201168"/>
           </a:xfrm>
           <a:prstGeom prst="rect">
@@ -10636,7 +10636,7 @@
         </p:nvSpPr>
         <p:spPr>
           <a:xfrm>
-            <a:off x="4787537" y="3949294"/>
+            <a:off x="4787537" y="3485693"/>
             <a:ext cx="1463040" cy="201168"/>
           </a:xfrm>
           <a:prstGeom prst="rect">
@@ -10693,7 +10693,7 @@
           </p:nvPr>
         </p:nvGraphicFramePr>
         <p:xfrm>
-          <a:off x="640080" y="4983480"/>
+          <a:off x="640080" y="4553712"/>
           <a:ext cx="5577840" cy="914400"/>
         </p:xfrm>
         <a:graphic>
@@ -11951,11 +11951,11 @@
         <p:spPr>
           <a:xfrm>
             <a:off x="6675120" y="1188720"/>
-            <a:ext cx="5102352" cy="1874520"/>
+            <a:ext cx="5102352" cy="1463040"/>
           </a:xfrm>
           <a:prstGeom prst="roundRect">
             <a:avLst>
-              <a:gd name="adj" fmla="val 2927"/>
+              <a:gd name="adj" fmla="val 3750"/>
             </a:avLst>
           </a:prstGeom>
           <a:solidFill>
@@ -12017,7 +12017,7 @@
         <p:spPr>
           <a:xfrm>
             <a:off x="6839712" y="1572768"/>
-            <a:ext cx="4773168" cy="1417320"/>
+            <a:ext cx="4773168" cy="1005840"/>
           </a:xfrm>
           <a:prstGeom prst="rect">
             <a:avLst/>
@@ -12170,12 +12170,12 @@
         </p:nvSpPr>
         <p:spPr>
           <a:xfrm>
-            <a:off x="6675120" y="3200400"/>
-            <a:ext cx="5102352" cy="2514600"/>
+            <a:off x="6675120" y="2788920"/>
+            <a:ext cx="5102352" cy="2926080"/>
           </a:xfrm>
           <a:prstGeom prst="roundRect">
             <a:avLst>
-              <a:gd name="adj" fmla="val 2182"/>
+              <a:gd name="adj" fmla="val 1875"/>
             </a:avLst>
           </a:prstGeom>
           <a:solidFill>
@@ -12197,7 +12197,7 @@
         </p:nvSpPr>
         <p:spPr>
           <a:xfrm>
-            <a:off x="6839712" y="3291840"/>
+            <a:off x="6839712" y="2880360"/>
             <a:ext cx="4773168" cy="292608"/>
           </a:xfrm>
           <a:prstGeom prst="rect">
@@ -12236,8 +12236,8 @@
         </p:nvSpPr>
         <p:spPr>
           <a:xfrm>
-            <a:off x="6839712" y="3621024"/>
-            <a:ext cx="4773168" cy="2020824"/>
+            <a:off x="6839712" y="3209544"/>
+            <a:ext cx="4773168" cy="2432304"/>
           </a:xfrm>
           <a:prstGeom prst="rect">
             <a:avLst/>
@@ -12257,7 +12257,7 @@
               <a:buChar char="▪"/>
             </a:pPr>
             <a:r>
-              <a:rPr lang="en-US" sz="1050" b="1" dirty="0">
+              <a:rPr lang="en-US" sz="1150" b="1" dirty="0">
                 <a:solidFill>
                   <a:srgbClr val="262B3A"/>
                 </a:solidFill>
@@ -12268,7 +12268,7 @@
               <a:t>D</a:t>
             </a:r>
             <a:r>
-              <a:rPr lang="en-US" sz="1050" dirty="0">
+              <a:rPr lang="en-US" sz="1150" dirty="0">
                 <a:solidFill>
                   <a:srgbClr val="262B3A"/>
                 </a:solidFill>
@@ -12279,7 +12279,7 @@
               <a:t> (zinc) best: 0 mg, zinc corrodes instead. </a:t>
             </a:r>
             <a:r>
-              <a:rPr lang="en-US" sz="1050" b="1" dirty="0">
+              <a:rPr lang="en-US" sz="1150" b="1" dirty="0">
                 <a:solidFill>
                   <a:srgbClr val="262B3A"/>
                 </a:solidFill>
@@ -12290,7 +12290,7 @@
               <a:t>C</a:t>
             </a:r>
             <a:r>
-              <a:rPr lang="en-US" sz="1050" dirty="0">
+              <a:rPr lang="en-US" sz="1150" dirty="0">
                 <a:solidFill>
                   <a:srgbClr val="262B3A"/>
                 </a:solidFill>
@@ -12300,7 +12300,7 @@
               </a:rPr>
               <a:t> (paint) 3 mg: barrier works until chipped.</a:t>
             </a:r>
-            <a:endParaRPr lang="en-US" sz="1050" dirty="0"/>
+            <a:endParaRPr lang="en-US" sz="1150" dirty="0"/>
           </a:p>
           <a:p>
             <a:pPr marL="152400" indent="-152400">
@@ -12311,7 +12311,7 @@
               <a:buChar char="▪"/>
             </a:pPr>
             <a:r>
-              <a:rPr lang="en-US" sz="1050" b="1" dirty="0">
+              <a:rPr lang="en-US" sz="1150" b="1" dirty="0">
                 <a:solidFill>
                   <a:srgbClr val="262B3A"/>
                 </a:solidFill>
@@ -12322,7 +12322,7 @@
               <a:t>E</a:t>
             </a:r>
             <a:r>
-              <a:rPr lang="en-US" sz="1050" dirty="0">
+              <a:rPr lang="en-US" sz="1150" dirty="0">
                 <a:solidFill>
                   <a:srgbClr val="262B3A"/>
                 </a:solidFill>
@@ -12333,7 +12333,7 @@
               <a:t> (copper) 70 mg, </a:t>
             </a:r>
             <a:r>
-              <a:rPr lang="en-US" sz="1050" b="1" dirty="0">
+              <a:rPr lang="en-US" sz="1150" b="1" dirty="0">
                 <a:solidFill>
                   <a:srgbClr val="262B3A"/>
                 </a:solidFill>
@@ -12344,7 +12344,7 @@
               <a:t>more</a:t>
             </a:r>
             <a:r>
-              <a:rPr lang="en-US" sz="1050" dirty="0">
+              <a:rPr lang="en-US" sz="1150" dirty="0">
                 <a:solidFill>
                   <a:srgbClr val="262B3A"/>
                 </a:solidFill>
@@ -12355,7 +12355,7 @@
               <a:t> than A: a less reactive metal makes iron rust </a:t>
             </a:r>
             <a:r>
-              <a:rPr lang="en-US" sz="1050" b="1" dirty="0">
+              <a:rPr lang="en-US" sz="1150" b="1" dirty="0">
                 <a:solidFill>
                   <a:srgbClr val="262B3A"/>
                 </a:solidFill>
@@ -12366,7 +12366,7 @@
               <a:t>faster</a:t>
             </a:r>
             <a:r>
-              <a:rPr lang="en-US" sz="1050" dirty="0">
+              <a:rPr lang="en-US" sz="1150" dirty="0">
                 <a:solidFill>
                   <a:srgbClr val="262B3A"/>
                 </a:solidFill>
@@ -12376,7 +12376,7 @@
               </a:rPr>
               <a:t>.</a:t>
             </a:r>
-            <a:endParaRPr lang="en-US" sz="1050" dirty="0"/>
+            <a:endParaRPr lang="en-US" sz="1150" dirty="0"/>
           </a:p>
           <a:p>
             <a:pPr marL="152400" indent="-152400">
@@ -12387,7 +12387,7 @@
               <a:buChar char="▪"/>
             </a:pPr>
             <a:r>
-              <a:rPr lang="en-US" sz="1050" b="1" dirty="0">
+              <a:rPr lang="en-US" sz="1150" b="1" dirty="0">
                 <a:solidFill>
                   <a:srgbClr val="262B3A"/>
                 </a:solidFill>
@@ -12398,7 +12398,7 @@
               <a:t>Errors</a:t>
             </a:r>
             <a:r>
-              <a:rPr lang="en-US" sz="1050" dirty="0">
+              <a:rPr lang="en-US" sz="1150" dirty="0">
                 <a:solidFill>
                   <a:srgbClr val="262B3A"/>
                 </a:solidFill>
@@ -12408,7 +12408,7 @@
               </a:rPr>
               <a:t>: rust flakes fall off (gain too low); nail still wet (too high); nails differ → use one batch.</a:t>
             </a:r>
-            <a:endParaRPr lang="en-US" sz="1050" dirty="0"/>
+            <a:endParaRPr lang="en-US" sz="1150" dirty="0"/>
           </a:p>
           <a:p>
             <a:pPr marL="152400" indent="-152400">
@@ -12419,7 +12419,7 @@
               <a:buChar char="▪"/>
             </a:pPr>
             <a:r>
-              <a:rPr lang="en-US" sz="1050" b="1" dirty="0">
+              <a:rPr lang="en-US" sz="1150" b="1" dirty="0">
                 <a:solidFill>
                   <a:srgbClr val="262B3A"/>
                 </a:solidFill>
@@ -12430,7 +12430,7 @@
               <a:t>Improve</a:t>
             </a:r>
             <a:r>
-              <a:rPr lang="en-US" sz="1050" dirty="0">
+              <a:rPr lang="en-US" sz="1150" dirty="0">
                 <a:solidFill>
                   <a:srgbClr val="262B3A"/>
                 </a:solidFill>
@@ -12441,7 +12441,7 @@
               <a:t>: 3 nails per tube and find a </a:t>
             </a:r>
             <a:r>
-              <a:rPr lang="en-US" sz="1050" b="1" dirty="0">
+              <a:rPr lang="en-US" sz="1150" b="1" dirty="0">
                 <a:solidFill>
                   <a:srgbClr val="262B3A"/>
                 </a:solidFill>
@@ -12452,7 +12452,7 @@
               <a:t>mean</a:t>
             </a:r>
             <a:r>
-              <a:rPr lang="en-US" sz="1050" dirty="0">
+              <a:rPr lang="en-US" sz="1150" dirty="0">
                 <a:solidFill>
                   <a:srgbClr val="262B3A"/>
                 </a:solidFill>
@@ -12462,7 +12462,7 @@
               </a:rPr>
               <a:t>; spot anomalies; keep tubes at the same temperature.</a:t>
             </a:r>
-            <a:endParaRPr lang="en-US" sz="1050" dirty="0"/>
+            <a:endParaRPr lang="en-US" sz="1150" dirty="0"/>
           </a:p>
         </p:txBody>
       </p:sp>
@@ -16322,7 +16322,7 @@
         <p:spPr>
           <a:xfrm>
             <a:off x="1371600" y="1417320"/>
-            <a:ext cx="3291840" cy="3017520"/>
+            <a:ext cx="3291840" cy="2697480"/>
           </a:xfrm>
           <a:prstGeom prst="rect">
             <a:avLst/>
@@ -16342,7 +16342,7 @@
         <p:spPr>
           <a:xfrm>
             <a:off x="1371600" y="1417320"/>
-            <a:ext cx="91" cy="3017520"/>
+            <a:ext cx="91" cy="2697480"/>
           </a:xfrm>
           <a:prstGeom prst="line">
             <a:avLst/>
@@ -16365,7 +16365,7 @@
         <p:spPr>
           <a:xfrm>
             <a:off x="1920240" y="1417320"/>
-            <a:ext cx="91" cy="3017520"/>
+            <a:ext cx="91" cy="2697480"/>
           </a:xfrm>
           <a:prstGeom prst="line">
             <a:avLst/>
@@ -16388,7 +16388,7 @@
         <p:spPr>
           <a:xfrm>
             <a:off x="2468880" y="1417320"/>
-            <a:ext cx="91" cy="3017520"/>
+            <a:ext cx="91" cy="2697480"/>
           </a:xfrm>
           <a:prstGeom prst="line">
             <a:avLst/>
@@ -16411,7 +16411,7 @@
         <p:spPr>
           <a:xfrm>
             <a:off x="3017520" y="1417320"/>
-            <a:ext cx="91" cy="3017520"/>
+            <a:ext cx="91" cy="2697480"/>
           </a:xfrm>
           <a:prstGeom prst="line">
             <a:avLst/>
@@ -16434,7 +16434,7 @@
         <p:spPr>
           <a:xfrm>
             <a:off x="3566160" y="1417320"/>
-            <a:ext cx="91" cy="3017520"/>
+            <a:ext cx="91" cy="2697480"/>
           </a:xfrm>
           <a:prstGeom prst="line">
             <a:avLst/>
@@ -16457,7 +16457,7 @@
         <p:spPr>
           <a:xfrm>
             <a:off x="4114800" y="1417320"/>
-            <a:ext cx="91" cy="3017520"/>
+            <a:ext cx="91" cy="2697480"/>
           </a:xfrm>
           <a:prstGeom prst="line">
             <a:avLst/>
@@ -16480,7 +16480,7 @@
         <p:spPr>
           <a:xfrm>
             <a:off x="4663440" y="1417320"/>
-            <a:ext cx="91" cy="3017520"/>
+            <a:ext cx="91" cy="2697480"/>
           </a:xfrm>
           <a:prstGeom prst="line">
             <a:avLst/>
@@ -16502,7 +16502,7 @@
         </p:nvSpPr>
         <p:spPr>
           <a:xfrm>
-            <a:off x="1371600" y="4434840"/>
+            <a:off x="1371600" y="4114800"/>
             <a:ext cx="3291840" cy="91"/>
           </a:xfrm>
           <a:prstGeom prst="line">
@@ -16525,7 +16525,7 @@
         </p:nvSpPr>
         <p:spPr>
           <a:xfrm>
-            <a:off x="1371600" y="4133088"/>
+            <a:off x="1371600" y="3845052"/>
             <a:ext cx="3291840" cy="91"/>
           </a:xfrm>
           <a:prstGeom prst="line">
@@ -16548,7 +16548,7 @@
         </p:nvSpPr>
         <p:spPr>
           <a:xfrm>
-            <a:off x="1371600" y="3831336"/>
+            <a:off x="1371600" y="3575304"/>
             <a:ext cx="3291840" cy="91"/>
           </a:xfrm>
           <a:prstGeom prst="line">
@@ -16571,7 +16571,7 @@
         </p:nvSpPr>
         <p:spPr>
           <a:xfrm>
-            <a:off x="1371600" y="3529584"/>
+            <a:off x="1371600" y="3305556"/>
             <a:ext cx="3291840" cy="91"/>
           </a:xfrm>
           <a:prstGeom prst="line">
@@ -16594,7 +16594,7 @@
         </p:nvSpPr>
         <p:spPr>
           <a:xfrm>
-            <a:off x="1371600" y="3227832"/>
+            <a:off x="1371600" y="3035808"/>
             <a:ext cx="3291840" cy="91"/>
           </a:xfrm>
           <a:prstGeom prst="line">
@@ -16617,7 +16617,7 @@
         </p:nvSpPr>
         <p:spPr>
           <a:xfrm>
-            <a:off x="1371600" y="2926080"/>
+            <a:off x="1371600" y="2766060"/>
             <a:ext cx="3291840" cy="91"/>
           </a:xfrm>
           <a:prstGeom prst="line">
@@ -16640,7 +16640,7 @@
         </p:nvSpPr>
         <p:spPr>
           <a:xfrm>
-            <a:off x="1371600" y="2624328"/>
+            <a:off x="1371600" y="2496312"/>
             <a:ext cx="3291840" cy="91"/>
           </a:xfrm>
           <a:prstGeom prst="line">
@@ -16663,7 +16663,7 @@
         </p:nvSpPr>
         <p:spPr>
           <a:xfrm>
-            <a:off x="1371600" y="2322576"/>
+            <a:off x="1371600" y="2226564"/>
             <a:ext cx="3291840" cy="91"/>
           </a:xfrm>
           <a:prstGeom prst="line">
@@ -16686,7 +16686,7 @@
         </p:nvSpPr>
         <p:spPr>
           <a:xfrm>
-            <a:off x="1371600" y="2020824"/>
+            <a:off x="1371600" y="1956816"/>
             <a:ext cx="3291840" cy="91"/>
           </a:xfrm>
           <a:prstGeom prst="line">
@@ -16709,7 +16709,7 @@
         </p:nvSpPr>
         <p:spPr>
           <a:xfrm>
-            <a:off x="1371600" y="1719072"/>
+            <a:off x="1371600" y="1687068"/>
             <a:ext cx="3291840" cy="91"/>
           </a:xfrm>
           <a:prstGeom prst="line">
@@ -16755,7 +16755,7 @@
         </p:nvSpPr>
         <p:spPr>
           <a:xfrm>
-            <a:off x="1371600" y="4434840"/>
+            <a:off x="1371600" y="4114800"/>
             <a:ext cx="3291840" cy="91"/>
           </a:xfrm>
           <a:prstGeom prst="line">
@@ -16779,7 +16779,7 @@
         <p:spPr>
           <a:xfrm flipV="1">
             <a:off x="1371600" y="1417320"/>
-            <a:ext cx="91" cy="3017520"/>
+            <a:ext cx="91" cy="2697480"/>
           </a:xfrm>
           <a:prstGeom prst="line">
             <a:avLst/>
@@ -16801,7 +16801,7 @@
         </p:nvSpPr>
         <p:spPr>
           <a:xfrm>
-            <a:off x="1371600" y="4434840"/>
+            <a:off x="1371600" y="4114800"/>
             <a:ext cx="91" cy="54864"/>
           </a:xfrm>
           <a:prstGeom prst="line">
@@ -16824,7 +16824,7 @@
         </p:nvSpPr>
         <p:spPr>
           <a:xfrm>
-            <a:off x="1097280" y="4489704"/>
+            <a:off x="1097280" y="4169664"/>
             <a:ext cx="548640" cy="182880"/>
           </a:xfrm>
           <a:prstGeom prst="rect">
@@ -16852,7 +16852,7 @@
         </p:nvSpPr>
         <p:spPr>
           <a:xfrm>
-            <a:off x="2468880" y="4434840"/>
+            <a:off x="2468880" y="4114800"/>
             <a:ext cx="91" cy="54864"/>
           </a:xfrm>
           <a:prstGeom prst="line">
@@ -16875,7 +16875,7 @@
         </p:nvSpPr>
         <p:spPr>
           <a:xfrm>
-            <a:off x="2194560" y="4489704"/>
+            <a:off x="2194560" y="4169664"/>
             <a:ext cx="548640" cy="182880"/>
           </a:xfrm>
           <a:prstGeom prst="rect">
@@ -16903,7 +16903,7 @@
         </p:nvSpPr>
         <p:spPr>
           <a:xfrm>
-            <a:off x="3566160" y="4434840"/>
+            <a:off x="3566160" y="4114800"/>
             <a:ext cx="91" cy="54864"/>
           </a:xfrm>
           <a:prstGeom prst="line">
@@ -16926,7 +16926,7 @@
         </p:nvSpPr>
         <p:spPr>
           <a:xfrm>
-            <a:off x="3291840" y="4489704"/>
+            <a:off x="3291840" y="4169664"/>
             <a:ext cx="548640" cy="182880"/>
           </a:xfrm>
           <a:prstGeom prst="rect">
@@ -16954,7 +16954,7 @@
         </p:nvSpPr>
         <p:spPr>
           <a:xfrm>
-            <a:off x="4663440" y="4434840"/>
+            <a:off x="4663440" y="4114800"/>
             <a:ext cx="91" cy="54864"/>
           </a:xfrm>
           <a:prstGeom prst="line">
@@ -16977,7 +16977,7 @@
         </p:nvSpPr>
         <p:spPr>
           <a:xfrm>
-            <a:off x="4389120" y="4489704"/>
+            <a:off x="4389120" y="4169664"/>
             <a:ext cx="548640" cy="182880"/>
           </a:xfrm>
           <a:prstGeom prst="rect">
@@ -17005,7 +17005,7 @@
         </p:nvSpPr>
         <p:spPr>
           <a:xfrm>
-            <a:off x="1316736" y="4434840"/>
+            <a:off x="1316736" y="4114800"/>
             <a:ext cx="54864" cy="91"/>
           </a:xfrm>
           <a:prstGeom prst="line">
@@ -17028,7 +17028,7 @@
         </p:nvSpPr>
         <p:spPr>
           <a:xfrm>
-            <a:off x="932688" y="4343400"/>
+            <a:off x="932688" y="4023360"/>
             <a:ext cx="365760" cy="182880"/>
           </a:xfrm>
           <a:prstGeom prst="rect">
@@ -17067,7 +17067,7 @@
         </p:nvSpPr>
         <p:spPr>
           <a:xfrm>
-            <a:off x="1316736" y="3831336"/>
+            <a:off x="1316736" y="3575304"/>
             <a:ext cx="54864" cy="91"/>
           </a:xfrm>
           <a:prstGeom prst="line">
@@ -17090,7 +17090,7 @@
         </p:nvSpPr>
         <p:spPr>
           <a:xfrm>
-            <a:off x="932688" y="3739896"/>
+            <a:off x="932688" y="3483864"/>
             <a:ext cx="365760" cy="182880"/>
           </a:xfrm>
           <a:prstGeom prst="rect">
@@ -17129,7 +17129,7 @@
         </p:nvSpPr>
         <p:spPr>
           <a:xfrm>
-            <a:off x="1316736" y="3227832"/>
+            <a:off x="1316736" y="3035808"/>
             <a:ext cx="54864" cy="91"/>
           </a:xfrm>
           <a:prstGeom prst="line">
@@ -17152,7 +17152,7 @@
         </p:nvSpPr>
         <p:spPr>
           <a:xfrm>
-            <a:off x="932688" y="3136392"/>
+            <a:off x="932688" y="2944368"/>
             <a:ext cx="365760" cy="182880"/>
           </a:xfrm>
           <a:prstGeom prst="rect">
@@ -17191,7 +17191,7 @@
         </p:nvSpPr>
         <p:spPr>
           <a:xfrm>
-            <a:off x="1316736" y="2624328"/>
+            <a:off x="1316736" y="2496312"/>
             <a:ext cx="54864" cy="91"/>
           </a:xfrm>
           <a:prstGeom prst="line">
@@ -17214,7 +17214,7 @@
         </p:nvSpPr>
         <p:spPr>
           <a:xfrm>
-            <a:off x="932688" y="2532888"/>
+            <a:off x="932688" y="2404872"/>
             <a:ext cx="365760" cy="182880"/>
           </a:xfrm>
           <a:prstGeom prst="rect">
@@ -17253,7 +17253,7 @@
         </p:nvSpPr>
         <p:spPr>
           <a:xfrm>
-            <a:off x="1316736" y="2020824"/>
+            <a:off x="1316736" y="1956816"/>
             <a:ext cx="54864" cy="91"/>
           </a:xfrm>
           <a:prstGeom prst="line">
@@ -17276,7 +17276,7 @@
         </p:nvSpPr>
         <p:spPr>
           <a:xfrm>
-            <a:off x="932688" y="1929384"/>
+            <a:off x="932688" y="1865376"/>
             <a:ext cx="365760" cy="182880"/>
           </a:xfrm>
           <a:prstGeom prst="rect">
@@ -17377,8 +17377,8 @@
         </p:nvSpPr>
         <p:spPr>
           <a:xfrm rot="16200000">
-            <a:off x="-704088" y="2798064"/>
-            <a:ext cx="3017520" cy="256032"/>
+            <a:off x="-544068" y="2638044"/>
+            <a:ext cx="2697480" cy="256032"/>
           </a:xfrm>
           <a:prstGeom prst="rect">
             <a:avLst/>
@@ -17416,8 +17416,8 @@
         </p:nvSpPr>
         <p:spPr>
           <a:xfrm>
-            <a:off x="2194560" y="3831336"/>
-            <a:ext cx="548640" cy="603504"/>
+            <a:off x="2194560" y="3575304"/>
+            <a:ext cx="548640" cy="539496"/>
           </a:xfrm>
           <a:prstGeom prst="rect">
             <a:avLst/>
@@ -17441,8 +17441,8 @@
         </p:nvSpPr>
         <p:spPr>
           <a:xfrm>
-            <a:off x="2194560" y="3378708"/>
-            <a:ext cx="548640" cy="452628"/>
+            <a:off x="2194560" y="3170682"/>
+            <a:ext cx="548640" cy="404622"/>
           </a:xfrm>
           <a:prstGeom prst="rect">
             <a:avLst/>
@@ -17466,8 +17466,8 @@
         </p:nvSpPr>
         <p:spPr>
           <a:xfrm>
-            <a:off x="2194560" y="3303270"/>
-            <a:ext cx="548640" cy="75438"/>
+            <a:off x="2194560" y="3103245"/>
+            <a:ext cx="548640" cy="67437"/>
           </a:xfrm>
           <a:prstGeom prst="rect">
             <a:avLst/>
@@ -17491,8 +17491,8 @@
         </p:nvSpPr>
         <p:spPr>
           <a:xfrm>
-            <a:off x="2194560" y="3227832"/>
-            <a:ext cx="548640" cy="75438"/>
+            <a:off x="2194560" y="3035808"/>
+            <a:ext cx="548640" cy="67437"/>
           </a:xfrm>
           <a:prstGeom prst="rect">
             <a:avLst/>
@@ -17516,8 +17516,8 @@
         </p:nvSpPr>
         <p:spPr>
           <a:xfrm>
-            <a:off x="3291840" y="3680460"/>
-            <a:ext cx="548640" cy="754380"/>
+            <a:off x="3291840" y="3440430"/>
+            <a:ext cx="548640" cy="674370"/>
           </a:xfrm>
           <a:prstGeom prst="rect">
             <a:avLst/>
@@ -17541,8 +17541,8 @@
         </p:nvSpPr>
         <p:spPr>
           <a:xfrm>
-            <a:off x="3291840" y="2171700"/>
-            <a:ext cx="548640" cy="1508760"/>
+            <a:off x="3291840" y="2091690"/>
+            <a:ext cx="548640" cy="1348740"/>
           </a:xfrm>
           <a:prstGeom prst="rect">
             <a:avLst/>
@@ -17566,8 +17566,8 @@
         </p:nvSpPr>
         <p:spPr>
           <a:xfrm>
-            <a:off x="3291840" y="1869948"/>
-            <a:ext cx="548640" cy="301752"/>
+            <a:off x="3291840" y="1821942"/>
+            <a:ext cx="548640" cy="269748"/>
           </a:xfrm>
           <a:prstGeom prst="rect">
             <a:avLst/>
@@ -17591,8 +17591,8 @@
         </p:nvSpPr>
         <p:spPr>
           <a:xfrm>
-            <a:off x="3291840" y="1719072"/>
-            <a:ext cx="548640" cy="150876"/>
+            <a:off x="3291840" y="1687068"/>
+            <a:ext cx="548640" cy="134874"/>
           </a:xfrm>
           <a:prstGeom prst="rect">
             <a:avLst/>
@@ -17616,7 +17616,7 @@
         </p:nvSpPr>
         <p:spPr>
           <a:xfrm>
-            <a:off x="1828800" y="4507992"/>
+            <a:off x="1828800" y="4187952"/>
             <a:ext cx="1280160" cy="219456"/>
           </a:xfrm>
           <a:prstGeom prst="rect">
@@ -17666,7 +17666,7 @@
         </p:nvSpPr>
         <p:spPr>
           <a:xfrm>
-            <a:off x="2926080" y="4507992"/>
+            <a:off x="2926080" y="4187952"/>
             <a:ext cx="1280160" cy="219456"/>
           </a:xfrm>
           <a:prstGeom prst="rect">
@@ -17705,7 +17705,7 @@
         </p:nvSpPr>
         <p:spPr>
           <a:xfrm>
-            <a:off x="2011680" y="2971800"/>
+            <a:off x="2011680" y="2779776"/>
             <a:ext cx="914400" cy="219456"/>
           </a:xfrm>
           <a:prstGeom prst="rect">
@@ -17744,7 +17744,7 @@
         </p:nvSpPr>
         <p:spPr>
           <a:xfrm>
-            <a:off x="3108960" y="1463040"/>
+            <a:off x="3108960" y="1431036"/>
             <a:ext cx="914400" cy="219456"/>
           </a:xfrm>
           <a:prstGeom prst="rect">
@@ -18046,7 +18046,7 @@
           </p:nvPr>
         </p:nvGraphicFramePr>
         <p:xfrm>
-          <a:off x="640080" y="4800600"/>
+          <a:off x="640080" y="4498848"/>
           <a:ext cx="5577840" cy="914400"/>
         </p:xfrm>
         <a:graphic>
@@ -21432,8 +21432,8 @@
         </p:nvSpPr>
         <p:spPr>
           <a:xfrm>
-            <a:off x="640080" y="1371600"/>
-            <a:ext cx="5120640" cy="594360"/>
+            <a:off x="1097280" y="1371600"/>
+            <a:ext cx="4663440" cy="594360"/>
           </a:xfrm>
           <a:prstGeom prst="rect">
             <a:avLst/>
@@ -21457,8 +21457,8 @@
         </p:nvSpPr>
         <p:spPr>
           <a:xfrm>
-            <a:off x="640080" y="1389888"/>
-            <a:ext cx="5120640" cy="274320"/>
+            <a:off x="1097280" y="1389888"/>
+            <a:ext cx="4663440" cy="274320"/>
           </a:xfrm>
           <a:prstGeom prst="rect">
             <a:avLst/>
@@ -21496,8 +21496,8 @@
         </p:nvSpPr>
         <p:spPr>
           <a:xfrm>
-            <a:off x="640080" y="1645920"/>
-            <a:ext cx="5120640" cy="274320"/>
+            <a:off x="1097280" y="1645920"/>
+            <a:ext cx="4663440" cy="274320"/>
           </a:xfrm>
           <a:prstGeom prst="rect">
             <a:avLst/>
@@ -21535,8 +21535,8 @@
         </p:nvSpPr>
         <p:spPr>
           <a:xfrm>
-            <a:off x="960120" y="2057400"/>
-            <a:ext cx="4480560" cy="594360"/>
+            <a:off x="1394460" y="2057400"/>
+            <a:ext cx="4069080" cy="594360"/>
           </a:xfrm>
           <a:prstGeom prst="rect">
             <a:avLst/>
@@ -21560,8 +21560,8 @@
         </p:nvSpPr>
         <p:spPr>
           <a:xfrm>
-            <a:off x="960120" y="2075688"/>
-            <a:ext cx="4480560" cy="274320"/>
+            <a:off x="1394460" y="2075688"/>
+            <a:ext cx="4069080" cy="274320"/>
           </a:xfrm>
           <a:prstGeom prst="rect">
             <a:avLst/>
@@ -21599,8 +21599,8 @@
         </p:nvSpPr>
         <p:spPr>
           <a:xfrm>
-            <a:off x="960120" y="2331720"/>
-            <a:ext cx="4480560" cy="274320"/>
+            <a:off x="1394460" y="2331720"/>
+            <a:ext cx="4069080" cy="274320"/>
           </a:xfrm>
           <a:prstGeom prst="rect">
             <a:avLst/>
@@ -21638,8 +21638,8 @@
         </p:nvSpPr>
         <p:spPr>
           <a:xfrm>
-            <a:off x="1280160" y="2743200"/>
-            <a:ext cx="3840480" cy="594360"/>
+            <a:off x="1691640" y="2743200"/>
+            <a:ext cx="3474720" cy="594360"/>
           </a:xfrm>
           <a:prstGeom prst="rect">
             <a:avLst/>
@@ -21663,8 +21663,8 @@
         </p:nvSpPr>
         <p:spPr>
           <a:xfrm>
-            <a:off x="1280160" y="2761488"/>
-            <a:ext cx="3840480" cy="274320"/>
+            <a:off x="1691640" y="2761488"/>
+            <a:ext cx="3474720" cy="274320"/>
           </a:xfrm>
           <a:prstGeom prst="rect">
             <a:avLst/>
@@ -21702,8 +21702,8 @@
         </p:nvSpPr>
         <p:spPr>
           <a:xfrm>
-            <a:off x="1280160" y="3017520"/>
-            <a:ext cx="3840480" cy="274320"/>
+            <a:off x="1691640" y="3017520"/>
+            <a:ext cx="3474720" cy="274320"/>
           </a:xfrm>
           <a:prstGeom prst="rect">
             <a:avLst/>
@@ -21741,8 +21741,8 @@
         </p:nvSpPr>
         <p:spPr>
           <a:xfrm>
-            <a:off x="1600200" y="3429000"/>
-            <a:ext cx="3200400" cy="594360"/>
+            <a:off x="1988820" y="3429000"/>
+            <a:ext cx="2880360" cy="594360"/>
           </a:xfrm>
           <a:prstGeom prst="rect">
             <a:avLst/>
@@ -21766,8 +21766,8 @@
         </p:nvSpPr>
         <p:spPr>
           <a:xfrm>
-            <a:off x="1600200" y="3447288"/>
-            <a:ext cx="3200400" cy="274320"/>
+            <a:off x="1988820" y="3447288"/>
+            <a:ext cx="2880360" cy="274320"/>
           </a:xfrm>
           <a:prstGeom prst="rect">
             <a:avLst/>
@@ -21805,8 +21805,8 @@
         </p:nvSpPr>
         <p:spPr>
           <a:xfrm>
-            <a:off x="1600200" y="3703320"/>
-            <a:ext cx="3200400" cy="274320"/>
+            <a:off x="1988820" y="3703320"/>
+            <a:ext cx="2880360" cy="274320"/>
           </a:xfrm>
           <a:prstGeom prst="rect">
             <a:avLst/>
@@ -21844,8 +21844,8 @@
         </p:nvSpPr>
         <p:spPr>
           <a:xfrm>
-            <a:off x="1920240" y="4114800"/>
-            <a:ext cx="2560320" cy="594360"/>
+            <a:off x="2286000" y="4114800"/>
+            <a:ext cx="2286000" cy="594360"/>
           </a:xfrm>
           <a:prstGeom prst="rect">
             <a:avLst/>
@@ -21869,8 +21869,8 @@
         </p:nvSpPr>
         <p:spPr>
           <a:xfrm>
-            <a:off x="1920240" y="4133088"/>
-            <a:ext cx="2560320" cy="274320"/>
+            <a:off x="2286000" y="4133088"/>
+            <a:ext cx="2286000" cy="274320"/>
           </a:xfrm>
           <a:prstGeom prst="rect">
             <a:avLst/>
@@ -21908,8 +21908,8 @@
         </p:nvSpPr>
         <p:spPr>
           <a:xfrm>
-            <a:off x="1920240" y="4389120"/>
-            <a:ext cx="2560320" cy="274320"/>
+            <a:off x="2286000" y="4389120"/>
+            <a:ext cx="2286000" cy="274320"/>
           </a:xfrm>
           <a:prstGeom prst="rect">
             <a:avLst/>
@@ -37210,6 +37210,114 @@
             </a:r>
             <a:endParaRPr lang="en-US" sz="1500" dirty="0"/>
           </a:p>
+          <a:p>
+            <a:pPr marL="152400" indent="-152400">
+              <a:spcAft>
+                <a:spcPts val="200"/>
+              </a:spcAft>
+              <a:buSzPct val="100000"/>
+              <a:buChar char="▪"/>
+            </a:pPr>
+            <a:r>
+              <a:rPr lang="en-US" sz="1100" dirty="0">
+                <a:solidFill>
+                  <a:srgbClr val="E9E0F7"/>
+                </a:solidFill>
+                <a:latin typeface="Calibri" pitchFamily="34" charset="0"/>
+                <a:ea typeface="Calibri" pitchFamily="34" charset="-122"/>
+                <a:cs typeface="Calibri" pitchFamily="34" charset="-120"/>
+              </a:rPr>
+              <a:t>J258 (separate) has an extra polymers sub-topic, so this is </a:t>
+            </a:r>
+            <a:r>
+              <a:rPr lang="en-US" sz="1100" b="1" dirty="0">
+                <a:solidFill>
+                  <a:srgbClr val="E9E0F7"/>
+                </a:solidFill>
+                <a:latin typeface="Calibri" pitchFamily="34" charset="0"/>
+                <a:ea typeface="Calibri" pitchFamily="34" charset="-122"/>
+                <a:cs typeface="Calibri" pitchFamily="34" charset="-120"/>
+              </a:rPr>
+              <a:t>C4.5</a:t>
+            </a:r>
+            <a:r>
+              <a:rPr lang="en-US" sz="1100" dirty="0">
+                <a:solidFill>
+                  <a:srgbClr val="E9E0F7"/>
+                </a:solidFill>
+                <a:latin typeface="Calibri" pitchFamily="34" charset="0"/>
+                <a:ea typeface="Calibri" pitchFamily="34" charset="-122"/>
+                <a:cs typeface="Calibri" pitchFamily="34" charset="-120"/>
+              </a:rPr>
+              <a:t> there.</a:t>
+            </a:r>
+            <a:endParaRPr lang="en-US" sz="1500" dirty="0"/>
+          </a:p>
+          <a:p>
+            <a:pPr marL="152400" indent="-152400">
+              <a:spcAft>
+                <a:spcPts val="200"/>
+              </a:spcAft>
+              <a:buSzPct val="100000"/>
+              <a:buChar char="▪"/>
+            </a:pPr>
+            <a:r>
+              <a:rPr lang="en-US" sz="1100" dirty="0">
+                <a:solidFill>
+                  <a:srgbClr val="E9E0F7"/>
+                </a:solidFill>
+                <a:latin typeface="Calibri" pitchFamily="34" charset="0"/>
+                <a:ea typeface="Calibri" pitchFamily="34" charset="-122"/>
+                <a:cs typeface="Calibri" pitchFamily="34" charset="-120"/>
+              </a:rPr>
+              <a:t>C4.4 is the </a:t>
+            </a:r>
+            <a:r>
+              <a:rPr lang="en-US" sz="1100" b="1" dirty="0">
+                <a:solidFill>
+                  <a:srgbClr val="E9E0F7"/>
+                </a:solidFill>
+                <a:latin typeface="Calibri" pitchFamily="34" charset="0"/>
+                <a:ea typeface="Calibri" pitchFamily="34" charset="-122"/>
+                <a:cs typeface="Calibri" pitchFamily="34" charset="-120"/>
+              </a:rPr>
+              <a:t>last</a:t>
+            </a:r>
+            <a:r>
+              <a:rPr lang="en-US" sz="1100" dirty="0">
+                <a:solidFill>
+                  <a:srgbClr val="E9E0F7"/>
+                </a:solidFill>
+                <a:latin typeface="Calibri" pitchFamily="34" charset="0"/>
+                <a:ea typeface="Calibri" pitchFamily="34" charset="-122"/>
+                <a:cs typeface="Calibri" pitchFamily="34" charset="-120"/>
+              </a:rPr>
+              <a:t> C4 deck; </a:t>
+            </a:r>
+            <a:r>
+              <a:rPr lang="en-US" sz="1100" b="1" dirty="0">
+                <a:solidFill>
+                  <a:srgbClr val="E9E0F7"/>
+                </a:solidFill>
+                <a:latin typeface="Calibri" pitchFamily="34" charset="0"/>
+                <a:ea typeface="Calibri" pitchFamily="34" charset="-122"/>
+                <a:cs typeface="Calibri" pitchFamily="34" charset="-120"/>
+              </a:rPr>
+              <a:t>C5 Chemical analysis</a:t>
+            </a:r>
+            <a:r>
+              <a:rPr lang="en-US" sz="1100" dirty="0">
+                <a:solidFill>
+                  <a:srgbClr val="E9E0F7"/>
+                </a:solidFill>
+                <a:latin typeface="Calibri" pitchFamily="34" charset="0"/>
+                <a:ea typeface="Calibri" pitchFamily="34" charset="-122"/>
+                <a:cs typeface="Calibri" pitchFamily="34" charset="-120"/>
+              </a:rPr>
+              <a:t> follows.</a:t>
+            </a:r>
+            <a:endParaRPr lang="en-US" sz="1500" dirty="0"/>
+          </a:p>
         </p:txBody>
       </p:sp>
       <p:sp>
@@ -40682,11 +40790,13 @@
         </p:nvSpPr>
         <p:spPr>
           <a:xfrm>
-            <a:off x="4494733" y="3611880"/>
-            <a:ext cx="538582" cy="146304"/>
-          </a:xfrm>
-          <a:prstGeom prst="ellipse">
-            <a:avLst/>
+            <a:off x="4498848" y="3538728"/>
+            <a:ext cx="530352" cy="182880"/>
+          </a:xfrm>
+          <a:prstGeom prst="roundRect">
+            <a:avLst>
+              <a:gd name="adj" fmla="val 40000"/>
+            </a:avLst>
           </a:prstGeom>
           <a:solidFill>
             <a:srgbClr val="F7F7F7"/>
@@ -40804,7 +40914,7 @@
         <p:spPr>
           <a:xfrm>
             <a:off x="4736592" y="2057400"/>
-            <a:ext cx="54864" cy="1645920"/>
+            <a:ext cx="54864" cy="1371600"/>
           </a:xfrm>
           <a:prstGeom prst="rect">
             <a:avLst/>
@@ -40828,7 +40938,7 @@
         </p:nvSpPr>
         <p:spPr>
           <a:xfrm>
-            <a:off x="4736592" y="3703320"/>
+            <a:off x="4736592" y="3429000"/>
             <a:ext cx="54864" cy="91440"/>
           </a:xfrm>
           <a:custGeom>
@@ -41110,7 +41220,46 @@
         </p:nvSpPr>
         <p:spPr>
           <a:xfrm>
-            <a:off x="5093208" y="3611880"/>
+            <a:off x="5093208" y="3310128"/>
+            <a:ext cx="868680" cy="201168"/>
+          </a:xfrm>
+          <a:prstGeom prst="rect">
+            <a:avLst/>
+          </a:prstGeom>
+          <a:noFill/>
+          <a:ln/>
+        </p:spPr>
+        <p:txBody>
+          <a:bodyPr wrap="square" lIns="0" tIns="0" rIns="0" bIns="0" rtlCol="0" anchor="ctr"/>
+          <a:lstStyle/>
+          <a:p>
+            <a:pPr algn="l" indent="0" marL="0">
+              <a:buNone/>
+            </a:pPr>
+            <a:r>
+              <a:rPr lang="en-US" sz="1000" b="1" dirty="0">
+                <a:solidFill>
+                  <a:srgbClr val="6B7385"/>
+                </a:solidFill>
+                <a:latin typeface="Calibri" pitchFamily="34" charset="0"/>
+                <a:ea typeface="Calibri" pitchFamily="34" charset="-122"/>
+                <a:cs typeface="Calibri" pitchFamily="34" charset="-120"/>
+              </a:rPr>
+              <a:t>cotton wool</a:t>
+            </a:r>
+            <a:endParaRPr lang="en-US" sz="1000" dirty="0"/>
+          </a:p>
+        </p:txBody>
+      </p:sp>
+      <p:sp>
+        <p:nvSpPr>
+          <p:cNvPr id="69" name="Text 67"/>
+          <p:cNvSpPr/>
+          <p:nvPr/>
+        </p:nvSpPr>
+        <p:spPr>
+          <a:xfrm>
+            <a:off x="5093208" y="3703320"/>
             <a:ext cx="868680" cy="365760"/>
           </a:xfrm>
           <a:prstGeom prst="rect">
@@ -41143,7 +41292,7 @@
       </p:sp>
       <p:sp>
         <p:nvSpPr>
-          <p:cNvPr id="69" name="Text 67"/>
+          <p:cNvPr id="70" name="Text 68"/>
           <p:cNvSpPr/>
           <p:nvPr/>
         </p:nvSpPr>
@@ -41226,7 +41375,7 @@
       </p:sp>
       <p:sp>
         <p:nvSpPr>
-          <p:cNvPr id="70" name="Shape 68"/>
+          <p:cNvPr id="71" name="Shape 69"/>
           <p:cNvSpPr/>
           <p:nvPr/>
         </p:nvSpPr>
@@ -41253,7 +41402,7 @@
       </p:sp>
       <p:sp>
         <p:nvSpPr>
-          <p:cNvPr id="71" name="Text 69"/>
+          <p:cNvPr id="72" name="Text 70"/>
           <p:cNvSpPr/>
           <p:nvPr/>
         </p:nvSpPr>
@@ -41292,7 +41441,7 @@
       </p:sp>
       <p:sp>
         <p:nvSpPr>
-          <p:cNvPr id="72" name="Text 70"/>
+          <p:cNvPr id="73" name="Text 71"/>
           <p:cNvSpPr/>
           <p:nvPr/>
         </p:nvSpPr>
@@ -41319,7 +41468,7 @@
               <a:buChar char="▪"/>
             </a:pPr>
             <a:r>
-              <a:rPr lang="en-US" sz="1100" b="1" dirty="0">
+              <a:rPr lang="en-US" sz="1200" b="1" dirty="0">
                 <a:solidFill>
                   <a:srgbClr val="262B3A"/>
                 </a:solidFill>
@@ -41330,7 +41479,7 @@
               <a:t>Corrosion</a:t>
             </a:r>
             <a:r>
-              <a:rPr lang="en-US" sz="1100" dirty="0">
+              <a:rPr lang="en-US" sz="1200" dirty="0">
                 <a:solidFill>
                   <a:srgbClr val="262B3A"/>
                 </a:solidFill>
@@ -41341,7 +41490,7 @@
               <a:t>: a metal reacts with substances around it (oxygen, water) and is slowly </a:t>
             </a:r>
             <a:r>
-              <a:rPr lang="en-US" sz="1100" b="1" dirty="0">
+              <a:rPr lang="en-US" sz="1200" b="1" dirty="0">
                 <a:solidFill>
                   <a:srgbClr val="262B3A"/>
                 </a:solidFill>
@@ -41352,7 +41501,7 @@
               <a:t>oxidised</a:t>
             </a:r>
             <a:r>
-              <a:rPr lang="en-US" sz="1100" dirty="0">
+              <a:rPr lang="en-US" sz="1200" dirty="0">
                 <a:solidFill>
                   <a:srgbClr val="262B3A"/>
                 </a:solidFill>
@@ -41362,7 +41511,7 @@
               </a:rPr>
               <a:t>.</a:t>
             </a:r>
-            <a:endParaRPr lang="en-US" sz="1100" dirty="0"/>
+            <a:endParaRPr lang="en-US" sz="1200" dirty="0"/>
           </a:p>
           <a:p>
             <a:pPr marL="152400" indent="-152400">
@@ -41373,7 +41522,7 @@
               <a:buChar char="▪"/>
             </a:pPr>
             <a:r>
-              <a:rPr lang="en-US" sz="1100" b="1" dirty="0">
+              <a:rPr lang="en-US" sz="1200" b="1" dirty="0">
                 <a:solidFill>
                   <a:srgbClr val="262B3A"/>
                 </a:solidFill>
@@ -41384,7 +41533,7 @@
               <a:t>Rusting</a:t>
             </a:r>
             <a:r>
-              <a:rPr lang="en-US" sz="1100" dirty="0">
+              <a:rPr lang="en-US" sz="1200" dirty="0">
                 <a:solidFill>
                   <a:srgbClr val="262B3A"/>
                 </a:solidFill>
@@ -41395,7 +41544,7 @@
               <a:t> is the corrosion of </a:t>
             </a:r>
             <a:r>
-              <a:rPr lang="en-US" sz="1100" b="1" dirty="0">
+              <a:rPr lang="en-US" sz="1200" b="1" dirty="0">
                 <a:solidFill>
                   <a:srgbClr val="262B3A"/>
                 </a:solidFill>
@@ -41406,7 +41555,7 @@
               <a:t>iron</a:t>
             </a:r>
             <a:r>
-              <a:rPr lang="en-US" sz="1100" dirty="0">
+              <a:rPr lang="en-US" sz="1200" dirty="0">
                 <a:solidFill>
                   <a:srgbClr val="262B3A"/>
                 </a:solidFill>
@@ -41417,7 +41566,7 @@
               <a:t> and steel. It needs </a:t>
             </a:r>
             <a:r>
-              <a:rPr lang="en-US" sz="1100" b="1" dirty="0">
+              <a:rPr lang="en-US" sz="1200" b="1" dirty="0">
                 <a:solidFill>
                   <a:srgbClr val="262B3A"/>
                 </a:solidFill>
@@ -41428,7 +41577,7 @@
               <a:t>oxygen</a:t>
             </a:r>
             <a:r>
-              <a:rPr lang="en-US" sz="1100" dirty="0">
+              <a:rPr lang="en-US" sz="1200" dirty="0">
                 <a:solidFill>
                   <a:srgbClr val="262B3A"/>
                 </a:solidFill>
@@ -41439,7 +41588,7 @@
               <a:t> (air) </a:t>
             </a:r>
             <a:r>
-              <a:rPr lang="en-US" sz="1100" b="1" dirty="0">
+              <a:rPr lang="en-US" sz="1200" b="1" dirty="0">
                 <a:solidFill>
                   <a:srgbClr val="262B3A"/>
                 </a:solidFill>
@@ -41450,7 +41599,7 @@
               <a:t>and</a:t>
             </a:r>
             <a:r>
-              <a:rPr lang="en-US" sz="1100" dirty="0">
+              <a:rPr lang="en-US" sz="1200" dirty="0">
                 <a:solidFill>
                   <a:srgbClr val="262B3A"/>
                 </a:solidFill>
@@ -41461,7 +41610,7 @@
               <a:t> </a:t>
             </a:r>
             <a:r>
-              <a:rPr lang="en-US" sz="1100" b="1" dirty="0">
+              <a:rPr lang="en-US" sz="1200" b="1" dirty="0">
                 <a:solidFill>
                   <a:srgbClr val="262B3A"/>
                 </a:solidFill>
@@ -41472,7 +41621,7 @@
               <a:t>water</a:t>
             </a:r>
             <a:r>
-              <a:rPr lang="en-US" sz="1100" dirty="0">
+              <a:rPr lang="en-US" sz="1200" dirty="0">
                 <a:solidFill>
                   <a:srgbClr val="262B3A"/>
                 </a:solidFill>
@@ -41482,7 +41631,7 @@
               </a:rPr>
               <a:t>.</a:t>
             </a:r>
-            <a:endParaRPr lang="en-US" sz="1100" dirty="0"/>
+            <a:endParaRPr lang="en-US" sz="1200" dirty="0"/>
           </a:p>
           <a:p>
             <a:pPr marL="152400" indent="-152400">
@@ -41493,7 +41642,7 @@
               <a:buChar char="▪"/>
             </a:pPr>
             <a:r>
-              <a:rPr lang="en-US" sz="1100" b="1" dirty="0">
+              <a:rPr lang="en-US" sz="1200" b="1" dirty="0">
                 <a:solidFill>
                   <a:srgbClr val="262B3A"/>
                 </a:solidFill>
@@ -41504,7 +41653,7 @@
               <a:t>Salt</a:t>
             </a:r>
             <a:r>
-              <a:rPr lang="en-US" sz="1100" dirty="0">
+              <a:rPr lang="en-US" sz="1200" dirty="0">
                 <a:solidFill>
                   <a:srgbClr val="262B3A"/>
                 </a:solidFill>
@@ -41515,7 +41664,7 @@
               <a:t> water and </a:t>
             </a:r>
             <a:r>
-              <a:rPr lang="en-US" sz="1100" b="1" dirty="0">
+              <a:rPr lang="en-US" sz="1200" b="1" dirty="0">
                 <a:solidFill>
                   <a:srgbClr val="262B3A"/>
                 </a:solidFill>
@@ -41526,7 +41675,7 @@
               <a:t>acid</a:t>
             </a:r>
             <a:r>
-              <a:rPr lang="en-US" sz="1100" dirty="0">
+              <a:rPr lang="en-US" sz="1200" dirty="0">
                 <a:solidFill>
                   <a:srgbClr val="262B3A"/>
                 </a:solidFill>
@@ -41537,7 +41686,7 @@
               <a:t> rain make iron rust </a:t>
             </a:r>
             <a:r>
-              <a:rPr lang="en-US" sz="1100" b="1" dirty="0">
+              <a:rPr lang="en-US" sz="1200" b="1" dirty="0">
                 <a:solidFill>
                   <a:srgbClr val="262B3A"/>
                 </a:solidFill>
@@ -41548,7 +41697,7 @@
               <a:t>faster</a:t>
             </a:r>
             <a:r>
-              <a:rPr lang="en-US" sz="1100" dirty="0">
+              <a:rPr lang="en-US" sz="1200" dirty="0">
                 <a:solidFill>
                   <a:srgbClr val="262B3A"/>
                 </a:solidFill>
@@ -41558,7 +41707,7 @@
               </a:rPr>
               <a:t>.</a:t>
             </a:r>
-            <a:endParaRPr lang="en-US" sz="1100" dirty="0"/>
+            <a:endParaRPr lang="en-US" sz="1200" dirty="0"/>
           </a:p>
           <a:p>
             <a:pPr marL="152400" indent="-152400">
@@ -41569,7 +41718,7 @@
               <a:buChar char="▪"/>
             </a:pPr>
             <a:r>
-              <a:rPr lang="en-US" sz="1100" dirty="0">
+              <a:rPr lang="en-US" sz="1200" dirty="0">
                 <a:solidFill>
                   <a:srgbClr val="262B3A"/>
                 </a:solidFill>
@@ -41580,7 +41729,7 @@
               <a:t>Rust is </a:t>
             </a:r>
             <a:r>
-              <a:rPr lang="en-US" sz="1100" b="1" dirty="0">
+              <a:rPr lang="en-US" sz="1200" b="1" dirty="0">
                 <a:solidFill>
                   <a:srgbClr val="262B3A"/>
                 </a:solidFill>
@@ -41591,7 +41740,7 @@
               <a:t>hydrated iron(III) oxide</a:t>
             </a:r>
             <a:r>
-              <a:rPr lang="en-US" sz="1100" dirty="0">
+              <a:rPr lang="en-US" sz="1200" dirty="0">
                 <a:solidFill>
                   <a:srgbClr val="262B3A"/>
                 </a:solidFill>
@@ -41602,7 +41751,7 @@
               <a:t>. It is weak and </a:t>
             </a:r>
             <a:r>
-              <a:rPr lang="en-US" sz="1100" b="1" dirty="0">
+              <a:rPr lang="en-US" sz="1200" b="1" dirty="0">
                 <a:solidFill>
                   <a:srgbClr val="262B3A"/>
                 </a:solidFill>
@@ -41613,7 +41762,7 @@
               <a:t>flakes off</a:t>
             </a:r>
             <a:r>
-              <a:rPr lang="en-US" sz="1100" dirty="0">
+              <a:rPr lang="en-US" sz="1200" dirty="0">
                 <a:solidFill>
                   <a:srgbClr val="262B3A"/>
                 </a:solidFill>
@@ -41623,7 +41772,7 @@
               </a:rPr>
               <a:t>, so fresh iron is exposed and rusting continues.</a:t>
             </a:r>
-            <a:endParaRPr lang="en-US" sz="1100" dirty="0"/>
+            <a:endParaRPr lang="en-US" sz="1200" dirty="0"/>
           </a:p>
           <a:p>
             <a:pPr marL="152400" indent="-152400">
@@ -41634,7 +41783,7 @@
               <a:buChar char="▪"/>
             </a:pPr>
             <a:r>
-              <a:rPr lang="en-US" sz="1100" dirty="0">
+              <a:rPr lang="en-US" sz="1200" dirty="0">
                 <a:solidFill>
                   <a:srgbClr val="262B3A"/>
                 </a:solidFill>
@@ -41644,7 +41793,7 @@
               </a:rPr>
               <a:t>iron + oxygen + water → hydrated iron(III) oxide</a:t>
             </a:r>
-            <a:endParaRPr lang="en-US" sz="1100" dirty="0"/>
+            <a:endParaRPr lang="en-US" sz="1200" dirty="0"/>
           </a:p>
           <a:p>
             <a:pPr indent="0" marL="0">
@@ -41654,7 +41803,7 @@
               <a:buNone/>
             </a:pPr>
             <a:r>
-              <a:rPr lang="en-US" sz="1100" b="1" dirty="0">
+              <a:rPr lang="en-US" sz="1200" b="1" dirty="0">
                 <a:solidFill>
                   <a:srgbClr val="6A3FA0"/>
                 </a:solidFill>
@@ -41664,13 +41813,13 @@
               </a:rPr>
               <a:t>4Fe(s) + 3O₂(g) + 6H₂O(l) → 4Fe(OH)₃(s)</a:t>
             </a:r>
-            <a:endParaRPr lang="en-US" sz="1100" dirty="0"/>
-          </a:p>
-        </p:txBody>
-      </p:sp>
-      <p:sp>
-        <p:nvSpPr>
-          <p:cNvPr id="73" name="Shape 71"/>
+            <a:endParaRPr lang="en-US" sz="1200" dirty="0"/>
+          </a:p>
+        </p:txBody>
+      </p:sp>
+      <p:sp>
+        <p:nvSpPr>
+          <p:cNvPr id="74" name="Shape 72"/>
           <p:cNvSpPr/>
           <p:nvPr/>
         </p:nvSpPr>
@@ -41697,7 +41846,7 @@
       </p:sp>
       <p:sp>
         <p:nvSpPr>
-          <p:cNvPr id="74" name="Text 72"/>
+          <p:cNvPr id="75" name="Text 73"/>
           <p:cNvSpPr/>
           <p:nvPr/>
         </p:nvSpPr>
@@ -41736,7 +41885,7 @@
       </p:sp>
       <p:sp>
         <p:nvSpPr>
-          <p:cNvPr id="75" name="Text 73"/>
+          <p:cNvPr id="76" name="Text 74"/>
           <p:cNvSpPr/>
           <p:nvPr/>
         </p:nvSpPr>
@@ -41859,7 +42008,7 @@
       </p:sp>
       <p:sp>
         <p:nvSpPr>
-          <p:cNvPr id="76" name="Shape 74"/>
+          <p:cNvPr id="77" name="Shape 75"/>
           <p:cNvSpPr/>
           <p:nvPr/>
         </p:nvSpPr>
@@ -41884,7 +42033,7 @@
       </p:sp>
       <p:sp>
         <p:nvSpPr>
-          <p:cNvPr id="77" name="Shape 75"/>
+          <p:cNvPr id="78" name="Shape 76"/>
           <p:cNvSpPr/>
           <p:nvPr/>
         </p:nvSpPr>
@@ -41909,7 +42058,7 @@
       </p:sp>
       <p:sp>
         <p:nvSpPr>
-          <p:cNvPr id="78" name="Text 76"/>
+          <p:cNvPr id="79" name="Text 77"/>
           <p:cNvSpPr/>
           <p:nvPr/>
         </p:nvSpPr>
@@ -42401,1208 +42550,8 @@
         </p:nvSpPr>
         <p:spPr>
           <a:xfrm>
-            <a:off x="685800" y="3749040"/>
-            <a:ext cx="5029200" cy="1005840"/>
-          </a:xfrm>
-          <a:prstGeom prst="rect">
-            <a:avLst/>
-          </a:prstGeom>
-          <a:solidFill>
-            <a:srgbClr val="E6E9EE"/>
-          </a:solidFill>
-          <a:ln w="12700">
-            <a:solidFill>
-              <a:srgbClr val="5A6275"/>
-            </a:solidFill>
-            <a:prstDash val="solid"/>
-          </a:ln>
-        </p:spPr>
-      </p:sp>
-      <p:sp>
-        <p:nvSpPr>
-          <p:cNvPr id="13" name="Shape 11"/>
-          <p:cNvSpPr/>
-          <p:nvPr/>
-        </p:nvSpPr>
-        <p:spPr>
-          <a:xfrm>
-            <a:off x="740664" y="3803904"/>
-            <a:ext cx="256032" cy="256032"/>
-          </a:xfrm>
-          <a:prstGeom prst="ellipse">
-            <a:avLst/>
-          </a:prstGeom>
-          <a:solidFill>
-            <a:srgbClr val="B9C0CC"/>
-          </a:solidFill>
-          <a:ln w="9525">
-            <a:solidFill>
-              <a:srgbClr val="5A6275"/>
-            </a:solidFill>
-            <a:prstDash val="solid"/>
-          </a:ln>
-        </p:spPr>
-      </p:sp>
-      <p:sp>
-        <p:nvSpPr>
-          <p:cNvPr id="14" name="Shape 12"/>
-          <p:cNvSpPr/>
-          <p:nvPr/>
-        </p:nvSpPr>
-        <p:spPr>
-          <a:xfrm>
-            <a:off x="1074420" y="3803904"/>
-            <a:ext cx="256032" cy="256032"/>
-          </a:xfrm>
-          <a:prstGeom prst="ellipse">
-            <a:avLst/>
-          </a:prstGeom>
-          <a:solidFill>
-            <a:srgbClr val="B9C0CC"/>
-          </a:solidFill>
-          <a:ln w="9525">
-            <a:solidFill>
-              <a:srgbClr val="5A6275"/>
-            </a:solidFill>
-            <a:prstDash val="solid"/>
-          </a:ln>
-        </p:spPr>
-      </p:sp>
-      <p:sp>
-        <p:nvSpPr>
-          <p:cNvPr id="15" name="Shape 13"/>
-          <p:cNvSpPr/>
-          <p:nvPr/>
-        </p:nvSpPr>
-        <p:spPr>
-          <a:xfrm>
-            <a:off x="1408176" y="3803904"/>
-            <a:ext cx="256032" cy="256032"/>
-          </a:xfrm>
-          <a:prstGeom prst="ellipse">
-            <a:avLst/>
-          </a:prstGeom>
-          <a:solidFill>
-            <a:srgbClr val="B9C0CC"/>
-          </a:solidFill>
-          <a:ln w="9525">
-            <a:solidFill>
-              <a:srgbClr val="5A6275"/>
-            </a:solidFill>
-            <a:prstDash val="solid"/>
-          </a:ln>
-        </p:spPr>
-      </p:sp>
-      <p:sp>
-        <p:nvSpPr>
-          <p:cNvPr id="16" name="Shape 14"/>
-          <p:cNvSpPr/>
-          <p:nvPr/>
-        </p:nvSpPr>
-        <p:spPr>
-          <a:xfrm>
-            <a:off x="1741932" y="3803904"/>
-            <a:ext cx="256032" cy="256032"/>
-          </a:xfrm>
-          <a:prstGeom prst="ellipse">
-            <a:avLst/>
-          </a:prstGeom>
-          <a:solidFill>
-            <a:srgbClr val="B9C0CC"/>
-          </a:solidFill>
-          <a:ln w="9525">
-            <a:solidFill>
-              <a:srgbClr val="5A6275"/>
-            </a:solidFill>
-            <a:prstDash val="solid"/>
-          </a:ln>
-        </p:spPr>
-      </p:sp>
-      <p:sp>
-        <p:nvSpPr>
-          <p:cNvPr id="17" name="Shape 15"/>
-          <p:cNvSpPr/>
-          <p:nvPr/>
-        </p:nvSpPr>
-        <p:spPr>
-          <a:xfrm>
-            <a:off x="2075688" y="3803904"/>
-            <a:ext cx="256032" cy="256032"/>
-          </a:xfrm>
-          <a:prstGeom prst="ellipse">
-            <a:avLst/>
-          </a:prstGeom>
-          <a:solidFill>
-            <a:srgbClr val="B9C0CC"/>
-          </a:solidFill>
-          <a:ln w="9525">
-            <a:solidFill>
-              <a:srgbClr val="5A6275"/>
-            </a:solidFill>
-            <a:prstDash val="solid"/>
-          </a:ln>
-        </p:spPr>
-      </p:sp>
-      <p:sp>
-        <p:nvSpPr>
-          <p:cNvPr id="18" name="Shape 16"/>
-          <p:cNvSpPr/>
-          <p:nvPr/>
-        </p:nvSpPr>
-        <p:spPr>
-          <a:xfrm>
-            <a:off x="2409444" y="3803904"/>
-            <a:ext cx="256032" cy="256032"/>
-          </a:xfrm>
-          <a:prstGeom prst="ellipse">
-            <a:avLst/>
-          </a:prstGeom>
-          <a:solidFill>
-            <a:srgbClr val="B9C0CC"/>
-          </a:solidFill>
-          <a:ln w="9525">
-            <a:solidFill>
-              <a:srgbClr val="5A6275"/>
-            </a:solidFill>
-            <a:prstDash val="solid"/>
-          </a:ln>
-        </p:spPr>
-      </p:sp>
-      <p:sp>
-        <p:nvSpPr>
-          <p:cNvPr id="19" name="Shape 17"/>
-          <p:cNvSpPr/>
-          <p:nvPr/>
-        </p:nvSpPr>
-        <p:spPr>
-          <a:xfrm>
-            <a:off x="2743200" y="3803904"/>
-            <a:ext cx="256032" cy="256032"/>
-          </a:xfrm>
-          <a:prstGeom prst="ellipse">
-            <a:avLst/>
-          </a:prstGeom>
-          <a:solidFill>
-            <a:srgbClr val="B9C0CC"/>
-          </a:solidFill>
-          <a:ln w="9525">
-            <a:solidFill>
-              <a:srgbClr val="5A6275"/>
-            </a:solidFill>
-            <a:prstDash val="solid"/>
-          </a:ln>
-        </p:spPr>
-      </p:sp>
-      <p:sp>
-        <p:nvSpPr>
-          <p:cNvPr id="20" name="Shape 18"/>
-          <p:cNvSpPr/>
-          <p:nvPr/>
-        </p:nvSpPr>
-        <p:spPr>
-          <a:xfrm>
-            <a:off x="3076956" y="3803904"/>
-            <a:ext cx="256032" cy="256032"/>
-          </a:xfrm>
-          <a:prstGeom prst="ellipse">
-            <a:avLst/>
-          </a:prstGeom>
-          <a:solidFill>
-            <a:srgbClr val="B9C0CC"/>
-          </a:solidFill>
-          <a:ln w="9525">
-            <a:solidFill>
-              <a:srgbClr val="5A6275"/>
-            </a:solidFill>
-            <a:prstDash val="solid"/>
-          </a:ln>
-        </p:spPr>
-      </p:sp>
-      <p:sp>
-        <p:nvSpPr>
-          <p:cNvPr id="21" name="Shape 19"/>
-          <p:cNvSpPr/>
-          <p:nvPr/>
-        </p:nvSpPr>
-        <p:spPr>
-          <a:xfrm>
-            <a:off x="3410712" y="3803904"/>
-            <a:ext cx="256032" cy="256032"/>
-          </a:xfrm>
-          <a:prstGeom prst="ellipse">
-            <a:avLst/>
-          </a:prstGeom>
-          <a:solidFill>
-            <a:srgbClr val="B9C0CC"/>
-          </a:solidFill>
-          <a:ln w="9525">
-            <a:solidFill>
-              <a:srgbClr val="5A6275"/>
-            </a:solidFill>
-            <a:prstDash val="solid"/>
-          </a:ln>
-        </p:spPr>
-      </p:sp>
-      <p:sp>
-        <p:nvSpPr>
-          <p:cNvPr id="22" name="Shape 20"/>
-          <p:cNvSpPr/>
-          <p:nvPr/>
-        </p:nvSpPr>
-        <p:spPr>
-          <a:xfrm>
-            <a:off x="3744468" y="3803904"/>
-            <a:ext cx="256032" cy="256032"/>
-          </a:xfrm>
-          <a:prstGeom prst="ellipse">
-            <a:avLst/>
-          </a:prstGeom>
-          <a:solidFill>
-            <a:srgbClr val="B9C0CC"/>
-          </a:solidFill>
-          <a:ln w="9525">
-            <a:solidFill>
-              <a:srgbClr val="5A6275"/>
-            </a:solidFill>
-            <a:prstDash val="solid"/>
-          </a:ln>
-        </p:spPr>
-      </p:sp>
-      <p:sp>
-        <p:nvSpPr>
-          <p:cNvPr id="23" name="Shape 21"/>
-          <p:cNvSpPr/>
-          <p:nvPr/>
-        </p:nvSpPr>
-        <p:spPr>
-          <a:xfrm>
-            <a:off x="4078224" y="3803904"/>
-            <a:ext cx="256032" cy="256032"/>
-          </a:xfrm>
-          <a:prstGeom prst="ellipse">
-            <a:avLst/>
-          </a:prstGeom>
-          <a:solidFill>
-            <a:srgbClr val="B9C0CC"/>
-          </a:solidFill>
-          <a:ln w="9525">
-            <a:solidFill>
-              <a:srgbClr val="5A6275"/>
-            </a:solidFill>
-            <a:prstDash val="solid"/>
-          </a:ln>
-        </p:spPr>
-      </p:sp>
-      <p:sp>
-        <p:nvSpPr>
-          <p:cNvPr id="24" name="Shape 22"/>
-          <p:cNvSpPr/>
-          <p:nvPr/>
-        </p:nvSpPr>
-        <p:spPr>
-          <a:xfrm>
-            <a:off x="4411980" y="3803904"/>
-            <a:ext cx="256032" cy="256032"/>
-          </a:xfrm>
-          <a:prstGeom prst="ellipse">
-            <a:avLst/>
-          </a:prstGeom>
-          <a:solidFill>
-            <a:srgbClr val="B9C0CC"/>
-          </a:solidFill>
-          <a:ln w="9525">
-            <a:solidFill>
-              <a:srgbClr val="5A6275"/>
-            </a:solidFill>
-            <a:prstDash val="solid"/>
-          </a:ln>
-        </p:spPr>
-      </p:sp>
-      <p:sp>
-        <p:nvSpPr>
-          <p:cNvPr id="25" name="Shape 23"/>
-          <p:cNvSpPr/>
-          <p:nvPr/>
-        </p:nvSpPr>
-        <p:spPr>
-          <a:xfrm>
-            <a:off x="4745736" y="3803904"/>
-            <a:ext cx="256032" cy="256032"/>
-          </a:xfrm>
-          <a:prstGeom prst="ellipse">
-            <a:avLst/>
-          </a:prstGeom>
-          <a:solidFill>
-            <a:srgbClr val="B9C0CC"/>
-          </a:solidFill>
-          <a:ln w="9525">
-            <a:solidFill>
-              <a:srgbClr val="5A6275"/>
-            </a:solidFill>
-            <a:prstDash val="solid"/>
-          </a:ln>
-        </p:spPr>
-      </p:sp>
-      <p:sp>
-        <p:nvSpPr>
-          <p:cNvPr id="26" name="Shape 24"/>
-          <p:cNvSpPr/>
-          <p:nvPr/>
-        </p:nvSpPr>
-        <p:spPr>
-          <a:xfrm>
-            <a:off x="5079492" y="3803904"/>
-            <a:ext cx="256032" cy="256032"/>
-          </a:xfrm>
-          <a:prstGeom prst="ellipse">
-            <a:avLst/>
-          </a:prstGeom>
-          <a:solidFill>
-            <a:srgbClr val="B9C0CC"/>
-          </a:solidFill>
-          <a:ln w="9525">
-            <a:solidFill>
-              <a:srgbClr val="5A6275"/>
-            </a:solidFill>
-            <a:prstDash val="solid"/>
-          </a:ln>
-        </p:spPr>
-      </p:sp>
-      <p:sp>
-        <p:nvSpPr>
-          <p:cNvPr id="27" name="Shape 25"/>
-          <p:cNvSpPr/>
-          <p:nvPr/>
-        </p:nvSpPr>
-        <p:spPr>
-          <a:xfrm>
-            <a:off x="5413248" y="3803904"/>
-            <a:ext cx="256032" cy="256032"/>
-          </a:xfrm>
-          <a:prstGeom prst="ellipse">
-            <a:avLst/>
-          </a:prstGeom>
-          <a:solidFill>
-            <a:srgbClr val="B9C0CC"/>
-          </a:solidFill>
-          <a:ln w="9525">
-            <a:solidFill>
-              <a:srgbClr val="5A6275"/>
-            </a:solidFill>
-            <a:prstDash val="solid"/>
-          </a:ln>
-        </p:spPr>
-      </p:sp>
-      <p:sp>
-        <p:nvSpPr>
-          <p:cNvPr id="28" name="Shape 26"/>
-          <p:cNvSpPr/>
-          <p:nvPr/>
-        </p:nvSpPr>
-        <p:spPr>
-          <a:xfrm>
-            <a:off x="740664" y="4105656"/>
-            <a:ext cx="256032" cy="256032"/>
-          </a:xfrm>
-          <a:prstGeom prst="ellipse">
-            <a:avLst/>
-          </a:prstGeom>
-          <a:solidFill>
-            <a:srgbClr val="B9C0CC"/>
-          </a:solidFill>
-          <a:ln w="9525">
-            <a:solidFill>
-              <a:srgbClr val="5A6275"/>
-            </a:solidFill>
-            <a:prstDash val="solid"/>
-          </a:ln>
-        </p:spPr>
-      </p:sp>
-      <p:sp>
-        <p:nvSpPr>
-          <p:cNvPr id="29" name="Shape 27"/>
-          <p:cNvSpPr/>
-          <p:nvPr/>
-        </p:nvSpPr>
-        <p:spPr>
-          <a:xfrm>
-            <a:off x="1074420" y="4105656"/>
-            <a:ext cx="256032" cy="256032"/>
-          </a:xfrm>
-          <a:prstGeom prst="ellipse">
-            <a:avLst/>
-          </a:prstGeom>
-          <a:solidFill>
-            <a:srgbClr val="B9C0CC"/>
-          </a:solidFill>
-          <a:ln w="9525">
-            <a:solidFill>
-              <a:srgbClr val="5A6275"/>
-            </a:solidFill>
-            <a:prstDash val="solid"/>
-          </a:ln>
-        </p:spPr>
-      </p:sp>
-      <p:sp>
-        <p:nvSpPr>
-          <p:cNvPr id="30" name="Shape 28"/>
-          <p:cNvSpPr/>
-          <p:nvPr/>
-        </p:nvSpPr>
-        <p:spPr>
-          <a:xfrm>
-            <a:off x="1408176" y="4105656"/>
-            <a:ext cx="256032" cy="256032"/>
-          </a:xfrm>
-          <a:prstGeom prst="ellipse">
-            <a:avLst/>
-          </a:prstGeom>
-          <a:solidFill>
-            <a:srgbClr val="B9C0CC"/>
-          </a:solidFill>
-          <a:ln w="9525">
-            <a:solidFill>
-              <a:srgbClr val="5A6275"/>
-            </a:solidFill>
-            <a:prstDash val="solid"/>
-          </a:ln>
-        </p:spPr>
-      </p:sp>
-      <p:sp>
-        <p:nvSpPr>
-          <p:cNvPr id="31" name="Shape 29"/>
-          <p:cNvSpPr/>
-          <p:nvPr/>
-        </p:nvSpPr>
-        <p:spPr>
-          <a:xfrm>
-            <a:off x="1741932" y="4105656"/>
-            <a:ext cx="256032" cy="256032"/>
-          </a:xfrm>
-          <a:prstGeom prst="ellipse">
-            <a:avLst/>
-          </a:prstGeom>
-          <a:solidFill>
-            <a:srgbClr val="B9C0CC"/>
-          </a:solidFill>
-          <a:ln w="9525">
-            <a:solidFill>
-              <a:srgbClr val="5A6275"/>
-            </a:solidFill>
-            <a:prstDash val="solid"/>
-          </a:ln>
-        </p:spPr>
-      </p:sp>
-      <p:sp>
-        <p:nvSpPr>
-          <p:cNvPr id="32" name="Shape 30"/>
-          <p:cNvSpPr/>
-          <p:nvPr/>
-        </p:nvSpPr>
-        <p:spPr>
-          <a:xfrm>
-            <a:off x="2075688" y="4105656"/>
-            <a:ext cx="256032" cy="256032"/>
-          </a:xfrm>
-          <a:prstGeom prst="ellipse">
-            <a:avLst/>
-          </a:prstGeom>
-          <a:solidFill>
-            <a:srgbClr val="B9C0CC"/>
-          </a:solidFill>
-          <a:ln w="9525">
-            <a:solidFill>
-              <a:srgbClr val="5A6275"/>
-            </a:solidFill>
-            <a:prstDash val="solid"/>
-          </a:ln>
-        </p:spPr>
-      </p:sp>
-      <p:sp>
-        <p:nvSpPr>
-          <p:cNvPr id="33" name="Shape 31"/>
-          <p:cNvSpPr/>
-          <p:nvPr/>
-        </p:nvSpPr>
-        <p:spPr>
-          <a:xfrm>
-            <a:off x="2409444" y="4105656"/>
-            <a:ext cx="256032" cy="256032"/>
-          </a:xfrm>
-          <a:prstGeom prst="ellipse">
-            <a:avLst/>
-          </a:prstGeom>
-          <a:solidFill>
-            <a:srgbClr val="B9C0CC"/>
-          </a:solidFill>
-          <a:ln w="9525">
-            <a:solidFill>
-              <a:srgbClr val="5A6275"/>
-            </a:solidFill>
-            <a:prstDash val="solid"/>
-          </a:ln>
-        </p:spPr>
-      </p:sp>
-      <p:sp>
-        <p:nvSpPr>
-          <p:cNvPr id="34" name="Shape 32"/>
-          <p:cNvSpPr/>
-          <p:nvPr/>
-        </p:nvSpPr>
-        <p:spPr>
-          <a:xfrm>
-            <a:off x="2743200" y="4105656"/>
-            <a:ext cx="256032" cy="256032"/>
-          </a:xfrm>
-          <a:prstGeom prst="ellipse">
-            <a:avLst/>
-          </a:prstGeom>
-          <a:solidFill>
-            <a:srgbClr val="B9C0CC"/>
-          </a:solidFill>
-          <a:ln w="9525">
-            <a:solidFill>
-              <a:srgbClr val="5A6275"/>
-            </a:solidFill>
-            <a:prstDash val="solid"/>
-          </a:ln>
-        </p:spPr>
-      </p:sp>
-      <p:sp>
-        <p:nvSpPr>
-          <p:cNvPr id="35" name="Shape 33"/>
-          <p:cNvSpPr/>
-          <p:nvPr/>
-        </p:nvSpPr>
-        <p:spPr>
-          <a:xfrm>
-            <a:off x="3076956" y="4105656"/>
-            <a:ext cx="256032" cy="256032"/>
-          </a:xfrm>
-          <a:prstGeom prst="ellipse">
-            <a:avLst/>
-          </a:prstGeom>
-          <a:solidFill>
-            <a:srgbClr val="B9C0CC"/>
-          </a:solidFill>
-          <a:ln w="9525">
-            <a:solidFill>
-              <a:srgbClr val="5A6275"/>
-            </a:solidFill>
-            <a:prstDash val="solid"/>
-          </a:ln>
-        </p:spPr>
-      </p:sp>
-      <p:sp>
-        <p:nvSpPr>
-          <p:cNvPr id="36" name="Shape 34"/>
-          <p:cNvSpPr/>
-          <p:nvPr/>
-        </p:nvSpPr>
-        <p:spPr>
-          <a:xfrm>
-            <a:off x="3410712" y="4105656"/>
-            <a:ext cx="256032" cy="256032"/>
-          </a:xfrm>
-          <a:prstGeom prst="ellipse">
-            <a:avLst/>
-          </a:prstGeom>
-          <a:solidFill>
-            <a:srgbClr val="B9C0CC"/>
-          </a:solidFill>
-          <a:ln w="9525">
-            <a:solidFill>
-              <a:srgbClr val="5A6275"/>
-            </a:solidFill>
-            <a:prstDash val="solid"/>
-          </a:ln>
-        </p:spPr>
-      </p:sp>
-      <p:sp>
-        <p:nvSpPr>
-          <p:cNvPr id="37" name="Shape 35"/>
-          <p:cNvSpPr/>
-          <p:nvPr/>
-        </p:nvSpPr>
-        <p:spPr>
-          <a:xfrm>
-            <a:off x="3744468" y="4105656"/>
-            <a:ext cx="256032" cy="256032"/>
-          </a:xfrm>
-          <a:prstGeom prst="ellipse">
-            <a:avLst/>
-          </a:prstGeom>
-          <a:solidFill>
-            <a:srgbClr val="B9C0CC"/>
-          </a:solidFill>
-          <a:ln w="9525">
-            <a:solidFill>
-              <a:srgbClr val="5A6275"/>
-            </a:solidFill>
-            <a:prstDash val="solid"/>
-          </a:ln>
-        </p:spPr>
-      </p:sp>
-      <p:sp>
-        <p:nvSpPr>
-          <p:cNvPr id="38" name="Shape 36"/>
-          <p:cNvSpPr/>
-          <p:nvPr/>
-        </p:nvSpPr>
-        <p:spPr>
-          <a:xfrm>
-            <a:off x="4078224" y="4105656"/>
-            <a:ext cx="256032" cy="256032"/>
-          </a:xfrm>
-          <a:prstGeom prst="ellipse">
-            <a:avLst/>
-          </a:prstGeom>
-          <a:solidFill>
-            <a:srgbClr val="B9C0CC"/>
-          </a:solidFill>
-          <a:ln w="9525">
-            <a:solidFill>
-              <a:srgbClr val="5A6275"/>
-            </a:solidFill>
-            <a:prstDash val="solid"/>
-          </a:ln>
-        </p:spPr>
-      </p:sp>
-      <p:sp>
-        <p:nvSpPr>
-          <p:cNvPr id="39" name="Shape 37"/>
-          <p:cNvSpPr/>
-          <p:nvPr/>
-        </p:nvSpPr>
-        <p:spPr>
-          <a:xfrm>
-            <a:off x="4411980" y="4105656"/>
-            <a:ext cx="256032" cy="256032"/>
-          </a:xfrm>
-          <a:prstGeom prst="ellipse">
-            <a:avLst/>
-          </a:prstGeom>
-          <a:solidFill>
-            <a:srgbClr val="B9C0CC"/>
-          </a:solidFill>
-          <a:ln w="9525">
-            <a:solidFill>
-              <a:srgbClr val="5A6275"/>
-            </a:solidFill>
-            <a:prstDash val="solid"/>
-          </a:ln>
-        </p:spPr>
-      </p:sp>
-      <p:sp>
-        <p:nvSpPr>
-          <p:cNvPr id="40" name="Shape 38"/>
-          <p:cNvSpPr/>
-          <p:nvPr/>
-        </p:nvSpPr>
-        <p:spPr>
-          <a:xfrm>
-            <a:off x="4745736" y="4105656"/>
-            <a:ext cx="256032" cy="256032"/>
-          </a:xfrm>
-          <a:prstGeom prst="ellipse">
-            <a:avLst/>
-          </a:prstGeom>
-          <a:solidFill>
-            <a:srgbClr val="B9C0CC"/>
-          </a:solidFill>
-          <a:ln w="9525">
-            <a:solidFill>
-              <a:srgbClr val="5A6275"/>
-            </a:solidFill>
-            <a:prstDash val="solid"/>
-          </a:ln>
-        </p:spPr>
-      </p:sp>
-      <p:sp>
-        <p:nvSpPr>
-          <p:cNvPr id="41" name="Shape 39"/>
-          <p:cNvSpPr/>
-          <p:nvPr/>
-        </p:nvSpPr>
-        <p:spPr>
-          <a:xfrm>
-            <a:off x="5079492" y="4105656"/>
-            <a:ext cx="256032" cy="256032"/>
-          </a:xfrm>
-          <a:prstGeom prst="ellipse">
-            <a:avLst/>
-          </a:prstGeom>
-          <a:solidFill>
-            <a:srgbClr val="B9C0CC"/>
-          </a:solidFill>
-          <a:ln w="9525">
-            <a:solidFill>
-              <a:srgbClr val="5A6275"/>
-            </a:solidFill>
-            <a:prstDash val="solid"/>
-          </a:ln>
-        </p:spPr>
-      </p:sp>
-      <p:sp>
-        <p:nvSpPr>
-          <p:cNvPr id="42" name="Shape 40"/>
-          <p:cNvSpPr/>
-          <p:nvPr/>
-        </p:nvSpPr>
-        <p:spPr>
-          <a:xfrm>
-            <a:off x="5413248" y="4105656"/>
-            <a:ext cx="256032" cy="256032"/>
-          </a:xfrm>
-          <a:prstGeom prst="ellipse">
-            <a:avLst/>
-          </a:prstGeom>
-          <a:solidFill>
-            <a:srgbClr val="B9C0CC"/>
-          </a:solidFill>
-          <a:ln w="9525">
-            <a:solidFill>
-              <a:srgbClr val="5A6275"/>
-            </a:solidFill>
-            <a:prstDash val="solid"/>
-          </a:ln>
-        </p:spPr>
-      </p:sp>
-      <p:sp>
-        <p:nvSpPr>
-          <p:cNvPr id="43" name="Shape 41"/>
-          <p:cNvSpPr/>
-          <p:nvPr/>
-        </p:nvSpPr>
-        <p:spPr>
-          <a:xfrm>
-            <a:off x="740664" y="4407408"/>
-            <a:ext cx="256032" cy="256032"/>
-          </a:xfrm>
-          <a:prstGeom prst="ellipse">
-            <a:avLst/>
-          </a:prstGeom>
-          <a:solidFill>
-            <a:srgbClr val="B9C0CC"/>
-          </a:solidFill>
-          <a:ln w="9525">
-            <a:solidFill>
-              <a:srgbClr val="5A6275"/>
-            </a:solidFill>
-            <a:prstDash val="solid"/>
-          </a:ln>
-        </p:spPr>
-      </p:sp>
-      <p:sp>
-        <p:nvSpPr>
-          <p:cNvPr id="44" name="Shape 42"/>
-          <p:cNvSpPr/>
-          <p:nvPr/>
-        </p:nvSpPr>
-        <p:spPr>
-          <a:xfrm>
-            <a:off x="1074420" y="4407408"/>
-            <a:ext cx="256032" cy="256032"/>
-          </a:xfrm>
-          <a:prstGeom prst="ellipse">
-            <a:avLst/>
-          </a:prstGeom>
-          <a:solidFill>
-            <a:srgbClr val="B9C0CC"/>
-          </a:solidFill>
-          <a:ln w="9525">
-            <a:solidFill>
-              <a:srgbClr val="5A6275"/>
-            </a:solidFill>
-            <a:prstDash val="solid"/>
-          </a:ln>
-        </p:spPr>
-      </p:sp>
-      <p:sp>
-        <p:nvSpPr>
-          <p:cNvPr id="45" name="Shape 43"/>
-          <p:cNvSpPr/>
-          <p:nvPr/>
-        </p:nvSpPr>
-        <p:spPr>
-          <a:xfrm>
-            <a:off x="1408176" y="4407408"/>
-            <a:ext cx="256032" cy="256032"/>
-          </a:xfrm>
-          <a:prstGeom prst="ellipse">
-            <a:avLst/>
-          </a:prstGeom>
-          <a:solidFill>
-            <a:srgbClr val="B9C0CC"/>
-          </a:solidFill>
-          <a:ln w="9525">
-            <a:solidFill>
-              <a:srgbClr val="5A6275"/>
-            </a:solidFill>
-            <a:prstDash val="solid"/>
-          </a:ln>
-        </p:spPr>
-      </p:sp>
-      <p:sp>
-        <p:nvSpPr>
-          <p:cNvPr id="46" name="Shape 44"/>
-          <p:cNvSpPr/>
-          <p:nvPr/>
-        </p:nvSpPr>
-        <p:spPr>
-          <a:xfrm>
-            <a:off x="1741932" y="4407408"/>
-            <a:ext cx="256032" cy="256032"/>
-          </a:xfrm>
-          <a:prstGeom prst="ellipse">
-            <a:avLst/>
-          </a:prstGeom>
-          <a:solidFill>
-            <a:srgbClr val="B9C0CC"/>
-          </a:solidFill>
-          <a:ln w="9525">
-            <a:solidFill>
-              <a:srgbClr val="5A6275"/>
-            </a:solidFill>
-            <a:prstDash val="solid"/>
-          </a:ln>
-        </p:spPr>
-      </p:sp>
-      <p:sp>
-        <p:nvSpPr>
-          <p:cNvPr id="47" name="Shape 45"/>
-          <p:cNvSpPr/>
-          <p:nvPr/>
-        </p:nvSpPr>
-        <p:spPr>
-          <a:xfrm>
-            <a:off x="2075688" y="4407408"/>
-            <a:ext cx="256032" cy="256032"/>
-          </a:xfrm>
-          <a:prstGeom prst="ellipse">
-            <a:avLst/>
-          </a:prstGeom>
-          <a:solidFill>
-            <a:srgbClr val="B9C0CC"/>
-          </a:solidFill>
-          <a:ln w="9525">
-            <a:solidFill>
-              <a:srgbClr val="5A6275"/>
-            </a:solidFill>
-            <a:prstDash val="solid"/>
-          </a:ln>
-        </p:spPr>
-      </p:sp>
-      <p:sp>
-        <p:nvSpPr>
-          <p:cNvPr id="48" name="Shape 46"/>
-          <p:cNvSpPr/>
-          <p:nvPr/>
-        </p:nvSpPr>
-        <p:spPr>
-          <a:xfrm>
-            <a:off x="2409444" y="4407408"/>
-            <a:ext cx="256032" cy="256032"/>
-          </a:xfrm>
-          <a:prstGeom prst="ellipse">
-            <a:avLst/>
-          </a:prstGeom>
-          <a:solidFill>
-            <a:srgbClr val="B9C0CC"/>
-          </a:solidFill>
-          <a:ln w="9525">
-            <a:solidFill>
-              <a:srgbClr val="5A6275"/>
-            </a:solidFill>
-            <a:prstDash val="solid"/>
-          </a:ln>
-        </p:spPr>
-      </p:sp>
-      <p:sp>
-        <p:nvSpPr>
-          <p:cNvPr id="49" name="Shape 47"/>
-          <p:cNvSpPr/>
-          <p:nvPr/>
-        </p:nvSpPr>
-        <p:spPr>
-          <a:xfrm>
-            <a:off x="2743200" y="4407408"/>
-            <a:ext cx="256032" cy="256032"/>
-          </a:xfrm>
-          <a:prstGeom prst="ellipse">
-            <a:avLst/>
-          </a:prstGeom>
-          <a:solidFill>
-            <a:srgbClr val="B9C0CC"/>
-          </a:solidFill>
-          <a:ln w="9525">
-            <a:solidFill>
-              <a:srgbClr val="5A6275"/>
-            </a:solidFill>
-            <a:prstDash val="solid"/>
-          </a:ln>
-        </p:spPr>
-      </p:sp>
-      <p:sp>
-        <p:nvSpPr>
-          <p:cNvPr id="50" name="Shape 48"/>
-          <p:cNvSpPr/>
-          <p:nvPr/>
-        </p:nvSpPr>
-        <p:spPr>
-          <a:xfrm>
-            <a:off x="3076956" y="4407408"/>
-            <a:ext cx="256032" cy="256032"/>
-          </a:xfrm>
-          <a:prstGeom prst="ellipse">
-            <a:avLst/>
-          </a:prstGeom>
-          <a:solidFill>
-            <a:srgbClr val="B9C0CC"/>
-          </a:solidFill>
-          <a:ln w="9525">
-            <a:solidFill>
-              <a:srgbClr val="5A6275"/>
-            </a:solidFill>
-            <a:prstDash val="solid"/>
-          </a:ln>
-        </p:spPr>
-      </p:sp>
-      <p:sp>
-        <p:nvSpPr>
-          <p:cNvPr id="51" name="Shape 49"/>
-          <p:cNvSpPr/>
-          <p:nvPr/>
-        </p:nvSpPr>
-        <p:spPr>
-          <a:xfrm>
-            <a:off x="3410712" y="4407408"/>
-            <a:ext cx="256032" cy="256032"/>
-          </a:xfrm>
-          <a:prstGeom prst="ellipse">
-            <a:avLst/>
-          </a:prstGeom>
-          <a:solidFill>
-            <a:srgbClr val="B9C0CC"/>
-          </a:solidFill>
-          <a:ln w="9525">
-            <a:solidFill>
-              <a:srgbClr val="5A6275"/>
-            </a:solidFill>
-            <a:prstDash val="solid"/>
-          </a:ln>
-        </p:spPr>
-      </p:sp>
-      <p:sp>
-        <p:nvSpPr>
-          <p:cNvPr id="52" name="Shape 50"/>
-          <p:cNvSpPr/>
-          <p:nvPr/>
-        </p:nvSpPr>
-        <p:spPr>
-          <a:xfrm>
-            <a:off x="3744468" y="4407408"/>
-            <a:ext cx="256032" cy="256032"/>
-          </a:xfrm>
-          <a:prstGeom prst="ellipse">
-            <a:avLst/>
-          </a:prstGeom>
-          <a:solidFill>
-            <a:srgbClr val="B9C0CC"/>
-          </a:solidFill>
-          <a:ln w="9525">
-            <a:solidFill>
-              <a:srgbClr val="5A6275"/>
-            </a:solidFill>
-            <a:prstDash val="solid"/>
-          </a:ln>
-        </p:spPr>
-      </p:sp>
-      <p:sp>
-        <p:nvSpPr>
-          <p:cNvPr id="53" name="Shape 51"/>
-          <p:cNvSpPr/>
-          <p:nvPr/>
-        </p:nvSpPr>
-        <p:spPr>
-          <a:xfrm>
-            <a:off x="4078224" y="4407408"/>
-            <a:ext cx="256032" cy="256032"/>
-          </a:xfrm>
-          <a:prstGeom prst="ellipse">
-            <a:avLst/>
-          </a:prstGeom>
-          <a:solidFill>
-            <a:srgbClr val="B9C0CC"/>
-          </a:solidFill>
-          <a:ln w="9525">
-            <a:solidFill>
-              <a:srgbClr val="5A6275"/>
-            </a:solidFill>
-            <a:prstDash val="solid"/>
-          </a:ln>
-        </p:spPr>
-      </p:sp>
-      <p:sp>
-        <p:nvSpPr>
-          <p:cNvPr id="54" name="Shape 52"/>
-          <p:cNvSpPr/>
-          <p:nvPr/>
-        </p:nvSpPr>
-        <p:spPr>
-          <a:xfrm>
-            <a:off x="4411980" y="4407408"/>
-            <a:ext cx="256032" cy="256032"/>
-          </a:xfrm>
-          <a:prstGeom prst="ellipse">
-            <a:avLst/>
-          </a:prstGeom>
-          <a:solidFill>
-            <a:srgbClr val="B9C0CC"/>
-          </a:solidFill>
-          <a:ln w="9525">
-            <a:solidFill>
-              <a:srgbClr val="5A6275"/>
-            </a:solidFill>
-            <a:prstDash val="solid"/>
-          </a:ln>
-        </p:spPr>
-      </p:sp>
-      <p:sp>
-        <p:nvSpPr>
-          <p:cNvPr id="55" name="Shape 53"/>
-          <p:cNvSpPr/>
-          <p:nvPr/>
-        </p:nvSpPr>
-        <p:spPr>
-          <a:xfrm>
-            <a:off x="4745736" y="4407408"/>
-            <a:ext cx="256032" cy="256032"/>
-          </a:xfrm>
-          <a:prstGeom prst="ellipse">
-            <a:avLst/>
-          </a:prstGeom>
-          <a:solidFill>
-            <a:srgbClr val="B9C0CC"/>
-          </a:solidFill>
-          <a:ln w="9525">
-            <a:solidFill>
-              <a:srgbClr val="5A6275"/>
-            </a:solidFill>
-            <a:prstDash val="solid"/>
-          </a:ln>
-        </p:spPr>
-      </p:sp>
-      <p:sp>
-        <p:nvSpPr>
-          <p:cNvPr id="56" name="Shape 54"/>
-          <p:cNvSpPr/>
-          <p:nvPr/>
-        </p:nvSpPr>
-        <p:spPr>
-          <a:xfrm>
-            <a:off x="5079492" y="4407408"/>
-            <a:ext cx="256032" cy="256032"/>
-          </a:xfrm>
-          <a:prstGeom prst="ellipse">
-            <a:avLst/>
-          </a:prstGeom>
-          <a:solidFill>
-            <a:srgbClr val="B9C0CC"/>
-          </a:solidFill>
-          <a:ln w="9525">
-            <a:solidFill>
-              <a:srgbClr val="5A6275"/>
-            </a:solidFill>
-            <a:prstDash val="solid"/>
-          </a:ln>
-        </p:spPr>
-      </p:sp>
-      <p:sp>
-        <p:nvSpPr>
-          <p:cNvPr id="57" name="Shape 55"/>
-          <p:cNvSpPr/>
-          <p:nvPr/>
-        </p:nvSpPr>
-        <p:spPr>
-          <a:xfrm>
-            <a:off x="5413248" y="4407408"/>
-            <a:ext cx="256032" cy="256032"/>
-          </a:xfrm>
-          <a:prstGeom prst="ellipse">
-            <a:avLst/>
-          </a:prstGeom>
-          <a:solidFill>
-            <a:srgbClr val="B9C0CC"/>
-          </a:solidFill>
-          <a:ln w="9525">
-            <a:solidFill>
-              <a:srgbClr val="5A6275"/>
-            </a:solidFill>
-            <a:prstDash val="solid"/>
-          </a:ln>
-        </p:spPr>
-      </p:sp>
-      <p:sp>
-        <p:nvSpPr>
-          <p:cNvPr id="58" name="Text 56"/>
-          <p:cNvSpPr/>
-          <p:nvPr/>
-        </p:nvSpPr>
-        <p:spPr>
-          <a:xfrm>
-            <a:off x="685800" y="4800600"/>
-            <a:ext cx="5029200" cy="228600"/>
-          </a:xfrm>
-          <a:prstGeom prst="rect">
-            <a:avLst/>
-          </a:prstGeom>
-          <a:noFill/>
-          <a:ln/>
-        </p:spPr>
-        <p:txBody>
-          <a:bodyPr wrap="square" lIns="0" tIns="0" rIns="0" bIns="0" rtlCol="0" anchor="ctr"/>
-          <a:lstStyle/>
-          <a:p>
-            <a:pPr algn="ctr" indent="0" marL="0">
-              <a:buNone/>
-            </a:pPr>
-            <a:r>
-              <a:rPr lang="en-US" sz="1050" b="1" dirty="0">
-                <a:solidFill>
-                  <a:srgbClr val="262B3A"/>
-                </a:solidFill>
-                <a:latin typeface="Calibri" pitchFamily="34" charset="0"/>
-                <a:ea typeface="Calibri" pitchFamily="34" charset="-122"/>
-                <a:cs typeface="Calibri" pitchFamily="34" charset="-120"/>
-              </a:rPr>
-              <a:t>iron</a:t>
-            </a:r>
-            <a:r>
-              <a:rPr lang="en-US" sz="1050" dirty="0">
-                <a:solidFill>
-                  <a:srgbClr val="262B3A"/>
-                </a:solidFill>
-                <a:latin typeface="Calibri" pitchFamily="34" charset="0"/>
-                <a:ea typeface="Calibri" pitchFamily="34" charset="-122"/>
-                <a:cs typeface="Calibri" pitchFamily="34" charset="-120"/>
-              </a:rPr>
-              <a:t> (giant metallic lattice)</a:t>
-            </a:r>
-            <a:endParaRPr lang="en-US" sz="1050" dirty="0"/>
-          </a:p>
-        </p:txBody>
-      </p:sp>
-      <p:sp>
-        <p:nvSpPr>
-          <p:cNvPr id="59" name="Shape 57"/>
-          <p:cNvSpPr/>
-          <p:nvPr/>
-        </p:nvSpPr>
-        <p:spPr>
-          <a:xfrm>
-            <a:off x="1280160" y="2423160"/>
-            <a:ext cx="3840480" cy="2651760"/>
+            <a:off x="1508760" y="2788920"/>
+            <a:ext cx="3383280" cy="1920240"/>
           </a:xfrm>
           <a:prstGeom prst="ellipse">
             <a:avLst/>
@@ -43622,14 +42571,1214 @@
       </p:sp>
       <p:sp>
         <p:nvSpPr>
+          <p:cNvPr id="13" name="Shape 11"/>
+          <p:cNvSpPr/>
+          <p:nvPr/>
+        </p:nvSpPr>
+        <p:spPr>
+          <a:xfrm>
+            <a:off x="685800" y="3749040"/>
+            <a:ext cx="5029200" cy="1005840"/>
+          </a:xfrm>
+          <a:prstGeom prst="rect">
+            <a:avLst/>
+          </a:prstGeom>
+          <a:solidFill>
+            <a:srgbClr val="E6E9EE"/>
+          </a:solidFill>
+          <a:ln w="12700">
+            <a:solidFill>
+              <a:srgbClr val="5A6275"/>
+            </a:solidFill>
+            <a:prstDash val="solid"/>
+          </a:ln>
+        </p:spPr>
+      </p:sp>
+      <p:sp>
+        <p:nvSpPr>
+          <p:cNvPr id="14" name="Shape 12"/>
+          <p:cNvSpPr/>
+          <p:nvPr/>
+        </p:nvSpPr>
+        <p:spPr>
+          <a:xfrm>
+            <a:off x="740664" y="3803904"/>
+            <a:ext cx="256032" cy="256032"/>
+          </a:xfrm>
+          <a:prstGeom prst="ellipse">
+            <a:avLst/>
+          </a:prstGeom>
+          <a:solidFill>
+            <a:srgbClr val="B9C0CC"/>
+          </a:solidFill>
+          <a:ln w="9525">
+            <a:solidFill>
+              <a:srgbClr val="5A6275"/>
+            </a:solidFill>
+            <a:prstDash val="solid"/>
+          </a:ln>
+        </p:spPr>
+      </p:sp>
+      <p:sp>
+        <p:nvSpPr>
+          <p:cNvPr id="15" name="Shape 13"/>
+          <p:cNvSpPr/>
+          <p:nvPr/>
+        </p:nvSpPr>
+        <p:spPr>
+          <a:xfrm>
+            <a:off x="1074420" y="3803904"/>
+            <a:ext cx="256032" cy="256032"/>
+          </a:xfrm>
+          <a:prstGeom prst="ellipse">
+            <a:avLst/>
+          </a:prstGeom>
+          <a:solidFill>
+            <a:srgbClr val="B9C0CC"/>
+          </a:solidFill>
+          <a:ln w="9525">
+            <a:solidFill>
+              <a:srgbClr val="5A6275"/>
+            </a:solidFill>
+            <a:prstDash val="solid"/>
+          </a:ln>
+        </p:spPr>
+      </p:sp>
+      <p:sp>
+        <p:nvSpPr>
+          <p:cNvPr id="16" name="Shape 14"/>
+          <p:cNvSpPr/>
+          <p:nvPr/>
+        </p:nvSpPr>
+        <p:spPr>
+          <a:xfrm>
+            <a:off x="1408176" y="3803904"/>
+            <a:ext cx="256032" cy="256032"/>
+          </a:xfrm>
+          <a:prstGeom prst="ellipse">
+            <a:avLst/>
+          </a:prstGeom>
+          <a:solidFill>
+            <a:srgbClr val="B9C0CC"/>
+          </a:solidFill>
+          <a:ln w="9525">
+            <a:solidFill>
+              <a:srgbClr val="5A6275"/>
+            </a:solidFill>
+            <a:prstDash val="solid"/>
+          </a:ln>
+        </p:spPr>
+      </p:sp>
+      <p:sp>
+        <p:nvSpPr>
+          <p:cNvPr id="17" name="Shape 15"/>
+          <p:cNvSpPr/>
+          <p:nvPr/>
+        </p:nvSpPr>
+        <p:spPr>
+          <a:xfrm>
+            <a:off x="1741932" y="3803904"/>
+            <a:ext cx="256032" cy="256032"/>
+          </a:xfrm>
+          <a:prstGeom prst="ellipse">
+            <a:avLst/>
+          </a:prstGeom>
+          <a:solidFill>
+            <a:srgbClr val="B9C0CC"/>
+          </a:solidFill>
+          <a:ln w="9525">
+            <a:solidFill>
+              <a:srgbClr val="5A6275"/>
+            </a:solidFill>
+            <a:prstDash val="solid"/>
+          </a:ln>
+        </p:spPr>
+      </p:sp>
+      <p:sp>
+        <p:nvSpPr>
+          <p:cNvPr id="18" name="Shape 16"/>
+          <p:cNvSpPr/>
+          <p:nvPr/>
+        </p:nvSpPr>
+        <p:spPr>
+          <a:xfrm>
+            <a:off x="2075688" y="3803904"/>
+            <a:ext cx="256032" cy="256032"/>
+          </a:xfrm>
+          <a:prstGeom prst="ellipse">
+            <a:avLst/>
+          </a:prstGeom>
+          <a:solidFill>
+            <a:srgbClr val="B9C0CC"/>
+          </a:solidFill>
+          <a:ln w="9525">
+            <a:solidFill>
+              <a:srgbClr val="5A6275"/>
+            </a:solidFill>
+            <a:prstDash val="solid"/>
+          </a:ln>
+        </p:spPr>
+      </p:sp>
+      <p:sp>
+        <p:nvSpPr>
+          <p:cNvPr id="19" name="Shape 17"/>
+          <p:cNvSpPr/>
+          <p:nvPr/>
+        </p:nvSpPr>
+        <p:spPr>
+          <a:xfrm>
+            <a:off x="2409444" y="3803904"/>
+            <a:ext cx="256032" cy="256032"/>
+          </a:xfrm>
+          <a:prstGeom prst="ellipse">
+            <a:avLst/>
+          </a:prstGeom>
+          <a:solidFill>
+            <a:srgbClr val="B9C0CC"/>
+          </a:solidFill>
+          <a:ln w="9525">
+            <a:solidFill>
+              <a:srgbClr val="5A6275"/>
+            </a:solidFill>
+            <a:prstDash val="solid"/>
+          </a:ln>
+        </p:spPr>
+      </p:sp>
+      <p:sp>
+        <p:nvSpPr>
+          <p:cNvPr id="20" name="Shape 18"/>
+          <p:cNvSpPr/>
+          <p:nvPr/>
+        </p:nvSpPr>
+        <p:spPr>
+          <a:xfrm>
+            <a:off x="2743200" y="3803904"/>
+            <a:ext cx="256032" cy="256032"/>
+          </a:xfrm>
+          <a:prstGeom prst="ellipse">
+            <a:avLst/>
+          </a:prstGeom>
+          <a:solidFill>
+            <a:srgbClr val="B9C0CC"/>
+          </a:solidFill>
+          <a:ln w="9525">
+            <a:solidFill>
+              <a:srgbClr val="5A6275"/>
+            </a:solidFill>
+            <a:prstDash val="solid"/>
+          </a:ln>
+        </p:spPr>
+      </p:sp>
+      <p:sp>
+        <p:nvSpPr>
+          <p:cNvPr id="21" name="Shape 19"/>
+          <p:cNvSpPr/>
+          <p:nvPr/>
+        </p:nvSpPr>
+        <p:spPr>
+          <a:xfrm>
+            <a:off x="3076956" y="3803904"/>
+            <a:ext cx="256032" cy="256032"/>
+          </a:xfrm>
+          <a:prstGeom prst="ellipse">
+            <a:avLst/>
+          </a:prstGeom>
+          <a:solidFill>
+            <a:srgbClr val="B9C0CC"/>
+          </a:solidFill>
+          <a:ln w="9525">
+            <a:solidFill>
+              <a:srgbClr val="5A6275"/>
+            </a:solidFill>
+            <a:prstDash val="solid"/>
+          </a:ln>
+        </p:spPr>
+      </p:sp>
+      <p:sp>
+        <p:nvSpPr>
+          <p:cNvPr id="22" name="Shape 20"/>
+          <p:cNvSpPr/>
+          <p:nvPr/>
+        </p:nvSpPr>
+        <p:spPr>
+          <a:xfrm>
+            <a:off x="3410712" y="3803904"/>
+            <a:ext cx="256032" cy="256032"/>
+          </a:xfrm>
+          <a:prstGeom prst="ellipse">
+            <a:avLst/>
+          </a:prstGeom>
+          <a:solidFill>
+            <a:srgbClr val="B9C0CC"/>
+          </a:solidFill>
+          <a:ln w="9525">
+            <a:solidFill>
+              <a:srgbClr val="5A6275"/>
+            </a:solidFill>
+            <a:prstDash val="solid"/>
+          </a:ln>
+        </p:spPr>
+      </p:sp>
+      <p:sp>
+        <p:nvSpPr>
+          <p:cNvPr id="23" name="Shape 21"/>
+          <p:cNvSpPr/>
+          <p:nvPr/>
+        </p:nvSpPr>
+        <p:spPr>
+          <a:xfrm>
+            <a:off x="3744468" y="3803904"/>
+            <a:ext cx="256032" cy="256032"/>
+          </a:xfrm>
+          <a:prstGeom prst="ellipse">
+            <a:avLst/>
+          </a:prstGeom>
+          <a:solidFill>
+            <a:srgbClr val="B9C0CC"/>
+          </a:solidFill>
+          <a:ln w="9525">
+            <a:solidFill>
+              <a:srgbClr val="5A6275"/>
+            </a:solidFill>
+            <a:prstDash val="solid"/>
+          </a:ln>
+        </p:spPr>
+      </p:sp>
+      <p:sp>
+        <p:nvSpPr>
+          <p:cNvPr id="24" name="Shape 22"/>
+          <p:cNvSpPr/>
+          <p:nvPr/>
+        </p:nvSpPr>
+        <p:spPr>
+          <a:xfrm>
+            <a:off x="4078224" y="3803904"/>
+            <a:ext cx="256032" cy="256032"/>
+          </a:xfrm>
+          <a:prstGeom prst="ellipse">
+            <a:avLst/>
+          </a:prstGeom>
+          <a:solidFill>
+            <a:srgbClr val="B9C0CC"/>
+          </a:solidFill>
+          <a:ln w="9525">
+            <a:solidFill>
+              <a:srgbClr val="5A6275"/>
+            </a:solidFill>
+            <a:prstDash val="solid"/>
+          </a:ln>
+        </p:spPr>
+      </p:sp>
+      <p:sp>
+        <p:nvSpPr>
+          <p:cNvPr id="25" name="Shape 23"/>
+          <p:cNvSpPr/>
+          <p:nvPr/>
+        </p:nvSpPr>
+        <p:spPr>
+          <a:xfrm>
+            <a:off x="4411980" y="3803904"/>
+            <a:ext cx="256032" cy="256032"/>
+          </a:xfrm>
+          <a:prstGeom prst="ellipse">
+            <a:avLst/>
+          </a:prstGeom>
+          <a:solidFill>
+            <a:srgbClr val="B9C0CC"/>
+          </a:solidFill>
+          <a:ln w="9525">
+            <a:solidFill>
+              <a:srgbClr val="5A6275"/>
+            </a:solidFill>
+            <a:prstDash val="solid"/>
+          </a:ln>
+        </p:spPr>
+      </p:sp>
+      <p:sp>
+        <p:nvSpPr>
+          <p:cNvPr id="26" name="Shape 24"/>
+          <p:cNvSpPr/>
+          <p:nvPr/>
+        </p:nvSpPr>
+        <p:spPr>
+          <a:xfrm>
+            <a:off x="4745736" y="3803904"/>
+            <a:ext cx="256032" cy="256032"/>
+          </a:xfrm>
+          <a:prstGeom prst="ellipse">
+            <a:avLst/>
+          </a:prstGeom>
+          <a:solidFill>
+            <a:srgbClr val="B9C0CC"/>
+          </a:solidFill>
+          <a:ln w="9525">
+            <a:solidFill>
+              <a:srgbClr val="5A6275"/>
+            </a:solidFill>
+            <a:prstDash val="solid"/>
+          </a:ln>
+        </p:spPr>
+      </p:sp>
+      <p:sp>
+        <p:nvSpPr>
+          <p:cNvPr id="27" name="Shape 25"/>
+          <p:cNvSpPr/>
+          <p:nvPr/>
+        </p:nvSpPr>
+        <p:spPr>
+          <a:xfrm>
+            <a:off x="5079492" y="3803904"/>
+            <a:ext cx="256032" cy="256032"/>
+          </a:xfrm>
+          <a:prstGeom prst="ellipse">
+            <a:avLst/>
+          </a:prstGeom>
+          <a:solidFill>
+            <a:srgbClr val="B9C0CC"/>
+          </a:solidFill>
+          <a:ln w="9525">
+            <a:solidFill>
+              <a:srgbClr val="5A6275"/>
+            </a:solidFill>
+            <a:prstDash val="solid"/>
+          </a:ln>
+        </p:spPr>
+      </p:sp>
+      <p:sp>
+        <p:nvSpPr>
+          <p:cNvPr id="28" name="Shape 26"/>
+          <p:cNvSpPr/>
+          <p:nvPr/>
+        </p:nvSpPr>
+        <p:spPr>
+          <a:xfrm>
+            <a:off x="5413248" y="3803904"/>
+            <a:ext cx="256032" cy="256032"/>
+          </a:xfrm>
+          <a:prstGeom prst="ellipse">
+            <a:avLst/>
+          </a:prstGeom>
+          <a:solidFill>
+            <a:srgbClr val="B9C0CC"/>
+          </a:solidFill>
+          <a:ln w="9525">
+            <a:solidFill>
+              <a:srgbClr val="5A6275"/>
+            </a:solidFill>
+            <a:prstDash val="solid"/>
+          </a:ln>
+        </p:spPr>
+      </p:sp>
+      <p:sp>
+        <p:nvSpPr>
+          <p:cNvPr id="29" name="Shape 27"/>
+          <p:cNvSpPr/>
+          <p:nvPr/>
+        </p:nvSpPr>
+        <p:spPr>
+          <a:xfrm>
+            <a:off x="740664" y="4105656"/>
+            <a:ext cx="256032" cy="256032"/>
+          </a:xfrm>
+          <a:prstGeom prst="ellipse">
+            <a:avLst/>
+          </a:prstGeom>
+          <a:solidFill>
+            <a:srgbClr val="B9C0CC"/>
+          </a:solidFill>
+          <a:ln w="9525">
+            <a:solidFill>
+              <a:srgbClr val="5A6275"/>
+            </a:solidFill>
+            <a:prstDash val="solid"/>
+          </a:ln>
+        </p:spPr>
+      </p:sp>
+      <p:sp>
+        <p:nvSpPr>
+          <p:cNvPr id="30" name="Shape 28"/>
+          <p:cNvSpPr/>
+          <p:nvPr/>
+        </p:nvSpPr>
+        <p:spPr>
+          <a:xfrm>
+            <a:off x="1074420" y="4105656"/>
+            <a:ext cx="256032" cy="256032"/>
+          </a:xfrm>
+          <a:prstGeom prst="ellipse">
+            <a:avLst/>
+          </a:prstGeom>
+          <a:solidFill>
+            <a:srgbClr val="B9C0CC"/>
+          </a:solidFill>
+          <a:ln w="9525">
+            <a:solidFill>
+              <a:srgbClr val="5A6275"/>
+            </a:solidFill>
+            <a:prstDash val="solid"/>
+          </a:ln>
+        </p:spPr>
+      </p:sp>
+      <p:sp>
+        <p:nvSpPr>
+          <p:cNvPr id="31" name="Shape 29"/>
+          <p:cNvSpPr/>
+          <p:nvPr/>
+        </p:nvSpPr>
+        <p:spPr>
+          <a:xfrm>
+            <a:off x="1408176" y="4105656"/>
+            <a:ext cx="256032" cy="256032"/>
+          </a:xfrm>
+          <a:prstGeom prst="ellipse">
+            <a:avLst/>
+          </a:prstGeom>
+          <a:solidFill>
+            <a:srgbClr val="B9C0CC"/>
+          </a:solidFill>
+          <a:ln w="9525">
+            <a:solidFill>
+              <a:srgbClr val="5A6275"/>
+            </a:solidFill>
+            <a:prstDash val="solid"/>
+          </a:ln>
+        </p:spPr>
+      </p:sp>
+      <p:sp>
+        <p:nvSpPr>
+          <p:cNvPr id="32" name="Shape 30"/>
+          <p:cNvSpPr/>
+          <p:nvPr/>
+        </p:nvSpPr>
+        <p:spPr>
+          <a:xfrm>
+            <a:off x="1741932" y="4105656"/>
+            <a:ext cx="256032" cy="256032"/>
+          </a:xfrm>
+          <a:prstGeom prst="ellipse">
+            <a:avLst/>
+          </a:prstGeom>
+          <a:solidFill>
+            <a:srgbClr val="B9C0CC"/>
+          </a:solidFill>
+          <a:ln w="9525">
+            <a:solidFill>
+              <a:srgbClr val="5A6275"/>
+            </a:solidFill>
+            <a:prstDash val="solid"/>
+          </a:ln>
+        </p:spPr>
+      </p:sp>
+      <p:sp>
+        <p:nvSpPr>
+          <p:cNvPr id="33" name="Shape 31"/>
+          <p:cNvSpPr/>
+          <p:nvPr/>
+        </p:nvSpPr>
+        <p:spPr>
+          <a:xfrm>
+            <a:off x="2075688" y="4105656"/>
+            <a:ext cx="256032" cy="256032"/>
+          </a:xfrm>
+          <a:prstGeom prst="ellipse">
+            <a:avLst/>
+          </a:prstGeom>
+          <a:solidFill>
+            <a:srgbClr val="B9C0CC"/>
+          </a:solidFill>
+          <a:ln w="9525">
+            <a:solidFill>
+              <a:srgbClr val="5A6275"/>
+            </a:solidFill>
+            <a:prstDash val="solid"/>
+          </a:ln>
+        </p:spPr>
+      </p:sp>
+      <p:sp>
+        <p:nvSpPr>
+          <p:cNvPr id="34" name="Shape 32"/>
+          <p:cNvSpPr/>
+          <p:nvPr/>
+        </p:nvSpPr>
+        <p:spPr>
+          <a:xfrm>
+            <a:off x="2409444" y="4105656"/>
+            <a:ext cx="256032" cy="256032"/>
+          </a:xfrm>
+          <a:prstGeom prst="ellipse">
+            <a:avLst/>
+          </a:prstGeom>
+          <a:solidFill>
+            <a:srgbClr val="B9C0CC"/>
+          </a:solidFill>
+          <a:ln w="9525">
+            <a:solidFill>
+              <a:srgbClr val="5A6275"/>
+            </a:solidFill>
+            <a:prstDash val="solid"/>
+          </a:ln>
+        </p:spPr>
+      </p:sp>
+      <p:sp>
+        <p:nvSpPr>
+          <p:cNvPr id="35" name="Shape 33"/>
+          <p:cNvSpPr/>
+          <p:nvPr/>
+        </p:nvSpPr>
+        <p:spPr>
+          <a:xfrm>
+            <a:off x="2743200" y="4105656"/>
+            <a:ext cx="256032" cy="256032"/>
+          </a:xfrm>
+          <a:prstGeom prst="ellipse">
+            <a:avLst/>
+          </a:prstGeom>
+          <a:solidFill>
+            <a:srgbClr val="B9C0CC"/>
+          </a:solidFill>
+          <a:ln w="9525">
+            <a:solidFill>
+              <a:srgbClr val="5A6275"/>
+            </a:solidFill>
+            <a:prstDash val="solid"/>
+          </a:ln>
+        </p:spPr>
+      </p:sp>
+      <p:sp>
+        <p:nvSpPr>
+          <p:cNvPr id="36" name="Shape 34"/>
+          <p:cNvSpPr/>
+          <p:nvPr/>
+        </p:nvSpPr>
+        <p:spPr>
+          <a:xfrm>
+            <a:off x="3076956" y="4105656"/>
+            <a:ext cx="256032" cy="256032"/>
+          </a:xfrm>
+          <a:prstGeom prst="ellipse">
+            <a:avLst/>
+          </a:prstGeom>
+          <a:solidFill>
+            <a:srgbClr val="B9C0CC"/>
+          </a:solidFill>
+          <a:ln w="9525">
+            <a:solidFill>
+              <a:srgbClr val="5A6275"/>
+            </a:solidFill>
+            <a:prstDash val="solid"/>
+          </a:ln>
+        </p:spPr>
+      </p:sp>
+      <p:sp>
+        <p:nvSpPr>
+          <p:cNvPr id="37" name="Shape 35"/>
+          <p:cNvSpPr/>
+          <p:nvPr/>
+        </p:nvSpPr>
+        <p:spPr>
+          <a:xfrm>
+            <a:off x="3410712" y="4105656"/>
+            <a:ext cx="256032" cy="256032"/>
+          </a:xfrm>
+          <a:prstGeom prst="ellipse">
+            <a:avLst/>
+          </a:prstGeom>
+          <a:solidFill>
+            <a:srgbClr val="B9C0CC"/>
+          </a:solidFill>
+          <a:ln w="9525">
+            <a:solidFill>
+              <a:srgbClr val="5A6275"/>
+            </a:solidFill>
+            <a:prstDash val="solid"/>
+          </a:ln>
+        </p:spPr>
+      </p:sp>
+      <p:sp>
+        <p:nvSpPr>
+          <p:cNvPr id="38" name="Shape 36"/>
+          <p:cNvSpPr/>
+          <p:nvPr/>
+        </p:nvSpPr>
+        <p:spPr>
+          <a:xfrm>
+            <a:off x="3744468" y="4105656"/>
+            <a:ext cx="256032" cy="256032"/>
+          </a:xfrm>
+          <a:prstGeom prst="ellipse">
+            <a:avLst/>
+          </a:prstGeom>
+          <a:solidFill>
+            <a:srgbClr val="B9C0CC"/>
+          </a:solidFill>
+          <a:ln w="9525">
+            <a:solidFill>
+              <a:srgbClr val="5A6275"/>
+            </a:solidFill>
+            <a:prstDash val="solid"/>
+          </a:ln>
+        </p:spPr>
+      </p:sp>
+      <p:sp>
+        <p:nvSpPr>
+          <p:cNvPr id="39" name="Shape 37"/>
+          <p:cNvSpPr/>
+          <p:nvPr/>
+        </p:nvSpPr>
+        <p:spPr>
+          <a:xfrm>
+            <a:off x="4078224" y="4105656"/>
+            <a:ext cx="256032" cy="256032"/>
+          </a:xfrm>
+          <a:prstGeom prst="ellipse">
+            <a:avLst/>
+          </a:prstGeom>
+          <a:solidFill>
+            <a:srgbClr val="B9C0CC"/>
+          </a:solidFill>
+          <a:ln w="9525">
+            <a:solidFill>
+              <a:srgbClr val="5A6275"/>
+            </a:solidFill>
+            <a:prstDash val="solid"/>
+          </a:ln>
+        </p:spPr>
+      </p:sp>
+      <p:sp>
+        <p:nvSpPr>
+          <p:cNvPr id="40" name="Shape 38"/>
+          <p:cNvSpPr/>
+          <p:nvPr/>
+        </p:nvSpPr>
+        <p:spPr>
+          <a:xfrm>
+            <a:off x="4411980" y="4105656"/>
+            <a:ext cx="256032" cy="256032"/>
+          </a:xfrm>
+          <a:prstGeom prst="ellipse">
+            <a:avLst/>
+          </a:prstGeom>
+          <a:solidFill>
+            <a:srgbClr val="B9C0CC"/>
+          </a:solidFill>
+          <a:ln w="9525">
+            <a:solidFill>
+              <a:srgbClr val="5A6275"/>
+            </a:solidFill>
+            <a:prstDash val="solid"/>
+          </a:ln>
+        </p:spPr>
+      </p:sp>
+      <p:sp>
+        <p:nvSpPr>
+          <p:cNvPr id="41" name="Shape 39"/>
+          <p:cNvSpPr/>
+          <p:nvPr/>
+        </p:nvSpPr>
+        <p:spPr>
+          <a:xfrm>
+            <a:off x="4745736" y="4105656"/>
+            <a:ext cx="256032" cy="256032"/>
+          </a:xfrm>
+          <a:prstGeom prst="ellipse">
+            <a:avLst/>
+          </a:prstGeom>
+          <a:solidFill>
+            <a:srgbClr val="B9C0CC"/>
+          </a:solidFill>
+          <a:ln w="9525">
+            <a:solidFill>
+              <a:srgbClr val="5A6275"/>
+            </a:solidFill>
+            <a:prstDash val="solid"/>
+          </a:ln>
+        </p:spPr>
+      </p:sp>
+      <p:sp>
+        <p:nvSpPr>
+          <p:cNvPr id="42" name="Shape 40"/>
+          <p:cNvSpPr/>
+          <p:nvPr/>
+        </p:nvSpPr>
+        <p:spPr>
+          <a:xfrm>
+            <a:off x="5079492" y="4105656"/>
+            <a:ext cx="256032" cy="256032"/>
+          </a:xfrm>
+          <a:prstGeom prst="ellipse">
+            <a:avLst/>
+          </a:prstGeom>
+          <a:solidFill>
+            <a:srgbClr val="B9C0CC"/>
+          </a:solidFill>
+          <a:ln w="9525">
+            <a:solidFill>
+              <a:srgbClr val="5A6275"/>
+            </a:solidFill>
+            <a:prstDash val="solid"/>
+          </a:ln>
+        </p:spPr>
+      </p:sp>
+      <p:sp>
+        <p:nvSpPr>
+          <p:cNvPr id="43" name="Shape 41"/>
+          <p:cNvSpPr/>
+          <p:nvPr/>
+        </p:nvSpPr>
+        <p:spPr>
+          <a:xfrm>
+            <a:off x="5413248" y="4105656"/>
+            <a:ext cx="256032" cy="256032"/>
+          </a:xfrm>
+          <a:prstGeom prst="ellipse">
+            <a:avLst/>
+          </a:prstGeom>
+          <a:solidFill>
+            <a:srgbClr val="B9C0CC"/>
+          </a:solidFill>
+          <a:ln w="9525">
+            <a:solidFill>
+              <a:srgbClr val="5A6275"/>
+            </a:solidFill>
+            <a:prstDash val="solid"/>
+          </a:ln>
+        </p:spPr>
+      </p:sp>
+      <p:sp>
+        <p:nvSpPr>
+          <p:cNvPr id="44" name="Shape 42"/>
+          <p:cNvSpPr/>
+          <p:nvPr/>
+        </p:nvSpPr>
+        <p:spPr>
+          <a:xfrm>
+            <a:off x="740664" y="4407408"/>
+            <a:ext cx="256032" cy="256032"/>
+          </a:xfrm>
+          <a:prstGeom prst="ellipse">
+            <a:avLst/>
+          </a:prstGeom>
+          <a:solidFill>
+            <a:srgbClr val="B9C0CC"/>
+          </a:solidFill>
+          <a:ln w="9525">
+            <a:solidFill>
+              <a:srgbClr val="5A6275"/>
+            </a:solidFill>
+            <a:prstDash val="solid"/>
+          </a:ln>
+        </p:spPr>
+      </p:sp>
+      <p:sp>
+        <p:nvSpPr>
+          <p:cNvPr id="45" name="Shape 43"/>
+          <p:cNvSpPr/>
+          <p:nvPr/>
+        </p:nvSpPr>
+        <p:spPr>
+          <a:xfrm>
+            <a:off x="1074420" y="4407408"/>
+            <a:ext cx="256032" cy="256032"/>
+          </a:xfrm>
+          <a:prstGeom prst="ellipse">
+            <a:avLst/>
+          </a:prstGeom>
+          <a:solidFill>
+            <a:srgbClr val="B9C0CC"/>
+          </a:solidFill>
+          <a:ln w="9525">
+            <a:solidFill>
+              <a:srgbClr val="5A6275"/>
+            </a:solidFill>
+            <a:prstDash val="solid"/>
+          </a:ln>
+        </p:spPr>
+      </p:sp>
+      <p:sp>
+        <p:nvSpPr>
+          <p:cNvPr id="46" name="Shape 44"/>
+          <p:cNvSpPr/>
+          <p:nvPr/>
+        </p:nvSpPr>
+        <p:spPr>
+          <a:xfrm>
+            <a:off x="1408176" y="4407408"/>
+            <a:ext cx="256032" cy="256032"/>
+          </a:xfrm>
+          <a:prstGeom prst="ellipse">
+            <a:avLst/>
+          </a:prstGeom>
+          <a:solidFill>
+            <a:srgbClr val="B9C0CC"/>
+          </a:solidFill>
+          <a:ln w="9525">
+            <a:solidFill>
+              <a:srgbClr val="5A6275"/>
+            </a:solidFill>
+            <a:prstDash val="solid"/>
+          </a:ln>
+        </p:spPr>
+      </p:sp>
+      <p:sp>
+        <p:nvSpPr>
+          <p:cNvPr id="47" name="Shape 45"/>
+          <p:cNvSpPr/>
+          <p:nvPr/>
+        </p:nvSpPr>
+        <p:spPr>
+          <a:xfrm>
+            <a:off x="1741932" y="4407408"/>
+            <a:ext cx="256032" cy="256032"/>
+          </a:xfrm>
+          <a:prstGeom prst="ellipse">
+            <a:avLst/>
+          </a:prstGeom>
+          <a:solidFill>
+            <a:srgbClr val="B9C0CC"/>
+          </a:solidFill>
+          <a:ln w="9525">
+            <a:solidFill>
+              <a:srgbClr val="5A6275"/>
+            </a:solidFill>
+            <a:prstDash val="solid"/>
+          </a:ln>
+        </p:spPr>
+      </p:sp>
+      <p:sp>
+        <p:nvSpPr>
+          <p:cNvPr id="48" name="Shape 46"/>
+          <p:cNvSpPr/>
+          <p:nvPr/>
+        </p:nvSpPr>
+        <p:spPr>
+          <a:xfrm>
+            <a:off x="2075688" y="4407408"/>
+            <a:ext cx="256032" cy="256032"/>
+          </a:xfrm>
+          <a:prstGeom prst="ellipse">
+            <a:avLst/>
+          </a:prstGeom>
+          <a:solidFill>
+            <a:srgbClr val="B9C0CC"/>
+          </a:solidFill>
+          <a:ln w="9525">
+            <a:solidFill>
+              <a:srgbClr val="5A6275"/>
+            </a:solidFill>
+            <a:prstDash val="solid"/>
+          </a:ln>
+        </p:spPr>
+      </p:sp>
+      <p:sp>
+        <p:nvSpPr>
+          <p:cNvPr id="49" name="Shape 47"/>
+          <p:cNvSpPr/>
+          <p:nvPr/>
+        </p:nvSpPr>
+        <p:spPr>
+          <a:xfrm>
+            <a:off x="2409444" y="4407408"/>
+            <a:ext cx="256032" cy="256032"/>
+          </a:xfrm>
+          <a:prstGeom prst="ellipse">
+            <a:avLst/>
+          </a:prstGeom>
+          <a:solidFill>
+            <a:srgbClr val="B9C0CC"/>
+          </a:solidFill>
+          <a:ln w="9525">
+            <a:solidFill>
+              <a:srgbClr val="5A6275"/>
+            </a:solidFill>
+            <a:prstDash val="solid"/>
+          </a:ln>
+        </p:spPr>
+      </p:sp>
+      <p:sp>
+        <p:nvSpPr>
+          <p:cNvPr id="50" name="Shape 48"/>
+          <p:cNvSpPr/>
+          <p:nvPr/>
+        </p:nvSpPr>
+        <p:spPr>
+          <a:xfrm>
+            <a:off x="2743200" y="4407408"/>
+            <a:ext cx="256032" cy="256032"/>
+          </a:xfrm>
+          <a:prstGeom prst="ellipse">
+            <a:avLst/>
+          </a:prstGeom>
+          <a:solidFill>
+            <a:srgbClr val="B9C0CC"/>
+          </a:solidFill>
+          <a:ln w="9525">
+            <a:solidFill>
+              <a:srgbClr val="5A6275"/>
+            </a:solidFill>
+            <a:prstDash val="solid"/>
+          </a:ln>
+        </p:spPr>
+      </p:sp>
+      <p:sp>
+        <p:nvSpPr>
+          <p:cNvPr id="51" name="Shape 49"/>
+          <p:cNvSpPr/>
+          <p:nvPr/>
+        </p:nvSpPr>
+        <p:spPr>
+          <a:xfrm>
+            <a:off x="3076956" y="4407408"/>
+            <a:ext cx="256032" cy="256032"/>
+          </a:xfrm>
+          <a:prstGeom prst="ellipse">
+            <a:avLst/>
+          </a:prstGeom>
+          <a:solidFill>
+            <a:srgbClr val="B9C0CC"/>
+          </a:solidFill>
+          <a:ln w="9525">
+            <a:solidFill>
+              <a:srgbClr val="5A6275"/>
+            </a:solidFill>
+            <a:prstDash val="solid"/>
+          </a:ln>
+        </p:spPr>
+      </p:sp>
+      <p:sp>
+        <p:nvSpPr>
+          <p:cNvPr id="52" name="Shape 50"/>
+          <p:cNvSpPr/>
+          <p:nvPr/>
+        </p:nvSpPr>
+        <p:spPr>
+          <a:xfrm>
+            <a:off x="3410712" y="4407408"/>
+            <a:ext cx="256032" cy="256032"/>
+          </a:xfrm>
+          <a:prstGeom prst="ellipse">
+            <a:avLst/>
+          </a:prstGeom>
+          <a:solidFill>
+            <a:srgbClr val="B9C0CC"/>
+          </a:solidFill>
+          <a:ln w="9525">
+            <a:solidFill>
+              <a:srgbClr val="5A6275"/>
+            </a:solidFill>
+            <a:prstDash val="solid"/>
+          </a:ln>
+        </p:spPr>
+      </p:sp>
+      <p:sp>
+        <p:nvSpPr>
+          <p:cNvPr id="53" name="Shape 51"/>
+          <p:cNvSpPr/>
+          <p:nvPr/>
+        </p:nvSpPr>
+        <p:spPr>
+          <a:xfrm>
+            <a:off x="3744468" y="4407408"/>
+            <a:ext cx="256032" cy="256032"/>
+          </a:xfrm>
+          <a:prstGeom prst="ellipse">
+            <a:avLst/>
+          </a:prstGeom>
+          <a:solidFill>
+            <a:srgbClr val="B9C0CC"/>
+          </a:solidFill>
+          <a:ln w="9525">
+            <a:solidFill>
+              <a:srgbClr val="5A6275"/>
+            </a:solidFill>
+            <a:prstDash val="solid"/>
+          </a:ln>
+        </p:spPr>
+      </p:sp>
+      <p:sp>
+        <p:nvSpPr>
+          <p:cNvPr id="54" name="Shape 52"/>
+          <p:cNvSpPr/>
+          <p:nvPr/>
+        </p:nvSpPr>
+        <p:spPr>
+          <a:xfrm>
+            <a:off x="4078224" y="4407408"/>
+            <a:ext cx="256032" cy="256032"/>
+          </a:xfrm>
+          <a:prstGeom prst="ellipse">
+            <a:avLst/>
+          </a:prstGeom>
+          <a:solidFill>
+            <a:srgbClr val="B9C0CC"/>
+          </a:solidFill>
+          <a:ln w="9525">
+            <a:solidFill>
+              <a:srgbClr val="5A6275"/>
+            </a:solidFill>
+            <a:prstDash val="solid"/>
+          </a:ln>
+        </p:spPr>
+      </p:sp>
+      <p:sp>
+        <p:nvSpPr>
+          <p:cNvPr id="55" name="Shape 53"/>
+          <p:cNvSpPr/>
+          <p:nvPr/>
+        </p:nvSpPr>
+        <p:spPr>
+          <a:xfrm>
+            <a:off x="4411980" y="4407408"/>
+            <a:ext cx="256032" cy="256032"/>
+          </a:xfrm>
+          <a:prstGeom prst="ellipse">
+            <a:avLst/>
+          </a:prstGeom>
+          <a:solidFill>
+            <a:srgbClr val="B9C0CC"/>
+          </a:solidFill>
+          <a:ln w="9525">
+            <a:solidFill>
+              <a:srgbClr val="5A6275"/>
+            </a:solidFill>
+            <a:prstDash val="solid"/>
+          </a:ln>
+        </p:spPr>
+      </p:sp>
+      <p:sp>
+        <p:nvSpPr>
+          <p:cNvPr id="56" name="Shape 54"/>
+          <p:cNvSpPr/>
+          <p:nvPr/>
+        </p:nvSpPr>
+        <p:spPr>
+          <a:xfrm>
+            <a:off x="4745736" y="4407408"/>
+            <a:ext cx="256032" cy="256032"/>
+          </a:xfrm>
+          <a:prstGeom prst="ellipse">
+            <a:avLst/>
+          </a:prstGeom>
+          <a:solidFill>
+            <a:srgbClr val="B9C0CC"/>
+          </a:solidFill>
+          <a:ln w="9525">
+            <a:solidFill>
+              <a:srgbClr val="5A6275"/>
+            </a:solidFill>
+            <a:prstDash val="solid"/>
+          </a:ln>
+        </p:spPr>
+      </p:sp>
+      <p:sp>
+        <p:nvSpPr>
+          <p:cNvPr id="57" name="Shape 55"/>
+          <p:cNvSpPr/>
+          <p:nvPr/>
+        </p:nvSpPr>
+        <p:spPr>
+          <a:xfrm>
+            <a:off x="5079492" y="4407408"/>
+            <a:ext cx="256032" cy="256032"/>
+          </a:xfrm>
+          <a:prstGeom prst="ellipse">
+            <a:avLst/>
+          </a:prstGeom>
+          <a:solidFill>
+            <a:srgbClr val="B9C0CC"/>
+          </a:solidFill>
+          <a:ln w="9525">
+            <a:solidFill>
+              <a:srgbClr val="5A6275"/>
+            </a:solidFill>
+            <a:prstDash val="solid"/>
+          </a:ln>
+        </p:spPr>
+      </p:sp>
+      <p:sp>
+        <p:nvSpPr>
+          <p:cNvPr id="58" name="Shape 56"/>
+          <p:cNvSpPr/>
+          <p:nvPr/>
+        </p:nvSpPr>
+        <p:spPr>
+          <a:xfrm>
+            <a:off x="5413248" y="4407408"/>
+            <a:ext cx="256032" cy="256032"/>
+          </a:xfrm>
+          <a:prstGeom prst="ellipse">
+            <a:avLst/>
+          </a:prstGeom>
+          <a:solidFill>
+            <a:srgbClr val="B9C0CC"/>
+          </a:solidFill>
+          <a:ln w="9525">
+            <a:solidFill>
+              <a:srgbClr val="5A6275"/>
+            </a:solidFill>
+            <a:prstDash val="solid"/>
+          </a:ln>
+        </p:spPr>
+      </p:sp>
+      <p:sp>
+        <p:nvSpPr>
+          <p:cNvPr id="59" name="Text 57"/>
+          <p:cNvSpPr/>
+          <p:nvPr/>
+        </p:nvSpPr>
+        <p:spPr>
+          <a:xfrm>
+            <a:off x="685800" y="4800600"/>
+            <a:ext cx="5029200" cy="228600"/>
+          </a:xfrm>
+          <a:prstGeom prst="rect">
+            <a:avLst/>
+          </a:prstGeom>
+          <a:noFill/>
+          <a:ln/>
+        </p:spPr>
+        <p:txBody>
+          <a:bodyPr wrap="square" lIns="0" tIns="0" rIns="0" bIns="0" rtlCol="0" anchor="ctr"/>
+          <a:lstStyle/>
+          <a:p>
+            <a:pPr algn="ctr" indent="0" marL="0">
+              <a:buNone/>
+            </a:pPr>
+            <a:r>
+              <a:rPr lang="en-US" sz="1050" b="1" dirty="0">
+                <a:solidFill>
+                  <a:srgbClr val="262B3A"/>
+                </a:solidFill>
+                <a:latin typeface="Calibri" pitchFamily="34" charset="0"/>
+                <a:ea typeface="Calibri" pitchFamily="34" charset="-122"/>
+                <a:cs typeface="Calibri" pitchFamily="34" charset="-120"/>
+              </a:rPr>
+              <a:t>iron</a:t>
+            </a:r>
+            <a:r>
+              <a:rPr lang="en-US" sz="1050" dirty="0">
+                <a:solidFill>
+                  <a:srgbClr val="262B3A"/>
+                </a:solidFill>
+                <a:latin typeface="Calibri" pitchFamily="34" charset="0"/>
+                <a:ea typeface="Calibri" pitchFamily="34" charset="-122"/>
+                <a:cs typeface="Calibri" pitchFamily="34" charset="-120"/>
+              </a:rPr>
+              <a:t> (giant metallic lattice): electrons flow through the metal</a:t>
+            </a:r>
+            <a:endParaRPr lang="en-US" sz="1050" dirty="0"/>
+          </a:p>
+        </p:txBody>
+      </p:sp>
+      <p:sp>
+        <p:nvSpPr>
           <p:cNvPr id="60" name="Text 58"/>
           <p:cNvSpPr/>
           <p:nvPr/>
         </p:nvSpPr>
         <p:spPr>
           <a:xfrm>
-            <a:off x="2194560" y="2514600"/>
-            <a:ext cx="2011680" cy="228600"/>
+            <a:off x="2286000" y="2834640"/>
+            <a:ext cx="1828800" cy="201168"/>
           </a:xfrm>
           <a:prstGeom prst="rect">
             <a:avLst/>
@@ -43667,7 +43816,7 @@
         </p:nvSpPr>
         <p:spPr>
           <a:xfrm>
-            <a:off x="3035808" y="2990088"/>
+            <a:off x="3035808" y="3200400"/>
             <a:ext cx="329184" cy="329184"/>
           </a:xfrm>
           <a:prstGeom prst="ellipse">
@@ -43692,7 +43841,7 @@
         </p:nvSpPr>
         <p:spPr>
           <a:xfrm>
-            <a:off x="2926080" y="3026664"/>
+            <a:off x="2926080" y="3236976"/>
             <a:ext cx="548640" cy="256032"/>
           </a:xfrm>
           <a:prstGeom prst="rect">
@@ -43731,8 +43880,8 @@
         </p:nvSpPr>
         <p:spPr>
           <a:xfrm flipV="1">
-            <a:off x="3200400" y="3364992"/>
-            <a:ext cx="91" cy="384048"/>
+            <a:off x="3200400" y="3547872"/>
+            <a:ext cx="91" cy="219456"/>
           </a:xfrm>
           <a:prstGeom prst="line">
             <a:avLst/>
@@ -43749,14 +43898,53 @@
       </p:sp>
       <p:sp>
         <p:nvSpPr>
-          <p:cNvPr id="64" name="Shape 62"/>
-          <p:cNvSpPr/>
-          <p:nvPr/>
-        </p:nvSpPr>
-        <p:spPr>
-          <a:xfrm>
-            <a:off x="1764792" y="3547872"/>
-            <a:ext cx="128016" cy="128016"/>
+          <p:cNvPr id="64" name="Text 62"/>
+          <p:cNvSpPr/>
+          <p:nvPr/>
+        </p:nvSpPr>
+        <p:spPr>
+          <a:xfrm>
+            <a:off x="2103120" y="3035808"/>
+            <a:ext cx="2194560" cy="201168"/>
+          </a:xfrm>
+          <a:prstGeom prst="rect">
+            <a:avLst/>
+          </a:prstGeom>
+          <a:noFill/>
+          <a:ln/>
+        </p:spPr>
+        <p:txBody>
+          <a:bodyPr wrap="square" lIns="0" tIns="0" rIns="0" bIns="0" rtlCol="0" anchor="ctr"/>
+          <a:lstStyle/>
+          <a:p>
+            <a:pPr algn="ctr" indent="0" marL="0">
+              <a:buNone/>
+            </a:pPr>
+            <a:r>
+              <a:rPr lang="en-US" sz="1000" b="1" dirty="0">
+                <a:solidFill>
+                  <a:srgbClr val="A4561C"/>
+                </a:solidFill>
+                <a:latin typeface="Calibri" pitchFamily="34" charset="0"/>
+                <a:ea typeface="Calibri" pitchFamily="34" charset="-122"/>
+                <a:cs typeface="Calibri" pitchFamily="34" charset="-120"/>
+              </a:rPr>
+              <a:t>centre: Fe loses electrons</a:t>
+            </a:r>
+            <a:endParaRPr lang="en-US" sz="1000" dirty="0"/>
+          </a:p>
+        </p:txBody>
+      </p:sp>
+      <p:sp>
+        <p:nvSpPr>
+          <p:cNvPr id="65" name="Shape 63"/>
+          <p:cNvSpPr/>
+          <p:nvPr/>
+        </p:nvSpPr>
+        <p:spPr>
+          <a:xfrm>
+            <a:off x="1851660" y="3863340"/>
+            <a:ext cx="137160" cy="137160"/>
           </a:xfrm>
           <a:prstGeom prst="ellipse">
             <a:avLst/>
@@ -43774,14 +43962,137 @@
       </p:sp>
       <p:sp>
         <p:nvSpPr>
-          <p:cNvPr id="65" name="Text 63"/>
-          <p:cNvSpPr/>
-          <p:nvPr/>
-        </p:nvSpPr>
-        <p:spPr>
-          <a:xfrm>
-            <a:off x="1691640" y="3319272"/>
-            <a:ext cx="274320" cy="201168"/>
+          <p:cNvPr id="66" name="Shape 64"/>
+          <p:cNvSpPr/>
+          <p:nvPr/>
+        </p:nvSpPr>
+        <p:spPr>
+          <a:xfrm>
+            <a:off x="2217420" y="3863340"/>
+            <a:ext cx="137160" cy="137160"/>
+          </a:xfrm>
+          <a:prstGeom prst="ellipse">
+            <a:avLst/>
+          </a:prstGeom>
+          <a:solidFill>
+            <a:srgbClr val="F5D547"/>
+          </a:solidFill>
+          <a:ln w="9525">
+            <a:solidFill>
+              <a:srgbClr val="B8912A"/>
+            </a:solidFill>
+            <a:prstDash val="solid"/>
+          </a:ln>
+        </p:spPr>
+      </p:sp>
+      <p:sp>
+        <p:nvSpPr>
+          <p:cNvPr id="67" name="Shape 65"/>
+          <p:cNvSpPr/>
+          <p:nvPr/>
+        </p:nvSpPr>
+        <p:spPr>
+          <a:xfrm>
+            <a:off x="4046220" y="3863340"/>
+            <a:ext cx="137160" cy="137160"/>
+          </a:xfrm>
+          <a:prstGeom prst="ellipse">
+            <a:avLst/>
+          </a:prstGeom>
+          <a:solidFill>
+            <a:srgbClr val="F5D547"/>
+          </a:solidFill>
+          <a:ln w="9525">
+            <a:solidFill>
+              <a:srgbClr val="B8912A"/>
+            </a:solidFill>
+            <a:prstDash val="solid"/>
+          </a:ln>
+        </p:spPr>
+      </p:sp>
+      <p:sp>
+        <p:nvSpPr>
+          <p:cNvPr id="68" name="Shape 66"/>
+          <p:cNvSpPr/>
+          <p:nvPr/>
+        </p:nvSpPr>
+        <p:spPr>
+          <a:xfrm>
+            <a:off x="4411980" y="3863340"/>
+            <a:ext cx="137160" cy="137160"/>
+          </a:xfrm>
+          <a:prstGeom prst="ellipse">
+            <a:avLst/>
+          </a:prstGeom>
+          <a:solidFill>
+            <a:srgbClr val="F5D547"/>
+          </a:solidFill>
+          <a:ln w="9525">
+            <a:solidFill>
+              <a:srgbClr val="B8912A"/>
+            </a:solidFill>
+            <a:prstDash val="solid"/>
+          </a:ln>
+        </p:spPr>
+      </p:sp>
+      <p:sp>
+        <p:nvSpPr>
+          <p:cNvPr id="69" name="Shape 67"/>
+          <p:cNvSpPr/>
+          <p:nvPr/>
+        </p:nvSpPr>
+        <p:spPr>
+          <a:xfrm flipH="1">
+            <a:off x="2423160" y="3931920"/>
+            <a:ext cx="548640" cy="91"/>
+          </a:xfrm>
+          <a:prstGeom prst="line">
+            <a:avLst/>
+          </a:prstGeom>
+          <a:noFill/>
+          <a:ln w="22225">
+            <a:solidFill>
+              <a:srgbClr val="B8912A"/>
+            </a:solidFill>
+            <a:prstDash val="solid"/>
+            <a:tailEnd type="triangle"/>
+          </a:ln>
+        </p:spPr>
+      </p:sp>
+      <p:sp>
+        <p:nvSpPr>
+          <p:cNvPr id="70" name="Shape 68"/>
+          <p:cNvSpPr/>
+          <p:nvPr/>
+        </p:nvSpPr>
+        <p:spPr>
+          <a:xfrm>
+            <a:off x="3429000" y="3931920"/>
+            <a:ext cx="548640" cy="91"/>
+          </a:xfrm>
+          <a:prstGeom prst="line">
+            <a:avLst/>
+          </a:prstGeom>
+          <a:noFill/>
+          <a:ln w="22225">
+            <a:solidFill>
+              <a:srgbClr val="B8912A"/>
+            </a:solidFill>
+            <a:prstDash val="solid"/>
+            <a:tailEnd type="triangle"/>
+          </a:ln>
+        </p:spPr>
+      </p:sp>
+      <p:sp>
+        <p:nvSpPr>
+          <p:cNvPr id="71" name="Text 69"/>
+          <p:cNvSpPr/>
+          <p:nvPr/>
+        </p:nvSpPr>
+        <p:spPr>
+          <a:xfrm>
+            <a:off x="1874520" y="3566160"/>
+            <a:ext cx="548640" cy="182880"/>
           </a:xfrm>
           <a:prstGeom prst="rect">
             <a:avLst/>
@@ -43797,55 +44108,195 @@
               <a:buNone/>
             </a:pPr>
             <a:r>
+              <a:rPr lang="en-US" sz="1050" dirty="0">
+                <a:solidFill>
+                  <a:srgbClr val="B8912A"/>
+                </a:solidFill>
+                <a:latin typeface="Calibri" pitchFamily="34" charset="0"/>
+                <a:ea typeface="Calibri" pitchFamily="34" charset="-122"/>
+                <a:cs typeface="Calibri" pitchFamily="34" charset="-120"/>
+              </a:rPr>
+              <a:t>← </a:t>
+            </a:r>
+            <a:r>
+              <a:rPr lang="en-US" sz="1050" b="1" dirty="0">
+                <a:solidFill>
+                  <a:srgbClr val="B8912A"/>
+                </a:solidFill>
+                <a:latin typeface="Calibri" pitchFamily="34" charset="0"/>
+                <a:ea typeface="Calibri" pitchFamily="34" charset="-122"/>
+                <a:cs typeface="Calibri" pitchFamily="34" charset="-120"/>
+              </a:rPr>
+              <a:t>e⁻</a:t>
+            </a:r>
+            <a:endParaRPr lang="en-US" sz="1050" dirty="0"/>
+          </a:p>
+        </p:txBody>
+      </p:sp>
+      <p:sp>
+        <p:nvSpPr>
+          <p:cNvPr id="72" name="Text 70"/>
+          <p:cNvSpPr/>
+          <p:nvPr/>
+        </p:nvSpPr>
+        <p:spPr>
+          <a:xfrm>
+            <a:off x="3977640" y="3566160"/>
+            <a:ext cx="548640" cy="182880"/>
+          </a:xfrm>
+          <a:prstGeom prst="rect">
+            <a:avLst/>
+          </a:prstGeom>
+          <a:noFill/>
+          <a:ln/>
+        </p:spPr>
+        <p:txBody>
+          <a:bodyPr wrap="square" lIns="0" tIns="0" rIns="0" bIns="0" rtlCol="0" anchor="ctr"/>
+          <a:lstStyle/>
+          <a:p>
+            <a:pPr algn="ctr" indent="0" marL="0">
+              <a:buNone/>
+            </a:pPr>
+            <a:r>
+              <a:rPr lang="en-US" sz="1050" b="1" dirty="0">
+                <a:solidFill>
+                  <a:srgbClr val="B8912A"/>
+                </a:solidFill>
+                <a:latin typeface="Calibri" pitchFamily="34" charset="0"/>
+                <a:ea typeface="Calibri" pitchFamily="34" charset="-122"/>
+                <a:cs typeface="Calibri" pitchFamily="34" charset="-120"/>
+              </a:rPr>
+              <a:t>e⁻</a:t>
+            </a:r>
+            <a:r>
+              <a:rPr lang="en-US" sz="1050" dirty="0">
+                <a:solidFill>
+                  <a:srgbClr val="B8912A"/>
+                </a:solidFill>
+                <a:latin typeface="Calibri" pitchFamily="34" charset="0"/>
+                <a:ea typeface="Calibri" pitchFamily="34" charset="-122"/>
+                <a:cs typeface="Calibri" pitchFamily="34" charset="-120"/>
+              </a:rPr>
+              <a:t> →</a:t>
+            </a:r>
+            <a:endParaRPr lang="en-US" sz="1050" dirty="0"/>
+          </a:p>
+        </p:txBody>
+      </p:sp>
+      <p:sp>
+        <p:nvSpPr>
+          <p:cNvPr id="73" name="Shape 71"/>
+          <p:cNvSpPr/>
+          <p:nvPr/>
+        </p:nvSpPr>
+        <p:spPr>
+          <a:xfrm>
+            <a:off x="1600200" y="3154680"/>
+            <a:ext cx="182880" cy="457200"/>
+          </a:xfrm>
+          <a:prstGeom prst="line">
+            <a:avLst/>
+          </a:prstGeom>
+          <a:noFill/>
+          <a:ln w="19050">
+            <a:solidFill>
+              <a:srgbClr val="6A3FA0"/>
+            </a:solidFill>
+            <a:prstDash val="solid"/>
+            <a:tailEnd type="triangle"/>
+          </a:ln>
+        </p:spPr>
+      </p:sp>
+      <p:sp>
+        <p:nvSpPr>
+          <p:cNvPr id="74" name="Shape 72"/>
+          <p:cNvSpPr/>
+          <p:nvPr/>
+        </p:nvSpPr>
+        <p:spPr>
+          <a:xfrm flipH="1">
+            <a:off x="4617720" y="3154680"/>
+            <a:ext cx="182880" cy="457200"/>
+          </a:xfrm>
+          <a:prstGeom prst="line">
+            <a:avLst/>
+          </a:prstGeom>
+          <a:noFill/>
+          <a:ln w="19050">
+            <a:solidFill>
+              <a:srgbClr val="6A3FA0"/>
+            </a:solidFill>
+            <a:prstDash val="solid"/>
+            <a:tailEnd type="triangle"/>
+          </a:ln>
+        </p:spPr>
+      </p:sp>
+      <p:sp>
+        <p:nvSpPr>
+          <p:cNvPr id="75" name="Text 73"/>
+          <p:cNvSpPr/>
+          <p:nvPr/>
+        </p:nvSpPr>
+        <p:spPr>
+          <a:xfrm>
+            <a:off x="548640" y="2697480"/>
+            <a:ext cx="1554480" cy="411480"/>
+          </a:xfrm>
+          <a:prstGeom prst="rect">
+            <a:avLst/>
+          </a:prstGeom>
+          <a:noFill/>
+          <a:ln/>
+        </p:spPr>
+        <p:txBody>
+          <a:bodyPr wrap="square" lIns="0" tIns="0" rIns="0" bIns="0" rtlCol="0" anchor="ctr"/>
+          <a:lstStyle/>
+          <a:p>
+            <a:pPr algn="ctr" indent="0" marL="0">
+              <a:buNone/>
+            </a:pPr>
+            <a:r>
               <a:rPr lang="en-US" sz="1000" b="1" dirty="0">
                 <a:solidFill>
-                  <a:srgbClr val="262B3A"/>
-                </a:solidFill>
-                <a:latin typeface="Calibri" pitchFamily="34" charset="0"/>
-                <a:ea typeface="Calibri" pitchFamily="34" charset="-122"/>
-                <a:cs typeface="Calibri" pitchFamily="34" charset="-120"/>
-              </a:rPr>
-              <a:t>e⁻</a:t>
+                  <a:srgbClr val="6A3FA0"/>
+                </a:solidFill>
+                <a:latin typeface="Calibri" pitchFamily="34" charset="0"/>
+                <a:ea typeface="Calibri" pitchFamily="34" charset="-122"/>
+                <a:cs typeface="Calibri" pitchFamily="34" charset="-120"/>
+              </a:rPr>
+              <a:t>edge: O₂ from air</a:t>
             </a:r>
             <a:endParaRPr lang="en-US" sz="1000" dirty="0"/>
           </a:p>
-        </p:txBody>
-      </p:sp>
-      <p:sp>
-        <p:nvSpPr>
-          <p:cNvPr id="66" name="Shape 64"/>
-          <p:cNvSpPr/>
-          <p:nvPr/>
-        </p:nvSpPr>
-        <p:spPr>
-          <a:xfrm>
-            <a:off x="2130552" y="3547872"/>
-            <a:ext cx="128016" cy="128016"/>
-          </a:xfrm>
-          <a:prstGeom prst="ellipse">
-            <a:avLst/>
-          </a:prstGeom>
-          <a:solidFill>
-            <a:srgbClr val="F5D547"/>
-          </a:solidFill>
-          <a:ln w="9525">
-            <a:solidFill>
-              <a:srgbClr val="B8912A"/>
-            </a:solidFill>
-            <a:prstDash val="solid"/>
-          </a:ln>
-        </p:spPr>
-      </p:sp>
-      <p:sp>
-        <p:nvSpPr>
-          <p:cNvPr id="67" name="Text 65"/>
-          <p:cNvSpPr/>
-          <p:nvPr/>
-        </p:nvSpPr>
-        <p:spPr>
-          <a:xfrm>
-            <a:off x="2057400" y="3319272"/>
-            <a:ext cx="274320" cy="201168"/>
+          <a:p>
+            <a:pPr algn="ctr" indent="0" marL="0">
+              <a:buNone/>
+            </a:pPr>
+            <a:r>
+              <a:rPr lang="en-US" sz="1000" b="1" dirty="0">
+                <a:solidFill>
+                  <a:srgbClr val="6A3FA0"/>
+                </a:solidFill>
+                <a:latin typeface="Calibri" pitchFamily="34" charset="0"/>
+                <a:ea typeface="Calibri" pitchFamily="34" charset="-122"/>
+                <a:cs typeface="Calibri" pitchFamily="34" charset="-120"/>
+              </a:rPr>
+              <a:t>gains electrons</a:t>
+            </a:r>
+            <a:endParaRPr lang="en-US" sz="1000" dirty="0"/>
+          </a:p>
+        </p:txBody>
+      </p:sp>
+      <p:sp>
+        <p:nvSpPr>
+          <p:cNvPr id="76" name="Text 74"/>
+          <p:cNvSpPr/>
+          <p:nvPr/>
+        </p:nvSpPr>
+        <p:spPr>
+          <a:xfrm>
+            <a:off x="4297680" y="2697480"/>
+            <a:ext cx="1554480" cy="411480"/>
           </a:xfrm>
           <a:prstGeom prst="rect">
             <a:avLst/>
@@ -43863,63 +44314,16 @@
             <a:r>
               <a:rPr lang="en-US" sz="1000" b="1" dirty="0">
                 <a:solidFill>
-                  <a:srgbClr val="262B3A"/>
-                </a:solidFill>
-                <a:latin typeface="Calibri" pitchFamily="34" charset="0"/>
-                <a:ea typeface="Calibri" pitchFamily="34" charset="-122"/>
-                <a:cs typeface="Calibri" pitchFamily="34" charset="-120"/>
-              </a:rPr>
-              <a:t>e⁻</a:t>
+                  <a:srgbClr val="6A3FA0"/>
+                </a:solidFill>
+                <a:latin typeface="Calibri" pitchFamily="34" charset="0"/>
+                <a:ea typeface="Calibri" pitchFamily="34" charset="-122"/>
+                <a:cs typeface="Calibri" pitchFamily="34" charset="-120"/>
+              </a:rPr>
+              <a:t>edge: O₂ from air</a:t>
             </a:r>
             <a:endParaRPr lang="en-US" sz="1000" dirty="0"/>
           </a:p>
-        </p:txBody>
-      </p:sp>
-      <p:sp>
-        <p:nvSpPr>
-          <p:cNvPr id="68" name="Shape 66"/>
-          <p:cNvSpPr/>
-          <p:nvPr/>
-        </p:nvSpPr>
-        <p:spPr>
-          <a:xfrm>
-            <a:off x="4142232" y="3547872"/>
-            <a:ext cx="128016" cy="128016"/>
-          </a:xfrm>
-          <a:prstGeom prst="ellipse">
-            <a:avLst/>
-          </a:prstGeom>
-          <a:solidFill>
-            <a:srgbClr val="F5D547"/>
-          </a:solidFill>
-          <a:ln w="9525">
-            <a:solidFill>
-              <a:srgbClr val="B8912A"/>
-            </a:solidFill>
-            <a:prstDash val="solid"/>
-          </a:ln>
-        </p:spPr>
-      </p:sp>
-      <p:sp>
-        <p:nvSpPr>
-          <p:cNvPr id="69" name="Text 67"/>
-          <p:cNvSpPr/>
-          <p:nvPr/>
-        </p:nvSpPr>
-        <p:spPr>
-          <a:xfrm>
-            <a:off x="4069080" y="3319272"/>
-            <a:ext cx="274320" cy="201168"/>
-          </a:xfrm>
-          <a:prstGeom prst="rect">
-            <a:avLst/>
-          </a:prstGeom>
-          <a:noFill/>
-          <a:ln/>
-        </p:spPr>
-        <p:txBody>
-          <a:bodyPr wrap="square" lIns="0" tIns="0" rIns="0" bIns="0" rtlCol="0" anchor="ctr"/>
-          <a:lstStyle/>
           <a:p>
             <a:pPr algn="ctr" indent="0" marL="0">
               <a:buNone/>
@@ -43927,276 +44331,13 @@
             <a:r>
               <a:rPr lang="en-US" sz="1000" b="1" dirty="0">
                 <a:solidFill>
-                  <a:srgbClr val="262B3A"/>
-                </a:solidFill>
-                <a:latin typeface="Calibri" pitchFamily="34" charset="0"/>
-                <a:ea typeface="Calibri" pitchFamily="34" charset="-122"/>
-                <a:cs typeface="Calibri" pitchFamily="34" charset="-120"/>
-              </a:rPr>
-              <a:t>e⁻</a:t>
-            </a:r>
-            <a:endParaRPr lang="en-US" sz="1000" dirty="0"/>
-          </a:p>
-        </p:txBody>
-      </p:sp>
-      <p:sp>
-        <p:nvSpPr>
-          <p:cNvPr id="70" name="Shape 68"/>
-          <p:cNvSpPr/>
-          <p:nvPr/>
-        </p:nvSpPr>
-        <p:spPr>
-          <a:xfrm>
-            <a:off x="4507992" y="3547872"/>
-            <a:ext cx="128016" cy="128016"/>
-          </a:xfrm>
-          <a:prstGeom prst="ellipse">
-            <a:avLst/>
-          </a:prstGeom>
-          <a:solidFill>
-            <a:srgbClr val="F5D547"/>
-          </a:solidFill>
-          <a:ln w="9525">
-            <a:solidFill>
-              <a:srgbClr val="B8912A"/>
-            </a:solidFill>
-            <a:prstDash val="solid"/>
-          </a:ln>
-        </p:spPr>
-      </p:sp>
-      <p:sp>
-        <p:nvSpPr>
-          <p:cNvPr id="71" name="Text 69"/>
-          <p:cNvSpPr/>
-          <p:nvPr/>
-        </p:nvSpPr>
-        <p:spPr>
-          <a:xfrm>
-            <a:off x="4434840" y="3319272"/>
-            <a:ext cx="274320" cy="201168"/>
-          </a:xfrm>
-          <a:prstGeom prst="rect">
-            <a:avLst/>
-          </a:prstGeom>
-          <a:noFill/>
-          <a:ln/>
-        </p:spPr>
-        <p:txBody>
-          <a:bodyPr wrap="square" lIns="0" tIns="0" rIns="0" bIns="0" rtlCol="0" anchor="ctr"/>
-          <a:lstStyle/>
-          <a:p>
-            <a:pPr algn="ctr" indent="0" marL="0">
-              <a:buNone/>
-            </a:pPr>
-            <a:r>
-              <a:rPr lang="en-US" sz="1000" b="1" dirty="0">
-                <a:solidFill>
-                  <a:srgbClr val="262B3A"/>
-                </a:solidFill>
-                <a:latin typeface="Calibri" pitchFamily="34" charset="0"/>
-                <a:ea typeface="Calibri" pitchFamily="34" charset="-122"/>
-                <a:cs typeface="Calibri" pitchFamily="34" charset="-120"/>
-              </a:rPr>
-              <a:t>e⁻</a:t>
-            </a:r>
-            <a:endParaRPr lang="en-US" sz="1000" dirty="0"/>
-          </a:p>
-        </p:txBody>
-      </p:sp>
-      <p:sp>
-        <p:nvSpPr>
-          <p:cNvPr id="72" name="Shape 70"/>
-          <p:cNvSpPr/>
-          <p:nvPr/>
-        </p:nvSpPr>
-        <p:spPr>
-          <a:xfrm flipH="1">
-            <a:off x="2011680" y="3675888"/>
-            <a:ext cx="914400" cy="91"/>
-          </a:xfrm>
-          <a:prstGeom prst="line">
-            <a:avLst/>
-          </a:prstGeom>
-          <a:noFill/>
-          <a:ln w="19050">
-            <a:solidFill>
-              <a:srgbClr val="B8912A"/>
-            </a:solidFill>
-            <a:prstDash val="solid"/>
-            <a:tailEnd type="triangle"/>
-          </a:ln>
-        </p:spPr>
-      </p:sp>
-      <p:sp>
-        <p:nvSpPr>
-          <p:cNvPr id="73" name="Shape 71"/>
-          <p:cNvSpPr/>
-          <p:nvPr/>
-        </p:nvSpPr>
-        <p:spPr>
-          <a:xfrm>
-            <a:off x="3474720" y="3675888"/>
-            <a:ext cx="914400" cy="91"/>
-          </a:xfrm>
-          <a:prstGeom prst="line">
-            <a:avLst/>
-          </a:prstGeom>
-          <a:noFill/>
-          <a:ln w="19050">
-            <a:solidFill>
-              <a:srgbClr val="B8912A"/>
-            </a:solidFill>
-            <a:prstDash val="solid"/>
-            <a:tailEnd type="triangle"/>
-          </a:ln>
-        </p:spPr>
-      </p:sp>
-      <p:sp>
-        <p:nvSpPr>
-          <p:cNvPr id="74" name="Text 72"/>
-          <p:cNvSpPr/>
-          <p:nvPr/>
-        </p:nvSpPr>
-        <p:spPr>
-          <a:xfrm>
-            <a:off x="685800" y="3017520"/>
-            <a:ext cx="1554480" cy="411480"/>
-          </a:xfrm>
-          <a:prstGeom prst="rect">
-            <a:avLst/>
-          </a:prstGeom>
-          <a:noFill/>
-          <a:ln/>
-        </p:spPr>
-        <p:txBody>
-          <a:bodyPr wrap="square" lIns="0" tIns="0" rIns="0" bIns="0" rtlCol="0" anchor="ctr"/>
-          <a:lstStyle/>
-          <a:p>
-            <a:pPr algn="ctr" indent="0" marL="0">
-              <a:buNone/>
-            </a:pPr>
-            <a:r>
-              <a:rPr lang="en-US" sz="1000" b="1" dirty="0">
-                <a:solidFill>
                   <a:srgbClr val="6A3FA0"/>
                 </a:solidFill>
                 <a:latin typeface="Calibri" pitchFamily="34" charset="0"/>
                 <a:ea typeface="Calibri" pitchFamily="34" charset="-122"/>
                 <a:cs typeface="Calibri" pitchFamily="34" charset="-120"/>
               </a:rPr>
-              <a:t>edge: O₂ from air</a:t>
-            </a:r>
-            <a:endParaRPr lang="en-US" sz="1000" dirty="0"/>
-          </a:p>
-          <a:p>
-            <a:pPr algn="ctr" indent="0" marL="0">
-              <a:buNone/>
-            </a:pPr>
-            <a:r>
-              <a:rPr lang="en-US" sz="1000" b="1" dirty="0">
-                <a:solidFill>
-                  <a:srgbClr val="6A3FA0"/>
-                </a:solidFill>
-                <a:latin typeface="Calibri" pitchFamily="34" charset="0"/>
-                <a:ea typeface="Calibri" pitchFamily="34" charset="-122"/>
-                <a:cs typeface="Calibri" pitchFamily="34" charset="-120"/>
-              </a:rPr>
               <a:t>gains electrons</a:t>
-            </a:r>
-            <a:endParaRPr lang="en-US" sz="1000" dirty="0"/>
-          </a:p>
-        </p:txBody>
-      </p:sp>
-      <p:sp>
-        <p:nvSpPr>
-          <p:cNvPr id="75" name="Text 73"/>
-          <p:cNvSpPr/>
-          <p:nvPr/>
-        </p:nvSpPr>
-        <p:spPr>
-          <a:xfrm>
-            <a:off x="4206240" y="3017520"/>
-            <a:ext cx="1554480" cy="411480"/>
-          </a:xfrm>
-          <a:prstGeom prst="rect">
-            <a:avLst/>
-          </a:prstGeom>
-          <a:noFill/>
-          <a:ln/>
-        </p:spPr>
-        <p:txBody>
-          <a:bodyPr wrap="square" lIns="0" tIns="0" rIns="0" bIns="0" rtlCol="0" anchor="ctr"/>
-          <a:lstStyle/>
-          <a:p>
-            <a:pPr algn="ctr" indent="0" marL="0">
-              <a:buNone/>
-            </a:pPr>
-            <a:r>
-              <a:rPr lang="en-US" sz="1000" b="1" dirty="0">
-                <a:solidFill>
-                  <a:srgbClr val="6A3FA0"/>
-                </a:solidFill>
-                <a:latin typeface="Calibri" pitchFamily="34" charset="0"/>
-                <a:ea typeface="Calibri" pitchFamily="34" charset="-122"/>
-                <a:cs typeface="Calibri" pitchFamily="34" charset="-120"/>
-              </a:rPr>
-              <a:t>edge: O₂ from air</a:t>
-            </a:r>
-            <a:endParaRPr lang="en-US" sz="1000" dirty="0"/>
-          </a:p>
-          <a:p>
-            <a:pPr algn="ctr" indent="0" marL="0">
-              <a:buNone/>
-            </a:pPr>
-            <a:r>
-              <a:rPr lang="en-US" sz="1000" b="1" dirty="0">
-                <a:solidFill>
-                  <a:srgbClr val="6A3FA0"/>
-                </a:solidFill>
-                <a:latin typeface="Calibri" pitchFamily="34" charset="0"/>
-                <a:ea typeface="Calibri" pitchFamily="34" charset="-122"/>
-                <a:cs typeface="Calibri" pitchFamily="34" charset="-120"/>
-              </a:rPr>
-              <a:t>gains electrons</a:t>
-            </a:r>
-            <a:endParaRPr lang="en-US" sz="1000" dirty="0"/>
-          </a:p>
-        </p:txBody>
-      </p:sp>
-      <p:sp>
-        <p:nvSpPr>
-          <p:cNvPr id="76" name="Text 74"/>
-          <p:cNvSpPr/>
-          <p:nvPr/>
-        </p:nvSpPr>
-        <p:spPr>
-          <a:xfrm>
-            <a:off x="2377440" y="2724912"/>
-            <a:ext cx="1645920" cy="228600"/>
-          </a:xfrm>
-          <a:prstGeom prst="rect">
-            <a:avLst/>
-          </a:prstGeom>
-          <a:noFill/>
-          <a:ln/>
-        </p:spPr>
-        <p:txBody>
-          <a:bodyPr wrap="square" lIns="0" tIns="0" rIns="0" bIns="0" rtlCol="0" anchor="ctr"/>
-          <a:lstStyle/>
-          <a:p>
-            <a:pPr algn="ctr" indent="0" marL="0">
-              <a:buNone/>
-            </a:pPr>
-            <a:r>
-              <a:rPr lang="en-US" sz="1000" b="1" dirty="0">
-                <a:solidFill>
-                  <a:srgbClr val="A4561C"/>
-                </a:solidFill>
-                <a:latin typeface="Calibri" pitchFamily="34" charset="0"/>
-                <a:ea typeface="Calibri" pitchFamily="34" charset="-122"/>
-                <a:cs typeface="Calibri" pitchFamily="34" charset="-120"/>
-              </a:rPr>
-              <a:t>centre: Fe loses electrons</a:t>
             </a:r>
             <a:endParaRPr lang="en-US" sz="1000" dirty="0"/>
           </a:p>
@@ -45928,51 +46069,7 @@
                 <a:ea typeface="Calibri" pitchFamily="34" charset="-122"/>
                 <a:cs typeface="Calibri" pitchFamily="34" charset="-120"/>
               </a:rPr>
-              <a:t>Balance the equation: </a:t>
-            </a:r>
-            <a:r>
-              <a:rPr lang="en-US" sz="1250" b="1" dirty="0">
-                <a:solidFill>
-                  <a:srgbClr val="6A3FA0"/>
-                </a:solidFill>
-                <a:latin typeface="Calibri" pitchFamily="34" charset="0"/>
-                <a:ea typeface="Calibri" pitchFamily="34" charset="-122"/>
-                <a:cs typeface="Calibri" pitchFamily="34" charset="-120"/>
-              </a:rPr>
-              <a:t>Fe(s) + </a:t>
-            </a:r>
-            <a:r>
-              <a:rPr lang="en-US" sz="1250" dirty="0">
-                <a:solidFill>
-                  <a:srgbClr val="262B3A"/>
-                </a:solidFill>
-                <a:latin typeface="Calibri" pitchFamily="34" charset="0"/>
-                <a:ea typeface="Calibri" pitchFamily="34" charset="-122"/>
-                <a:cs typeface="Calibri" pitchFamily="34" charset="-120"/>
-              </a:rPr>
-              <a:t>O₂(g) + </a:t>
-            </a:r>
-            <a:r>
-              <a:rPr lang="en-US" sz="1250" b="1" dirty="0">
-                <a:solidFill>
-                  <a:srgbClr val="6A3FA0"/>
-                </a:solidFill>
-                <a:latin typeface="Calibri" pitchFamily="34" charset="0"/>
-                <a:ea typeface="Calibri" pitchFamily="34" charset="-122"/>
-                <a:cs typeface="Calibri" pitchFamily="34" charset="-120"/>
-              </a:rPr>
-              <a:t>H₂O(l) → </a:t>
-            </a:r>
-            <a:r>
-              <a:rPr lang="en-US" sz="1250" dirty="0">
-                <a:solidFill>
-                  <a:srgbClr val="262B3A"/>
-                </a:solidFill>
-                <a:latin typeface="Calibri" pitchFamily="34" charset="0"/>
-                <a:ea typeface="Calibri" pitchFamily="34" charset="-122"/>
-                <a:cs typeface="Calibri" pitchFamily="34" charset="-120"/>
-              </a:rPr>
-              <a:t>Fe(OH)₃(s)</a:t>
+              <a:t>Balance the equation: (…) Fe(s) + (…) O₂(g) + (…) H₂O(l) → (…) Fe(OH)₃(s)</a:t>
             </a:r>
             <a:endParaRPr lang="en-US" sz="1250" dirty="0"/>
           </a:p>
@@ -46636,7 +46733,832 @@
         </p:nvSpPr>
         <p:spPr>
           <a:xfrm>
+            <a:off x="822960" y="2057400"/>
+            <a:ext cx="4754880" cy="502920"/>
+          </a:xfrm>
+          <a:prstGeom prst="rect">
+            <a:avLst/>
+          </a:prstGeom>
+          <a:solidFill>
+            <a:srgbClr val="B9C0CC"/>
+          </a:solidFill>
+          <a:ln w="12700">
+            <a:solidFill>
+              <a:srgbClr val="5A6275"/>
+            </a:solidFill>
+            <a:prstDash val="solid"/>
+          </a:ln>
+        </p:spPr>
+      </p:sp>
+      <p:sp>
+        <p:nvSpPr>
+          <p:cNvPr id="12" name="Shape 10"/>
+          <p:cNvSpPr/>
+          <p:nvPr/>
+        </p:nvSpPr>
+        <p:spPr>
+          <a:xfrm>
+            <a:off x="877824" y="2258568"/>
+            <a:ext cx="109728" cy="109728"/>
+          </a:xfrm>
+          <a:prstGeom prst="ellipse">
+            <a:avLst/>
+          </a:prstGeom>
+          <a:solidFill>
+            <a:srgbClr val="A5ADBA"/>
+          </a:solidFill>
+          <a:ln w="6350">
+            <a:solidFill>
+              <a:srgbClr val="7D8794"/>
+            </a:solidFill>
+            <a:prstDash val="solid"/>
+          </a:ln>
+        </p:spPr>
+      </p:sp>
+      <p:sp>
+        <p:nvSpPr>
+          <p:cNvPr id="13" name="Shape 11"/>
+          <p:cNvSpPr/>
+          <p:nvPr/>
+        </p:nvSpPr>
+        <p:spPr>
+          <a:xfrm>
+            <a:off x="1078992" y="2258568"/>
+            <a:ext cx="109728" cy="109728"/>
+          </a:xfrm>
+          <a:prstGeom prst="ellipse">
+            <a:avLst/>
+          </a:prstGeom>
+          <a:solidFill>
+            <a:srgbClr val="A5ADBA"/>
+          </a:solidFill>
+          <a:ln w="6350">
+            <a:solidFill>
+              <a:srgbClr val="7D8794"/>
+            </a:solidFill>
+            <a:prstDash val="solid"/>
+          </a:ln>
+        </p:spPr>
+      </p:sp>
+      <p:sp>
+        <p:nvSpPr>
+          <p:cNvPr id="14" name="Shape 12"/>
+          <p:cNvSpPr/>
+          <p:nvPr/>
+        </p:nvSpPr>
+        <p:spPr>
+          <a:xfrm>
+            <a:off x="1280160" y="2258568"/>
+            <a:ext cx="109728" cy="109728"/>
+          </a:xfrm>
+          <a:prstGeom prst="ellipse">
+            <a:avLst/>
+          </a:prstGeom>
+          <a:solidFill>
+            <a:srgbClr val="A5ADBA"/>
+          </a:solidFill>
+          <a:ln w="6350">
+            <a:solidFill>
+              <a:srgbClr val="7D8794"/>
+            </a:solidFill>
+            <a:prstDash val="solid"/>
+          </a:ln>
+        </p:spPr>
+      </p:sp>
+      <p:sp>
+        <p:nvSpPr>
+          <p:cNvPr id="15" name="Shape 13"/>
+          <p:cNvSpPr/>
+          <p:nvPr/>
+        </p:nvSpPr>
+        <p:spPr>
+          <a:xfrm>
+            <a:off x="1481328" y="2258568"/>
+            <a:ext cx="109728" cy="109728"/>
+          </a:xfrm>
+          <a:prstGeom prst="ellipse">
+            <a:avLst/>
+          </a:prstGeom>
+          <a:solidFill>
+            <a:srgbClr val="A5ADBA"/>
+          </a:solidFill>
+          <a:ln w="6350">
+            <a:solidFill>
+              <a:srgbClr val="7D8794"/>
+            </a:solidFill>
+            <a:prstDash val="solid"/>
+          </a:ln>
+        </p:spPr>
+      </p:sp>
+      <p:sp>
+        <p:nvSpPr>
+          <p:cNvPr id="16" name="Shape 14"/>
+          <p:cNvSpPr/>
+          <p:nvPr/>
+        </p:nvSpPr>
+        <p:spPr>
+          <a:xfrm>
+            <a:off x="1682496" y="2258568"/>
+            <a:ext cx="109728" cy="109728"/>
+          </a:xfrm>
+          <a:prstGeom prst="ellipse">
+            <a:avLst/>
+          </a:prstGeom>
+          <a:solidFill>
+            <a:srgbClr val="A5ADBA"/>
+          </a:solidFill>
+          <a:ln w="6350">
+            <a:solidFill>
+              <a:srgbClr val="7D8794"/>
+            </a:solidFill>
+            <a:prstDash val="solid"/>
+          </a:ln>
+        </p:spPr>
+      </p:sp>
+      <p:sp>
+        <p:nvSpPr>
+          <p:cNvPr id="17" name="Shape 15"/>
+          <p:cNvSpPr/>
+          <p:nvPr/>
+        </p:nvSpPr>
+        <p:spPr>
+          <a:xfrm>
+            <a:off x="1883664" y="2258568"/>
+            <a:ext cx="109728" cy="109728"/>
+          </a:xfrm>
+          <a:prstGeom prst="ellipse">
+            <a:avLst/>
+          </a:prstGeom>
+          <a:solidFill>
+            <a:srgbClr val="A5ADBA"/>
+          </a:solidFill>
+          <a:ln w="6350">
+            <a:solidFill>
+              <a:srgbClr val="7D8794"/>
+            </a:solidFill>
+            <a:prstDash val="solid"/>
+          </a:ln>
+        </p:spPr>
+      </p:sp>
+      <p:sp>
+        <p:nvSpPr>
+          <p:cNvPr id="18" name="Shape 16"/>
+          <p:cNvSpPr/>
+          <p:nvPr/>
+        </p:nvSpPr>
+        <p:spPr>
+          <a:xfrm>
+            <a:off x="2084832" y="2258568"/>
+            <a:ext cx="109728" cy="109728"/>
+          </a:xfrm>
+          <a:prstGeom prst="ellipse">
+            <a:avLst/>
+          </a:prstGeom>
+          <a:solidFill>
+            <a:srgbClr val="A5ADBA"/>
+          </a:solidFill>
+          <a:ln w="6350">
+            <a:solidFill>
+              <a:srgbClr val="7D8794"/>
+            </a:solidFill>
+            <a:prstDash val="solid"/>
+          </a:ln>
+        </p:spPr>
+      </p:sp>
+      <p:sp>
+        <p:nvSpPr>
+          <p:cNvPr id="19" name="Shape 17"/>
+          <p:cNvSpPr/>
+          <p:nvPr/>
+        </p:nvSpPr>
+        <p:spPr>
+          <a:xfrm>
+            <a:off x="2286000" y="2258568"/>
+            <a:ext cx="109728" cy="109728"/>
+          </a:xfrm>
+          <a:prstGeom prst="ellipse">
+            <a:avLst/>
+          </a:prstGeom>
+          <a:solidFill>
+            <a:srgbClr val="A5ADBA"/>
+          </a:solidFill>
+          <a:ln w="6350">
+            <a:solidFill>
+              <a:srgbClr val="7D8794"/>
+            </a:solidFill>
+            <a:prstDash val="solid"/>
+          </a:ln>
+        </p:spPr>
+      </p:sp>
+      <p:sp>
+        <p:nvSpPr>
+          <p:cNvPr id="20" name="Shape 18"/>
+          <p:cNvSpPr/>
+          <p:nvPr/>
+        </p:nvSpPr>
+        <p:spPr>
+          <a:xfrm>
+            <a:off x="2487168" y="2258568"/>
+            <a:ext cx="109728" cy="109728"/>
+          </a:xfrm>
+          <a:prstGeom prst="ellipse">
+            <a:avLst/>
+          </a:prstGeom>
+          <a:solidFill>
+            <a:srgbClr val="A5ADBA"/>
+          </a:solidFill>
+          <a:ln w="6350">
+            <a:solidFill>
+              <a:srgbClr val="7D8794"/>
+            </a:solidFill>
+            <a:prstDash val="solid"/>
+          </a:ln>
+        </p:spPr>
+      </p:sp>
+      <p:sp>
+        <p:nvSpPr>
+          <p:cNvPr id="21" name="Shape 19"/>
+          <p:cNvSpPr/>
+          <p:nvPr/>
+        </p:nvSpPr>
+        <p:spPr>
+          <a:xfrm>
+            <a:off x="2688336" y="2258568"/>
+            <a:ext cx="109728" cy="109728"/>
+          </a:xfrm>
+          <a:prstGeom prst="ellipse">
+            <a:avLst/>
+          </a:prstGeom>
+          <a:solidFill>
+            <a:srgbClr val="A5ADBA"/>
+          </a:solidFill>
+          <a:ln w="6350">
+            <a:solidFill>
+              <a:srgbClr val="7D8794"/>
+            </a:solidFill>
+            <a:prstDash val="solid"/>
+          </a:ln>
+        </p:spPr>
+      </p:sp>
+      <p:sp>
+        <p:nvSpPr>
+          <p:cNvPr id="22" name="Shape 20"/>
+          <p:cNvSpPr/>
+          <p:nvPr/>
+        </p:nvSpPr>
+        <p:spPr>
+          <a:xfrm>
+            <a:off x="2889504" y="2258568"/>
+            <a:ext cx="109728" cy="109728"/>
+          </a:xfrm>
+          <a:prstGeom prst="ellipse">
+            <a:avLst/>
+          </a:prstGeom>
+          <a:solidFill>
+            <a:srgbClr val="A5ADBA"/>
+          </a:solidFill>
+          <a:ln w="6350">
+            <a:solidFill>
+              <a:srgbClr val="7D8794"/>
+            </a:solidFill>
+            <a:prstDash val="solid"/>
+          </a:ln>
+        </p:spPr>
+      </p:sp>
+      <p:sp>
+        <p:nvSpPr>
+          <p:cNvPr id="23" name="Shape 21"/>
+          <p:cNvSpPr/>
+          <p:nvPr/>
+        </p:nvSpPr>
+        <p:spPr>
+          <a:xfrm>
+            <a:off x="3090672" y="2258568"/>
+            <a:ext cx="109728" cy="109728"/>
+          </a:xfrm>
+          <a:prstGeom prst="ellipse">
+            <a:avLst/>
+          </a:prstGeom>
+          <a:solidFill>
+            <a:srgbClr val="A5ADBA"/>
+          </a:solidFill>
+          <a:ln w="6350">
+            <a:solidFill>
+              <a:srgbClr val="7D8794"/>
+            </a:solidFill>
+            <a:prstDash val="solid"/>
+          </a:ln>
+        </p:spPr>
+      </p:sp>
+      <p:sp>
+        <p:nvSpPr>
+          <p:cNvPr id="24" name="Shape 22"/>
+          <p:cNvSpPr/>
+          <p:nvPr/>
+        </p:nvSpPr>
+        <p:spPr>
+          <a:xfrm>
+            <a:off x="3291840" y="2258568"/>
+            <a:ext cx="109728" cy="109728"/>
+          </a:xfrm>
+          <a:prstGeom prst="ellipse">
+            <a:avLst/>
+          </a:prstGeom>
+          <a:solidFill>
+            <a:srgbClr val="A5ADBA"/>
+          </a:solidFill>
+          <a:ln w="6350">
+            <a:solidFill>
+              <a:srgbClr val="7D8794"/>
+            </a:solidFill>
+            <a:prstDash val="solid"/>
+          </a:ln>
+        </p:spPr>
+      </p:sp>
+      <p:sp>
+        <p:nvSpPr>
+          <p:cNvPr id="25" name="Shape 23"/>
+          <p:cNvSpPr/>
+          <p:nvPr/>
+        </p:nvSpPr>
+        <p:spPr>
+          <a:xfrm>
+            <a:off x="3493008" y="2258568"/>
+            <a:ext cx="109728" cy="109728"/>
+          </a:xfrm>
+          <a:prstGeom prst="ellipse">
+            <a:avLst/>
+          </a:prstGeom>
+          <a:solidFill>
+            <a:srgbClr val="A5ADBA"/>
+          </a:solidFill>
+          <a:ln w="6350">
+            <a:solidFill>
+              <a:srgbClr val="7D8794"/>
+            </a:solidFill>
+            <a:prstDash val="solid"/>
+          </a:ln>
+        </p:spPr>
+      </p:sp>
+      <p:sp>
+        <p:nvSpPr>
+          <p:cNvPr id="26" name="Shape 24"/>
+          <p:cNvSpPr/>
+          <p:nvPr/>
+        </p:nvSpPr>
+        <p:spPr>
+          <a:xfrm>
+            <a:off x="3694176" y="2258568"/>
+            <a:ext cx="109728" cy="109728"/>
+          </a:xfrm>
+          <a:prstGeom prst="ellipse">
+            <a:avLst/>
+          </a:prstGeom>
+          <a:solidFill>
+            <a:srgbClr val="A5ADBA"/>
+          </a:solidFill>
+          <a:ln w="6350">
+            <a:solidFill>
+              <a:srgbClr val="7D8794"/>
+            </a:solidFill>
+            <a:prstDash val="solid"/>
+          </a:ln>
+        </p:spPr>
+      </p:sp>
+      <p:sp>
+        <p:nvSpPr>
+          <p:cNvPr id="27" name="Shape 25"/>
+          <p:cNvSpPr/>
+          <p:nvPr/>
+        </p:nvSpPr>
+        <p:spPr>
+          <a:xfrm>
+            <a:off x="3895344" y="2258568"/>
+            <a:ext cx="109728" cy="109728"/>
+          </a:xfrm>
+          <a:prstGeom prst="ellipse">
+            <a:avLst/>
+          </a:prstGeom>
+          <a:solidFill>
+            <a:srgbClr val="A5ADBA"/>
+          </a:solidFill>
+          <a:ln w="6350">
+            <a:solidFill>
+              <a:srgbClr val="7D8794"/>
+            </a:solidFill>
+            <a:prstDash val="solid"/>
+          </a:ln>
+        </p:spPr>
+      </p:sp>
+      <p:sp>
+        <p:nvSpPr>
+          <p:cNvPr id="28" name="Shape 26"/>
+          <p:cNvSpPr/>
+          <p:nvPr/>
+        </p:nvSpPr>
+        <p:spPr>
+          <a:xfrm>
+            <a:off x="4096512" y="2258568"/>
+            <a:ext cx="109728" cy="109728"/>
+          </a:xfrm>
+          <a:prstGeom prst="ellipse">
+            <a:avLst/>
+          </a:prstGeom>
+          <a:solidFill>
+            <a:srgbClr val="A5ADBA"/>
+          </a:solidFill>
+          <a:ln w="6350">
+            <a:solidFill>
+              <a:srgbClr val="7D8794"/>
+            </a:solidFill>
+            <a:prstDash val="solid"/>
+          </a:ln>
+        </p:spPr>
+      </p:sp>
+      <p:sp>
+        <p:nvSpPr>
+          <p:cNvPr id="29" name="Shape 27"/>
+          <p:cNvSpPr/>
+          <p:nvPr/>
+        </p:nvSpPr>
+        <p:spPr>
+          <a:xfrm>
+            <a:off x="4297680" y="2258568"/>
+            <a:ext cx="109728" cy="109728"/>
+          </a:xfrm>
+          <a:prstGeom prst="ellipse">
+            <a:avLst/>
+          </a:prstGeom>
+          <a:solidFill>
+            <a:srgbClr val="A5ADBA"/>
+          </a:solidFill>
+          <a:ln w="6350">
+            <a:solidFill>
+              <a:srgbClr val="7D8794"/>
+            </a:solidFill>
+            <a:prstDash val="solid"/>
+          </a:ln>
+        </p:spPr>
+      </p:sp>
+      <p:sp>
+        <p:nvSpPr>
+          <p:cNvPr id="30" name="Shape 28"/>
+          <p:cNvSpPr/>
+          <p:nvPr/>
+        </p:nvSpPr>
+        <p:spPr>
+          <a:xfrm>
+            <a:off x="4498848" y="2258568"/>
+            <a:ext cx="109728" cy="109728"/>
+          </a:xfrm>
+          <a:prstGeom prst="ellipse">
+            <a:avLst/>
+          </a:prstGeom>
+          <a:solidFill>
+            <a:srgbClr val="A5ADBA"/>
+          </a:solidFill>
+          <a:ln w="6350">
+            <a:solidFill>
+              <a:srgbClr val="7D8794"/>
+            </a:solidFill>
+            <a:prstDash val="solid"/>
+          </a:ln>
+        </p:spPr>
+      </p:sp>
+      <p:sp>
+        <p:nvSpPr>
+          <p:cNvPr id="31" name="Shape 29"/>
+          <p:cNvSpPr/>
+          <p:nvPr/>
+        </p:nvSpPr>
+        <p:spPr>
+          <a:xfrm>
+            <a:off x="4700016" y="2258568"/>
+            <a:ext cx="109728" cy="109728"/>
+          </a:xfrm>
+          <a:prstGeom prst="ellipse">
+            <a:avLst/>
+          </a:prstGeom>
+          <a:solidFill>
+            <a:srgbClr val="A5ADBA"/>
+          </a:solidFill>
+          <a:ln w="6350">
+            <a:solidFill>
+              <a:srgbClr val="7D8794"/>
+            </a:solidFill>
+            <a:prstDash val="solid"/>
+          </a:ln>
+        </p:spPr>
+      </p:sp>
+      <p:sp>
+        <p:nvSpPr>
+          <p:cNvPr id="32" name="Shape 30"/>
+          <p:cNvSpPr/>
+          <p:nvPr/>
+        </p:nvSpPr>
+        <p:spPr>
+          <a:xfrm>
+            <a:off x="4901184" y="2258568"/>
+            <a:ext cx="109728" cy="109728"/>
+          </a:xfrm>
+          <a:prstGeom prst="ellipse">
+            <a:avLst/>
+          </a:prstGeom>
+          <a:solidFill>
+            <a:srgbClr val="A5ADBA"/>
+          </a:solidFill>
+          <a:ln w="6350">
+            <a:solidFill>
+              <a:srgbClr val="7D8794"/>
+            </a:solidFill>
+            <a:prstDash val="solid"/>
+          </a:ln>
+        </p:spPr>
+      </p:sp>
+      <p:sp>
+        <p:nvSpPr>
+          <p:cNvPr id="33" name="Shape 31"/>
+          <p:cNvSpPr/>
+          <p:nvPr/>
+        </p:nvSpPr>
+        <p:spPr>
+          <a:xfrm>
+            <a:off x="5102352" y="2258568"/>
+            <a:ext cx="109728" cy="109728"/>
+          </a:xfrm>
+          <a:prstGeom prst="ellipse">
+            <a:avLst/>
+          </a:prstGeom>
+          <a:solidFill>
+            <a:srgbClr val="A5ADBA"/>
+          </a:solidFill>
+          <a:ln w="6350">
+            <a:solidFill>
+              <a:srgbClr val="7D8794"/>
+            </a:solidFill>
+            <a:prstDash val="solid"/>
+          </a:ln>
+        </p:spPr>
+      </p:sp>
+      <p:sp>
+        <p:nvSpPr>
+          <p:cNvPr id="34" name="Shape 32"/>
+          <p:cNvSpPr/>
+          <p:nvPr/>
+        </p:nvSpPr>
+        <p:spPr>
+          <a:xfrm>
+            <a:off x="5303520" y="2258568"/>
+            <a:ext cx="109728" cy="109728"/>
+          </a:xfrm>
+          <a:prstGeom prst="ellipse">
+            <a:avLst/>
+          </a:prstGeom>
+          <a:solidFill>
+            <a:srgbClr val="A5ADBA"/>
+          </a:solidFill>
+          <a:ln w="6350">
+            <a:solidFill>
+              <a:srgbClr val="7D8794"/>
+            </a:solidFill>
+            <a:prstDash val="solid"/>
+          </a:ln>
+        </p:spPr>
+      </p:sp>
+      <p:sp>
+        <p:nvSpPr>
+          <p:cNvPr id="35" name="Shape 33"/>
+          <p:cNvSpPr/>
+          <p:nvPr/>
+        </p:nvSpPr>
+        <p:spPr>
+          <a:xfrm>
             <a:off x="822960" y="1874520"/>
+            <a:ext cx="4754880" cy="182880"/>
+          </a:xfrm>
+          <a:prstGeom prst="rect">
+            <a:avLst/>
+          </a:prstGeom>
+          <a:solidFill>
+            <a:srgbClr val="3A7BC8"/>
+          </a:solidFill>
+          <a:ln w="9525">
+            <a:solidFill>
+              <a:srgbClr val="1F4E8C"/>
+            </a:solidFill>
+            <a:prstDash val="solid"/>
+          </a:ln>
+        </p:spPr>
+      </p:sp>
+      <p:sp>
+        <p:nvSpPr>
+          <p:cNvPr id="36" name="Text 34"/>
+          <p:cNvSpPr/>
+          <p:nvPr/>
+        </p:nvSpPr>
+        <p:spPr>
+          <a:xfrm>
+            <a:off x="4754880" y="1627632"/>
+            <a:ext cx="822960" cy="201168"/>
+          </a:xfrm>
+          <a:prstGeom prst="rect">
+            <a:avLst/>
+          </a:prstGeom>
+          <a:noFill/>
+          <a:ln/>
+        </p:spPr>
+        <p:txBody>
+          <a:bodyPr wrap="square" lIns="0" tIns="0" rIns="0" bIns="0" rtlCol="0" anchor="ctr"/>
+          <a:lstStyle/>
+          <a:p>
+            <a:pPr algn="r" indent="0" marL="0">
+              <a:buNone/>
+            </a:pPr>
+            <a:r>
+              <a:rPr lang="en-US" sz="1000" b="1" dirty="0">
+                <a:solidFill>
+                  <a:srgbClr val="1F4E8C"/>
+                </a:solidFill>
+                <a:latin typeface="Calibri" pitchFamily="34" charset="0"/>
+                <a:ea typeface="Calibri" pitchFamily="34" charset="-122"/>
+                <a:cs typeface="Calibri" pitchFamily="34" charset="-120"/>
+              </a:rPr>
+              <a:t>paint</a:t>
+            </a:r>
+            <a:endParaRPr lang="en-US" sz="1000" dirty="0"/>
+          </a:p>
+        </p:txBody>
+      </p:sp>
+      <p:sp>
+        <p:nvSpPr>
+          <p:cNvPr id="37" name="Shape 35"/>
+          <p:cNvSpPr/>
+          <p:nvPr/>
+        </p:nvSpPr>
+        <p:spPr>
+          <a:xfrm>
+            <a:off x="1280160" y="1609344"/>
+            <a:ext cx="91" cy="237744"/>
+          </a:xfrm>
+          <a:prstGeom prst="line">
+            <a:avLst/>
+          </a:prstGeom>
+          <a:noFill/>
+          <a:ln w="15875">
+            <a:solidFill>
+              <a:srgbClr val="5B9BD5"/>
+            </a:solidFill>
+            <a:prstDash val="solid"/>
+            <a:tailEnd type="triangle"/>
+          </a:ln>
+        </p:spPr>
+      </p:sp>
+      <p:sp>
+        <p:nvSpPr>
+          <p:cNvPr id="38" name="Shape 36"/>
+          <p:cNvSpPr/>
+          <p:nvPr/>
+        </p:nvSpPr>
+        <p:spPr>
+          <a:xfrm>
+            <a:off x="2377440" y="1609344"/>
+            <a:ext cx="91" cy="237744"/>
+          </a:xfrm>
+          <a:prstGeom prst="line">
+            <a:avLst/>
+          </a:prstGeom>
+          <a:noFill/>
+          <a:ln w="15875">
+            <a:solidFill>
+              <a:srgbClr val="5B9BD5"/>
+            </a:solidFill>
+            <a:prstDash val="solid"/>
+            <a:tailEnd type="triangle"/>
+          </a:ln>
+        </p:spPr>
+      </p:sp>
+      <p:sp>
+        <p:nvSpPr>
+          <p:cNvPr id="39" name="Shape 37"/>
+          <p:cNvSpPr/>
+          <p:nvPr/>
+        </p:nvSpPr>
+        <p:spPr>
+          <a:xfrm>
+            <a:off x="3474720" y="1609344"/>
+            <a:ext cx="91" cy="237744"/>
+          </a:xfrm>
+          <a:prstGeom prst="line">
+            <a:avLst/>
+          </a:prstGeom>
+          <a:noFill/>
+          <a:ln w="15875">
+            <a:solidFill>
+              <a:srgbClr val="5B9BD5"/>
+            </a:solidFill>
+            <a:prstDash val="solid"/>
+            <a:tailEnd type="triangle"/>
+          </a:ln>
+        </p:spPr>
+      </p:sp>
+      <p:sp>
+        <p:nvSpPr>
+          <p:cNvPr id="40" name="Text 38"/>
+          <p:cNvSpPr/>
+          <p:nvPr/>
+        </p:nvSpPr>
+        <p:spPr>
+          <a:xfrm>
+            <a:off x="868680" y="2606040"/>
+            <a:ext cx="2743200" cy="201168"/>
+          </a:xfrm>
+          <a:prstGeom prst="rect">
+            <a:avLst/>
+          </a:prstGeom>
+          <a:noFill/>
+          <a:ln/>
+        </p:spPr>
+        <p:txBody>
+          <a:bodyPr wrap="square" lIns="0" tIns="0" rIns="0" bIns="0" rtlCol="0" anchor="ctr"/>
+          <a:lstStyle/>
+          <a:p>
+            <a:pPr algn="l" indent="0" marL="0">
+              <a:buNone/>
+            </a:pPr>
+            <a:r>
+              <a:rPr lang="en-US" sz="1000" i="1" dirty="0">
+                <a:solidFill>
+                  <a:srgbClr val="5B9BD5"/>
+                </a:solidFill>
+                <a:latin typeface="Calibri" pitchFamily="34" charset="0"/>
+                <a:ea typeface="Calibri" pitchFamily="34" charset="-122"/>
+                <a:cs typeface="Calibri" pitchFamily="34" charset="-120"/>
+              </a:rPr>
+              <a:t>O₂ and H₂O blocked</a:t>
+            </a:r>
+            <a:endParaRPr lang="en-US" sz="1000" dirty="0"/>
+          </a:p>
+        </p:txBody>
+      </p:sp>
+      <p:sp>
+        <p:nvSpPr>
+          <p:cNvPr id="41" name="Text 39"/>
+          <p:cNvSpPr/>
+          <p:nvPr/>
+        </p:nvSpPr>
+        <p:spPr>
+          <a:xfrm>
+            <a:off x="640080" y="2852928"/>
+            <a:ext cx="5120640" cy="256032"/>
+          </a:xfrm>
+          <a:prstGeom prst="rect">
+            <a:avLst/>
+          </a:prstGeom>
+          <a:noFill/>
+          <a:ln/>
+        </p:spPr>
+        <p:txBody>
+          <a:bodyPr wrap="square" lIns="0" tIns="0" rIns="0" bIns="0" rtlCol="0" anchor="ctr"/>
+          <a:lstStyle/>
+          <a:p>
+            <a:pPr algn="l" indent="0" marL="0">
+              <a:buNone/>
+            </a:pPr>
+            <a:r>
+              <a:rPr lang="en-US" sz="1050" b="1" dirty="0">
+                <a:solidFill>
+                  <a:srgbClr val="262B3A"/>
+                </a:solidFill>
+                <a:latin typeface="Calibri" pitchFamily="34" charset="0"/>
+                <a:ea typeface="Calibri" pitchFamily="34" charset="-122"/>
+                <a:cs typeface="Calibri" pitchFamily="34" charset="-120"/>
+              </a:rPr>
+              <a:t>2</a:t>
+            </a:r>
+            <a:r>
+              <a:rPr lang="en-US" sz="1050" dirty="0">
+                <a:solidFill>
+                  <a:srgbClr val="262B3A"/>
+                </a:solidFill>
+                <a:latin typeface="Calibri" pitchFamily="34" charset="0"/>
+                <a:ea typeface="Calibri" pitchFamily="34" charset="-122"/>
+                <a:cs typeface="Calibri" pitchFamily="34" charset="-120"/>
+              </a:rPr>
+              <a:t> Scratched paint: air and water reach the steel, which rusts</a:t>
+            </a:r>
+            <a:endParaRPr lang="en-US" sz="1050" dirty="0"/>
+          </a:p>
+        </p:txBody>
+      </p:sp>
+      <p:sp>
+        <p:nvSpPr>
+          <p:cNvPr id="42" name="Shape 40"/>
+          <p:cNvSpPr/>
+          <p:nvPr/>
+        </p:nvSpPr>
+        <p:spPr>
+          <a:xfrm>
+            <a:off x="822960" y="3584448"/>
             <a:ext cx="4754880" cy="502920"/>
           </a:xfrm>
           <a:prstGeom prst="rect">
@@ -46655,13 +47577,13 @@
       </p:sp>
       <p:sp>
         <p:nvSpPr>
-          <p:cNvPr id="12" name="Shape 10"/>
-          <p:cNvSpPr/>
-          <p:nvPr/>
-        </p:nvSpPr>
-        <p:spPr>
-          <a:xfrm>
-            <a:off x="877824" y="2075688"/>
+          <p:cNvPr id="43" name="Shape 41"/>
+          <p:cNvSpPr/>
+          <p:nvPr/>
+        </p:nvSpPr>
+        <p:spPr>
+          <a:xfrm>
+            <a:off x="877824" y="3785616"/>
             <a:ext cx="109728" cy="109728"/>
           </a:xfrm>
           <a:prstGeom prst="ellipse">
@@ -46680,13 +47602,13 @@
       </p:sp>
       <p:sp>
         <p:nvSpPr>
-          <p:cNvPr id="13" name="Shape 11"/>
-          <p:cNvSpPr/>
-          <p:nvPr/>
-        </p:nvSpPr>
-        <p:spPr>
-          <a:xfrm>
-            <a:off x="1078992" y="2075688"/>
+          <p:cNvPr id="44" name="Shape 42"/>
+          <p:cNvSpPr/>
+          <p:nvPr/>
+        </p:nvSpPr>
+        <p:spPr>
+          <a:xfrm>
+            <a:off x="1078992" y="3785616"/>
             <a:ext cx="109728" cy="109728"/>
           </a:xfrm>
           <a:prstGeom prst="ellipse">
@@ -46705,13 +47627,13 @@
       </p:sp>
       <p:sp>
         <p:nvSpPr>
-          <p:cNvPr id="14" name="Shape 12"/>
-          <p:cNvSpPr/>
-          <p:nvPr/>
-        </p:nvSpPr>
-        <p:spPr>
-          <a:xfrm>
-            <a:off x="1280160" y="2075688"/>
+          <p:cNvPr id="45" name="Shape 43"/>
+          <p:cNvSpPr/>
+          <p:nvPr/>
+        </p:nvSpPr>
+        <p:spPr>
+          <a:xfrm>
+            <a:off x="1280160" y="3785616"/>
             <a:ext cx="109728" cy="109728"/>
           </a:xfrm>
           <a:prstGeom prst="ellipse">
@@ -46730,13 +47652,13 @@
       </p:sp>
       <p:sp>
         <p:nvSpPr>
-          <p:cNvPr id="15" name="Shape 13"/>
-          <p:cNvSpPr/>
-          <p:nvPr/>
-        </p:nvSpPr>
-        <p:spPr>
-          <a:xfrm>
-            <a:off x="1481328" y="2075688"/>
+          <p:cNvPr id="46" name="Shape 44"/>
+          <p:cNvSpPr/>
+          <p:nvPr/>
+        </p:nvSpPr>
+        <p:spPr>
+          <a:xfrm>
+            <a:off x="1481328" y="3785616"/>
             <a:ext cx="109728" cy="109728"/>
           </a:xfrm>
           <a:prstGeom prst="ellipse">
@@ -46755,13 +47677,13 @@
       </p:sp>
       <p:sp>
         <p:nvSpPr>
-          <p:cNvPr id="16" name="Shape 14"/>
-          <p:cNvSpPr/>
-          <p:nvPr/>
-        </p:nvSpPr>
-        <p:spPr>
-          <a:xfrm>
-            <a:off x="1682496" y="2075688"/>
+          <p:cNvPr id="47" name="Shape 45"/>
+          <p:cNvSpPr/>
+          <p:nvPr/>
+        </p:nvSpPr>
+        <p:spPr>
+          <a:xfrm>
+            <a:off x="1682496" y="3785616"/>
             <a:ext cx="109728" cy="109728"/>
           </a:xfrm>
           <a:prstGeom prst="ellipse">
@@ -46780,13 +47702,13 @@
       </p:sp>
       <p:sp>
         <p:nvSpPr>
-          <p:cNvPr id="17" name="Shape 15"/>
-          <p:cNvSpPr/>
-          <p:nvPr/>
-        </p:nvSpPr>
-        <p:spPr>
-          <a:xfrm>
-            <a:off x="1883664" y="2075688"/>
+          <p:cNvPr id="48" name="Shape 46"/>
+          <p:cNvSpPr/>
+          <p:nvPr/>
+        </p:nvSpPr>
+        <p:spPr>
+          <a:xfrm>
+            <a:off x="1883664" y="3785616"/>
             <a:ext cx="109728" cy="109728"/>
           </a:xfrm>
           <a:prstGeom prst="ellipse">
@@ -46805,13 +47727,13 @@
       </p:sp>
       <p:sp>
         <p:nvSpPr>
-          <p:cNvPr id="18" name="Shape 16"/>
-          <p:cNvSpPr/>
-          <p:nvPr/>
-        </p:nvSpPr>
-        <p:spPr>
-          <a:xfrm>
-            <a:off x="2084832" y="2075688"/>
+          <p:cNvPr id="49" name="Shape 47"/>
+          <p:cNvSpPr/>
+          <p:nvPr/>
+        </p:nvSpPr>
+        <p:spPr>
+          <a:xfrm>
+            <a:off x="2084832" y="3785616"/>
             <a:ext cx="109728" cy="109728"/>
           </a:xfrm>
           <a:prstGeom prst="ellipse">
@@ -46830,13 +47752,13 @@
       </p:sp>
       <p:sp>
         <p:nvSpPr>
-          <p:cNvPr id="19" name="Shape 17"/>
-          <p:cNvSpPr/>
-          <p:nvPr/>
-        </p:nvSpPr>
-        <p:spPr>
-          <a:xfrm>
-            <a:off x="2286000" y="2075688"/>
+          <p:cNvPr id="50" name="Shape 48"/>
+          <p:cNvSpPr/>
+          <p:nvPr/>
+        </p:nvSpPr>
+        <p:spPr>
+          <a:xfrm>
+            <a:off x="2286000" y="3785616"/>
             <a:ext cx="109728" cy="109728"/>
           </a:xfrm>
           <a:prstGeom prst="ellipse">
@@ -46855,13 +47777,13 @@
       </p:sp>
       <p:sp>
         <p:nvSpPr>
-          <p:cNvPr id="20" name="Shape 18"/>
-          <p:cNvSpPr/>
-          <p:nvPr/>
-        </p:nvSpPr>
-        <p:spPr>
-          <a:xfrm>
-            <a:off x="2487168" y="2075688"/>
+          <p:cNvPr id="51" name="Shape 49"/>
+          <p:cNvSpPr/>
+          <p:nvPr/>
+        </p:nvSpPr>
+        <p:spPr>
+          <a:xfrm>
+            <a:off x="2487168" y="3785616"/>
             <a:ext cx="109728" cy="109728"/>
           </a:xfrm>
           <a:prstGeom prst="ellipse">
@@ -46880,13 +47802,13 @@
       </p:sp>
       <p:sp>
         <p:nvSpPr>
-          <p:cNvPr id="21" name="Shape 19"/>
-          <p:cNvSpPr/>
-          <p:nvPr/>
-        </p:nvSpPr>
-        <p:spPr>
-          <a:xfrm>
-            <a:off x="2688336" y="2075688"/>
+          <p:cNvPr id="52" name="Shape 50"/>
+          <p:cNvSpPr/>
+          <p:nvPr/>
+        </p:nvSpPr>
+        <p:spPr>
+          <a:xfrm>
+            <a:off x="2688336" y="3785616"/>
             <a:ext cx="109728" cy="109728"/>
           </a:xfrm>
           <a:prstGeom prst="ellipse">
@@ -46905,13 +47827,13 @@
       </p:sp>
       <p:sp>
         <p:nvSpPr>
-          <p:cNvPr id="22" name="Shape 20"/>
-          <p:cNvSpPr/>
-          <p:nvPr/>
-        </p:nvSpPr>
-        <p:spPr>
-          <a:xfrm>
-            <a:off x="2889504" y="2075688"/>
+          <p:cNvPr id="53" name="Shape 51"/>
+          <p:cNvSpPr/>
+          <p:nvPr/>
+        </p:nvSpPr>
+        <p:spPr>
+          <a:xfrm>
+            <a:off x="2889504" y="3785616"/>
             <a:ext cx="109728" cy="109728"/>
           </a:xfrm>
           <a:prstGeom prst="ellipse">
@@ -46930,13 +47852,13 @@
       </p:sp>
       <p:sp>
         <p:nvSpPr>
-          <p:cNvPr id="23" name="Shape 21"/>
-          <p:cNvSpPr/>
-          <p:nvPr/>
-        </p:nvSpPr>
-        <p:spPr>
-          <a:xfrm>
-            <a:off x="3090672" y="2075688"/>
+          <p:cNvPr id="54" name="Shape 52"/>
+          <p:cNvSpPr/>
+          <p:nvPr/>
+        </p:nvSpPr>
+        <p:spPr>
+          <a:xfrm>
+            <a:off x="3090672" y="3785616"/>
             <a:ext cx="109728" cy="109728"/>
           </a:xfrm>
           <a:prstGeom prst="ellipse">
@@ -46955,13 +47877,13 @@
       </p:sp>
       <p:sp>
         <p:nvSpPr>
-          <p:cNvPr id="24" name="Shape 22"/>
-          <p:cNvSpPr/>
-          <p:nvPr/>
-        </p:nvSpPr>
-        <p:spPr>
-          <a:xfrm>
-            <a:off x="3291840" y="2075688"/>
+          <p:cNvPr id="55" name="Shape 53"/>
+          <p:cNvSpPr/>
+          <p:nvPr/>
+        </p:nvSpPr>
+        <p:spPr>
+          <a:xfrm>
+            <a:off x="3291840" y="3785616"/>
             <a:ext cx="109728" cy="109728"/>
           </a:xfrm>
           <a:prstGeom prst="ellipse">
@@ -46980,13 +47902,13 @@
       </p:sp>
       <p:sp>
         <p:nvSpPr>
-          <p:cNvPr id="25" name="Shape 23"/>
-          <p:cNvSpPr/>
-          <p:nvPr/>
-        </p:nvSpPr>
-        <p:spPr>
-          <a:xfrm>
-            <a:off x="3493008" y="2075688"/>
+          <p:cNvPr id="56" name="Shape 54"/>
+          <p:cNvSpPr/>
+          <p:nvPr/>
+        </p:nvSpPr>
+        <p:spPr>
+          <a:xfrm>
+            <a:off x="3493008" y="3785616"/>
             <a:ext cx="109728" cy="109728"/>
           </a:xfrm>
           <a:prstGeom prst="ellipse">
@@ -47005,13 +47927,13 @@
       </p:sp>
       <p:sp>
         <p:nvSpPr>
-          <p:cNvPr id="26" name="Shape 24"/>
-          <p:cNvSpPr/>
-          <p:nvPr/>
-        </p:nvSpPr>
-        <p:spPr>
-          <a:xfrm>
-            <a:off x="3694176" y="2075688"/>
+          <p:cNvPr id="57" name="Shape 55"/>
+          <p:cNvSpPr/>
+          <p:nvPr/>
+        </p:nvSpPr>
+        <p:spPr>
+          <a:xfrm>
+            <a:off x="3694176" y="3785616"/>
             <a:ext cx="109728" cy="109728"/>
           </a:xfrm>
           <a:prstGeom prst="ellipse">
@@ -47030,13 +47952,13 @@
       </p:sp>
       <p:sp>
         <p:nvSpPr>
-          <p:cNvPr id="27" name="Shape 25"/>
-          <p:cNvSpPr/>
-          <p:nvPr/>
-        </p:nvSpPr>
-        <p:spPr>
-          <a:xfrm>
-            <a:off x="3895344" y="2075688"/>
+          <p:cNvPr id="58" name="Shape 56"/>
+          <p:cNvSpPr/>
+          <p:nvPr/>
+        </p:nvSpPr>
+        <p:spPr>
+          <a:xfrm>
+            <a:off x="3895344" y="3785616"/>
             <a:ext cx="109728" cy="109728"/>
           </a:xfrm>
           <a:prstGeom prst="ellipse">
@@ -47055,13 +47977,13 @@
       </p:sp>
       <p:sp>
         <p:nvSpPr>
-          <p:cNvPr id="28" name="Shape 26"/>
-          <p:cNvSpPr/>
-          <p:nvPr/>
-        </p:nvSpPr>
-        <p:spPr>
-          <a:xfrm>
-            <a:off x="4096512" y="2075688"/>
+          <p:cNvPr id="59" name="Shape 57"/>
+          <p:cNvSpPr/>
+          <p:nvPr/>
+        </p:nvSpPr>
+        <p:spPr>
+          <a:xfrm>
+            <a:off x="4096512" y="3785616"/>
             <a:ext cx="109728" cy="109728"/>
           </a:xfrm>
           <a:prstGeom prst="ellipse">
@@ -47080,13 +48002,13 @@
       </p:sp>
       <p:sp>
         <p:nvSpPr>
-          <p:cNvPr id="29" name="Shape 27"/>
-          <p:cNvSpPr/>
-          <p:nvPr/>
-        </p:nvSpPr>
-        <p:spPr>
-          <a:xfrm>
-            <a:off x="4297680" y="2075688"/>
+          <p:cNvPr id="60" name="Shape 58"/>
+          <p:cNvSpPr/>
+          <p:nvPr/>
+        </p:nvSpPr>
+        <p:spPr>
+          <a:xfrm>
+            <a:off x="4297680" y="3785616"/>
             <a:ext cx="109728" cy="109728"/>
           </a:xfrm>
           <a:prstGeom prst="ellipse">
@@ -47105,13 +48027,13 @@
       </p:sp>
       <p:sp>
         <p:nvSpPr>
-          <p:cNvPr id="30" name="Shape 28"/>
-          <p:cNvSpPr/>
-          <p:nvPr/>
-        </p:nvSpPr>
-        <p:spPr>
-          <a:xfrm>
-            <a:off x="4498848" y="2075688"/>
+          <p:cNvPr id="61" name="Shape 59"/>
+          <p:cNvSpPr/>
+          <p:nvPr/>
+        </p:nvSpPr>
+        <p:spPr>
+          <a:xfrm>
+            <a:off x="4498848" y="3785616"/>
             <a:ext cx="109728" cy="109728"/>
           </a:xfrm>
           <a:prstGeom prst="ellipse">
@@ -47130,13 +48052,13 @@
       </p:sp>
       <p:sp>
         <p:nvSpPr>
-          <p:cNvPr id="31" name="Shape 29"/>
-          <p:cNvSpPr/>
-          <p:nvPr/>
-        </p:nvSpPr>
-        <p:spPr>
-          <a:xfrm>
-            <a:off x="4700016" y="2075688"/>
+          <p:cNvPr id="62" name="Shape 60"/>
+          <p:cNvSpPr/>
+          <p:nvPr/>
+        </p:nvSpPr>
+        <p:spPr>
+          <a:xfrm>
+            <a:off x="4700016" y="3785616"/>
             <a:ext cx="109728" cy="109728"/>
           </a:xfrm>
           <a:prstGeom prst="ellipse">
@@ -47155,13 +48077,13 @@
       </p:sp>
       <p:sp>
         <p:nvSpPr>
-          <p:cNvPr id="32" name="Shape 30"/>
-          <p:cNvSpPr/>
-          <p:nvPr/>
-        </p:nvSpPr>
-        <p:spPr>
-          <a:xfrm>
-            <a:off x="4901184" y="2075688"/>
+          <p:cNvPr id="63" name="Shape 61"/>
+          <p:cNvSpPr/>
+          <p:nvPr/>
+        </p:nvSpPr>
+        <p:spPr>
+          <a:xfrm>
+            <a:off x="4901184" y="3785616"/>
             <a:ext cx="109728" cy="109728"/>
           </a:xfrm>
           <a:prstGeom prst="ellipse">
@@ -47180,13 +48102,13 @@
       </p:sp>
       <p:sp>
         <p:nvSpPr>
-          <p:cNvPr id="33" name="Shape 31"/>
-          <p:cNvSpPr/>
-          <p:nvPr/>
-        </p:nvSpPr>
-        <p:spPr>
-          <a:xfrm>
-            <a:off x="5102352" y="2075688"/>
+          <p:cNvPr id="64" name="Shape 62"/>
+          <p:cNvSpPr/>
+          <p:nvPr/>
+        </p:nvSpPr>
+        <p:spPr>
+          <a:xfrm>
+            <a:off x="5102352" y="3785616"/>
             <a:ext cx="109728" cy="109728"/>
           </a:xfrm>
           <a:prstGeom prst="ellipse">
@@ -47205,13 +48127,13 @@
       </p:sp>
       <p:sp>
         <p:nvSpPr>
-          <p:cNvPr id="34" name="Shape 32"/>
-          <p:cNvSpPr/>
-          <p:nvPr/>
-        </p:nvSpPr>
-        <p:spPr>
-          <a:xfrm>
-            <a:off x="5303520" y="2075688"/>
+          <p:cNvPr id="65" name="Shape 63"/>
+          <p:cNvSpPr/>
+          <p:nvPr/>
+        </p:nvSpPr>
+        <p:spPr>
+          <a:xfrm>
+            <a:off x="5303520" y="3785616"/>
             <a:ext cx="109728" cy="109728"/>
           </a:xfrm>
           <a:prstGeom prst="ellipse">
@@ -47230,14 +48152,14 @@
       </p:sp>
       <p:sp>
         <p:nvSpPr>
-          <p:cNvPr id="35" name="Shape 33"/>
-          <p:cNvSpPr/>
-          <p:nvPr/>
-        </p:nvSpPr>
-        <p:spPr>
-          <a:xfrm>
-            <a:off x="822960" y="1691640"/>
-            <a:ext cx="4754880" cy="182880"/>
+          <p:cNvPr id="66" name="Shape 64"/>
+          <p:cNvSpPr/>
+          <p:nvPr/>
+        </p:nvSpPr>
+        <p:spPr>
+          <a:xfrm>
+            <a:off x="822960" y="3401568"/>
+            <a:ext cx="2286000" cy="182880"/>
           </a:xfrm>
           <a:prstGeom prst="rect">
             <a:avLst/>
@@ -47255,14 +48177,88 @@
       </p:sp>
       <p:sp>
         <p:nvSpPr>
-          <p:cNvPr id="36" name="Text 34"/>
-          <p:cNvSpPr/>
-          <p:nvPr/>
-        </p:nvSpPr>
-        <p:spPr>
-          <a:xfrm>
-            <a:off x="4754880" y="1463040"/>
-            <a:ext cx="822960" cy="201168"/>
+          <p:cNvPr id="67" name="Shape 65"/>
+          <p:cNvSpPr/>
+          <p:nvPr/>
+        </p:nvSpPr>
+        <p:spPr>
+          <a:xfrm>
+            <a:off x="3291840" y="3401568"/>
+            <a:ext cx="2286000" cy="182880"/>
+          </a:xfrm>
+          <a:prstGeom prst="rect">
+            <a:avLst/>
+          </a:prstGeom>
+          <a:solidFill>
+            <a:srgbClr val="3A7BC8"/>
+          </a:solidFill>
+          <a:ln w="9525">
+            <a:solidFill>
+              <a:srgbClr val="1F4E8C"/>
+            </a:solidFill>
+            <a:prstDash val="solid"/>
+          </a:ln>
+        </p:spPr>
+      </p:sp>
+      <p:sp>
+        <p:nvSpPr>
+          <p:cNvPr id="68" name="Shape 66"/>
+          <p:cNvSpPr/>
+          <p:nvPr/>
+        </p:nvSpPr>
+        <p:spPr>
+          <a:xfrm>
+            <a:off x="3008376" y="3502152"/>
+            <a:ext cx="384048" cy="201168"/>
+          </a:xfrm>
+          <a:prstGeom prst="ellipse">
+            <a:avLst/>
+          </a:prstGeom>
+          <a:solidFill>
+            <a:srgbClr val="B5541E"/>
+          </a:solidFill>
+          <a:ln w="9525">
+            <a:solidFill>
+              <a:srgbClr val="7A3510"/>
+            </a:solidFill>
+            <a:prstDash val="solid"/>
+          </a:ln>
+        </p:spPr>
+      </p:sp>
+      <p:sp>
+        <p:nvSpPr>
+          <p:cNvPr id="69" name="Shape 67"/>
+          <p:cNvSpPr/>
+          <p:nvPr/>
+        </p:nvSpPr>
+        <p:spPr>
+          <a:xfrm>
+            <a:off x="3200400" y="3154680"/>
+            <a:ext cx="91" cy="338328"/>
+          </a:xfrm>
+          <a:prstGeom prst="line">
+            <a:avLst/>
+          </a:prstGeom>
+          <a:noFill/>
+          <a:ln w="19050">
+            <a:solidFill>
+              <a:srgbClr val="5B9BD5"/>
+            </a:solidFill>
+            <a:prstDash val="solid"/>
+            <a:tailEnd type="triangle"/>
+          </a:ln>
+        </p:spPr>
+      </p:sp>
+      <p:sp>
+        <p:nvSpPr>
+          <p:cNvPr id="70" name="Text 68"/>
+          <p:cNvSpPr/>
+          <p:nvPr/>
+        </p:nvSpPr>
+        <p:spPr>
+          <a:xfrm>
+            <a:off x="3337560" y="3154680"/>
+            <a:ext cx="2011680" cy="201168"/>
           </a:xfrm>
           <a:prstGeom prst="rect">
             <a:avLst/>
@@ -47274,19 +48270,19 @@
           <a:bodyPr wrap="square" lIns="0" tIns="0" rIns="0" bIns="0" rtlCol="0" anchor="ctr"/>
           <a:lstStyle/>
           <a:p>
-            <a:pPr algn="r" indent="0" marL="0">
+            <a:pPr algn="l" indent="0" marL="0">
               <a:buNone/>
             </a:pPr>
             <a:r>
               <a:rPr lang="en-US" sz="1000" b="1" dirty="0">
                 <a:solidFill>
-                  <a:srgbClr val="1F4E8C"/>
-                </a:solidFill>
-                <a:latin typeface="Calibri" pitchFamily="34" charset="0"/>
-                <a:ea typeface="Calibri" pitchFamily="34" charset="-122"/>
-                <a:cs typeface="Calibri" pitchFamily="34" charset="-120"/>
-              </a:rPr>
-              <a:t>paint</a:t>
+                  <a:srgbClr val="7A3510"/>
+                </a:solidFill>
+                <a:latin typeface="Calibri" pitchFamily="34" charset="0"/>
+                <a:ea typeface="Calibri" pitchFamily="34" charset="-122"/>
+                <a:cs typeface="Calibri" pitchFamily="34" charset="-120"/>
+              </a:rPr>
+              <a:t>rust spreads under paint</a:t>
             </a:r>
             <a:endParaRPr lang="en-US" sz="1000" dirty="0"/>
           </a:p>
@@ -47294,941 +48290,18 @@
       </p:sp>
       <p:sp>
         <p:nvSpPr>
-          <p:cNvPr id="37" name="Shape 35"/>
-          <p:cNvSpPr/>
-          <p:nvPr/>
-        </p:nvSpPr>
-        <p:spPr>
-          <a:xfrm>
-            <a:off x="1280160" y="1417320"/>
-            <a:ext cx="91" cy="246888"/>
-          </a:xfrm>
-          <a:prstGeom prst="line">
-            <a:avLst/>
-          </a:prstGeom>
-          <a:noFill/>
-          <a:ln w="15875">
-            <a:solidFill>
-              <a:srgbClr val="5B9BD5"/>
-            </a:solidFill>
-            <a:prstDash val="solid"/>
-            <a:tailEnd type="triangle"/>
-          </a:ln>
-        </p:spPr>
-      </p:sp>
-      <p:sp>
-        <p:nvSpPr>
-          <p:cNvPr id="38" name="Shape 36"/>
-          <p:cNvSpPr/>
-          <p:nvPr/>
-        </p:nvSpPr>
-        <p:spPr>
-          <a:xfrm>
-            <a:off x="2377440" y="1417320"/>
-            <a:ext cx="91" cy="246888"/>
-          </a:xfrm>
-          <a:prstGeom prst="line">
-            <a:avLst/>
-          </a:prstGeom>
-          <a:noFill/>
-          <a:ln w="15875">
-            <a:solidFill>
-              <a:srgbClr val="5B9BD5"/>
-            </a:solidFill>
-            <a:prstDash val="solid"/>
-            <a:tailEnd type="triangle"/>
-          </a:ln>
-        </p:spPr>
-      </p:sp>
-      <p:sp>
-        <p:nvSpPr>
-          <p:cNvPr id="39" name="Shape 37"/>
-          <p:cNvSpPr/>
-          <p:nvPr/>
-        </p:nvSpPr>
-        <p:spPr>
-          <a:xfrm>
-            <a:off x="3474720" y="1417320"/>
-            <a:ext cx="91" cy="246888"/>
-          </a:xfrm>
-          <a:prstGeom prst="line">
-            <a:avLst/>
-          </a:prstGeom>
-          <a:noFill/>
-          <a:ln w="15875">
-            <a:solidFill>
-              <a:srgbClr val="5B9BD5"/>
-            </a:solidFill>
-            <a:prstDash val="solid"/>
-            <a:tailEnd type="triangle"/>
-          </a:ln>
-        </p:spPr>
-      </p:sp>
-      <p:sp>
-        <p:nvSpPr>
-          <p:cNvPr id="40" name="Shape 38"/>
-          <p:cNvSpPr/>
-          <p:nvPr/>
-        </p:nvSpPr>
-        <p:spPr>
-          <a:xfrm>
-            <a:off x="4572000" y="1417320"/>
-            <a:ext cx="91" cy="246888"/>
-          </a:xfrm>
-          <a:prstGeom prst="line">
-            <a:avLst/>
-          </a:prstGeom>
-          <a:noFill/>
-          <a:ln w="15875">
-            <a:solidFill>
-              <a:srgbClr val="5B9BD5"/>
-            </a:solidFill>
-            <a:prstDash val="solid"/>
-            <a:tailEnd type="triangle"/>
-          </a:ln>
-        </p:spPr>
-      </p:sp>
-      <p:sp>
-        <p:nvSpPr>
-          <p:cNvPr id="41" name="Text 39"/>
-          <p:cNvSpPr/>
-          <p:nvPr/>
-        </p:nvSpPr>
-        <p:spPr>
-          <a:xfrm>
-            <a:off x="868680" y="2468880"/>
-            <a:ext cx="2743200" cy="201168"/>
-          </a:xfrm>
-          <a:prstGeom prst="rect">
-            <a:avLst/>
-          </a:prstGeom>
-          <a:noFill/>
-          <a:ln/>
-        </p:spPr>
-        <p:txBody>
-          <a:bodyPr wrap="square" lIns="0" tIns="0" rIns="0" bIns="0" rtlCol="0" anchor="ctr"/>
-          <a:lstStyle/>
-          <a:p>
-            <a:pPr algn="l" indent="0" marL="0">
-              <a:buNone/>
-            </a:pPr>
-            <a:r>
-              <a:rPr lang="en-US" sz="1000" i="1" dirty="0">
-                <a:solidFill>
-                  <a:srgbClr val="5B9BD5"/>
-                </a:solidFill>
-                <a:latin typeface="Calibri" pitchFamily="34" charset="0"/>
-                <a:ea typeface="Calibri" pitchFamily="34" charset="-122"/>
-                <a:cs typeface="Calibri" pitchFamily="34" charset="-120"/>
-              </a:rPr>
-              <a:t>O₂ and H₂O blocked</a:t>
-            </a:r>
-            <a:endParaRPr lang="en-US" sz="1000" dirty="0"/>
-          </a:p>
-        </p:txBody>
-      </p:sp>
-      <p:sp>
-        <p:nvSpPr>
-          <p:cNvPr id="42" name="Text 40"/>
-          <p:cNvSpPr/>
-          <p:nvPr/>
-        </p:nvSpPr>
-        <p:spPr>
-          <a:xfrm>
-            <a:off x="640080" y="2834640"/>
-            <a:ext cx="5120640" cy="256032"/>
-          </a:xfrm>
-          <a:prstGeom prst="rect">
-            <a:avLst/>
-          </a:prstGeom>
-          <a:noFill/>
-          <a:ln/>
-        </p:spPr>
-        <p:txBody>
-          <a:bodyPr wrap="square" lIns="0" tIns="0" rIns="0" bIns="0" rtlCol="0" anchor="ctr"/>
-          <a:lstStyle/>
-          <a:p>
-            <a:pPr algn="l" indent="0" marL="0">
-              <a:buNone/>
-            </a:pPr>
-            <a:r>
-              <a:rPr lang="en-US" sz="1050" b="1" dirty="0">
-                <a:solidFill>
-                  <a:srgbClr val="262B3A"/>
-                </a:solidFill>
-                <a:latin typeface="Calibri" pitchFamily="34" charset="0"/>
-                <a:ea typeface="Calibri" pitchFamily="34" charset="-122"/>
-                <a:cs typeface="Calibri" pitchFamily="34" charset="-120"/>
-              </a:rPr>
-              <a:t>2</a:t>
-            </a:r>
-            <a:r>
-              <a:rPr lang="en-US" sz="1050" dirty="0">
-                <a:solidFill>
-                  <a:srgbClr val="262B3A"/>
-                </a:solidFill>
-                <a:latin typeface="Calibri" pitchFamily="34" charset="0"/>
-                <a:ea typeface="Calibri" pitchFamily="34" charset="-122"/>
-                <a:cs typeface="Calibri" pitchFamily="34" charset="-120"/>
-              </a:rPr>
-              <a:t> Scratched paint: air and water reach the steel, which rusts</a:t>
-            </a:r>
-            <a:endParaRPr lang="en-US" sz="1050" dirty="0"/>
-          </a:p>
-        </p:txBody>
-      </p:sp>
-      <p:sp>
-        <p:nvSpPr>
-          <p:cNvPr id="43" name="Shape 41"/>
-          <p:cNvSpPr/>
-          <p:nvPr/>
-        </p:nvSpPr>
-        <p:spPr>
-          <a:xfrm>
-            <a:off x="822960" y="3383280"/>
-            <a:ext cx="4754880" cy="502920"/>
-          </a:xfrm>
-          <a:prstGeom prst="rect">
-            <a:avLst/>
-          </a:prstGeom>
-          <a:solidFill>
-            <a:srgbClr val="B9C0CC"/>
-          </a:solidFill>
-          <a:ln w="12700">
-            <a:solidFill>
-              <a:srgbClr val="5A6275"/>
-            </a:solidFill>
-            <a:prstDash val="solid"/>
-          </a:ln>
-        </p:spPr>
-      </p:sp>
-      <p:sp>
-        <p:nvSpPr>
-          <p:cNvPr id="44" name="Shape 42"/>
-          <p:cNvSpPr/>
-          <p:nvPr/>
-        </p:nvSpPr>
-        <p:spPr>
-          <a:xfrm>
-            <a:off x="877824" y="3584448"/>
-            <a:ext cx="109728" cy="109728"/>
-          </a:xfrm>
-          <a:prstGeom prst="ellipse">
-            <a:avLst/>
-          </a:prstGeom>
-          <a:solidFill>
-            <a:srgbClr val="A5ADBA"/>
-          </a:solidFill>
-          <a:ln w="6350">
-            <a:solidFill>
-              <a:srgbClr val="7D8794"/>
-            </a:solidFill>
-            <a:prstDash val="solid"/>
-          </a:ln>
-        </p:spPr>
-      </p:sp>
-      <p:sp>
-        <p:nvSpPr>
-          <p:cNvPr id="45" name="Shape 43"/>
-          <p:cNvSpPr/>
-          <p:nvPr/>
-        </p:nvSpPr>
-        <p:spPr>
-          <a:xfrm>
-            <a:off x="1078992" y="3584448"/>
-            <a:ext cx="109728" cy="109728"/>
-          </a:xfrm>
-          <a:prstGeom prst="ellipse">
-            <a:avLst/>
-          </a:prstGeom>
-          <a:solidFill>
-            <a:srgbClr val="A5ADBA"/>
-          </a:solidFill>
-          <a:ln w="6350">
-            <a:solidFill>
-              <a:srgbClr val="7D8794"/>
-            </a:solidFill>
-            <a:prstDash val="solid"/>
-          </a:ln>
-        </p:spPr>
-      </p:sp>
-      <p:sp>
-        <p:nvSpPr>
-          <p:cNvPr id="46" name="Shape 44"/>
-          <p:cNvSpPr/>
-          <p:nvPr/>
-        </p:nvSpPr>
-        <p:spPr>
-          <a:xfrm>
-            <a:off x="1280160" y="3584448"/>
-            <a:ext cx="109728" cy="109728"/>
-          </a:xfrm>
-          <a:prstGeom prst="ellipse">
-            <a:avLst/>
-          </a:prstGeom>
-          <a:solidFill>
-            <a:srgbClr val="A5ADBA"/>
-          </a:solidFill>
-          <a:ln w="6350">
-            <a:solidFill>
-              <a:srgbClr val="7D8794"/>
-            </a:solidFill>
-            <a:prstDash val="solid"/>
-          </a:ln>
-        </p:spPr>
-      </p:sp>
-      <p:sp>
-        <p:nvSpPr>
-          <p:cNvPr id="47" name="Shape 45"/>
-          <p:cNvSpPr/>
-          <p:nvPr/>
-        </p:nvSpPr>
-        <p:spPr>
-          <a:xfrm>
-            <a:off x="1481328" y="3584448"/>
-            <a:ext cx="109728" cy="109728"/>
-          </a:xfrm>
-          <a:prstGeom prst="ellipse">
-            <a:avLst/>
-          </a:prstGeom>
-          <a:solidFill>
-            <a:srgbClr val="A5ADBA"/>
-          </a:solidFill>
-          <a:ln w="6350">
-            <a:solidFill>
-              <a:srgbClr val="7D8794"/>
-            </a:solidFill>
-            <a:prstDash val="solid"/>
-          </a:ln>
-        </p:spPr>
-      </p:sp>
-      <p:sp>
-        <p:nvSpPr>
-          <p:cNvPr id="48" name="Shape 46"/>
-          <p:cNvSpPr/>
-          <p:nvPr/>
-        </p:nvSpPr>
-        <p:spPr>
-          <a:xfrm>
-            <a:off x="1682496" y="3584448"/>
-            <a:ext cx="109728" cy="109728"/>
-          </a:xfrm>
-          <a:prstGeom prst="ellipse">
-            <a:avLst/>
-          </a:prstGeom>
-          <a:solidFill>
-            <a:srgbClr val="A5ADBA"/>
-          </a:solidFill>
-          <a:ln w="6350">
-            <a:solidFill>
-              <a:srgbClr val="7D8794"/>
-            </a:solidFill>
-            <a:prstDash val="solid"/>
-          </a:ln>
-        </p:spPr>
-      </p:sp>
-      <p:sp>
-        <p:nvSpPr>
-          <p:cNvPr id="49" name="Shape 47"/>
-          <p:cNvSpPr/>
-          <p:nvPr/>
-        </p:nvSpPr>
-        <p:spPr>
-          <a:xfrm>
-            <a:off x="1883664" y="3584448"/>
-            <a:ext cx="109728" cy="109728"/>
-          </a:xfrm>
-          <a:prstGeom prst="ellipse">
-            <a:avLst/>
-          </a:prstGeom>
-          <a:solidFill>
-            <a:srgbClr val="A5ADBA"/>
-          </a:solidFill>
-          <a:ln w="6350">
-            <a:solidFill>
-              <a:srgbClr val="7D8794"/>
-            </a:solidFill>
-            <a:prstDash val="solid"/>
-          </a:ln>
-        </p:spPr>
-      </p:sp>
-      <p:sp>
-        <p:nvSpPr>
-          <p:cNvPr id="50" name="Shape 48"/>
-          <p:cNvSpPr/>
-          <p:nvPr/>
-        </p:nvSpPr>
-        <p:spPr>
-          <a:xfrm>
-            <a:off x="2084832" y="3584448"/>
-            <a:ext cx="109728" cy="109728"/>
-          </a:xfrm>
-          <a:prstGeom prst="ellipse">
-            <a:avLst/>
-          </a:prstGeom>
-          <a:solidFill>
-            <a:srgbClr val="A5ADBA"/>
-          </a:solidFill>
-          <a:ln w="6350">
-            <a:solidFill>
-              <a:srgbClr val="7D8794"/>
-            </a:solidFill>
-            <a:prstDash val="solid"/>
-          </a:ln>
-        </p:spPr>
-      </p:sp>
-      <p:sp>
-        <p:nvSpPr>
-          <p:cNvPr id="51" name="Shape 49"/>
-          <p:cNvSpPr/>
-          <p:nvPr/>
-        </p:nvSpPr>
-        <p:spPr>
-          <a:xfrm>
-            <a:off x="2286000" y="3584448"/>
-            <a:ext cx="109728" cy="109728"/>
-          </a:xfrm>
-          <a:prstGeom prst="ellipse">
-            <a:avLst/>
-          </a:prstGeom>
-          <a:solidFill>
-            <a:srgbClr val="A5ADBA"/>
-          </a:solidFill>
-          <a:ln w="6350">
-            <a:solidFill>
-              <a:srgbClr val="7D8794"/>
-            </a:solidFill>
-            <a:prstDash val="solid"/>
-          </a:ln>
-        </p:spPr>
-      </p:sp>
-      <p:sp>
-        <p:nvSpPr>
-          <p:cNvPr id="52" name="Shape 50"/>
-          <p:cNvSpPr/>
-          <p:nvPr/>
-        </p:nvSpPr>
-        <p:spPr>
-          <a:xfrm>
-            <a:off x="2487168" y="3584448"/>
-            <a:ext cx="109728" cy="109728"/>
-          </a:xfrm>
-          <a:prstGeom prst="ellipse">
-            <a:avLst/>
-          </a:prstGeom>
-          <a:solidFill>
-            <a:srgbClr val="A5ADBA"/>
-          </a:solidFill>
-          <a:ln w="6350">
-            <a:solidFill>
-              <a:srgbClr val="7D8794"/>
-            </a:solidFill>
-            <a:prstDash val="solid"/>
-          </a:ln>
-        </p:spPr>
-      </p:sp>
-      <p:sp>
-        <p:nvSpPr>
-          <p:cNvPr id="53" name="Shape 51"/>
-          <p:cNvSpPr/>
-          <p:nvPr/>
-        </p:nvSpPr>
-        <p:spPr>
-          <a:xfrm>
-            <a:off x="2688336" y="3584448"/>
-            <a:ext cx="109728" cy="109728"/>
-          </a:xfrm>
-          <a:prstGeom prst="ellipse">
-            <a:avLst/>
-          </a:prstGeom>
-          <a:solidFill>
-            <a:srgbClr val="A5ADBA"/>
-          </a:solidFill>
-          <a:ln w="6350">
-            <a:solidFill>
-              <a:srgbClr val="7D8794"/>
-            </a:solidFill>
-            <a:prstDash val="solid"/>
-          </a:ln>
-        </p:spPr>
-      </p:sp>
-      <p:sp>
-        <p:nvSpPr>
-          <p:cNvPr id="54" name="Shape 52"/>
-          <p:cNvSpPr/>
-          <p:nvPr/>
-        </p:nvSpPr>
-        <p:spPr>
-          <a:xfrm>
-            <a:off x="2889504" y="3584448"/>
-            <a:ext cx="109728" cy="109728"/>
-          </a:xfrm>
-          <a:prstGeom prst="ellipse">
-            <a:avLst/>
-          </a:prstGeom>
-          <a:solidFill>
-            <a:srgbClr val="A5ADBA"/>
-          </a:solidFill>
-          <a:ln w="6350">
-            <a:solidFill>
-              <a:srgbClr val="7D8794"/>
-            </a:solidFill>
-            <a:prstDash val="solid"/>
-          </a:ln>
-        </p:spPr>
-      </p:sp>
-      <p:sp>
-        <p:nvSpPr>
-          <p:cNvPr id="55" name="Shape 53"/>
-          <p:cNvSpPr/>
-          <p:nvPr/>
-        </p:nvSpPr>
-        <p:spPr>
-          <a:xfrm>
-            <a:off x="3090672" y="3584448"/>
-            <a:ext cx="109728" cy="109728"/>
-          </a:xfrm>
-          <a:prstGeom prst="ellipse">
-            <a:avLst/>
-          </a:prstGeom>
-          <a:solidFill>
-            <a:srgbClr val="A5ADBA"/>
-          </a:solidFill>
-          <a:ln w="6350">
-            <a:solidFill>
-              <a:srgbClr val="7D8794"/>
-            </a:solidFill>
-            <a:prstDash val="solid"/>
-          </a:ln>
-        </p:spPr>
-      </p:sp>
-      <p:sp>
-        <p:nvSpPr>
-          <p:cNvPr id="56" name="Shape 54"/>
-          <p:cNvSpPr/>
-          <p:nvPr/>
-        </p:nvSpPr>
-        <p:spPr>
-          <a:xfrm>
-            <a:off x="3291840" y="3584448"/>
-            <a:ext cx="109728" cy="109728"/>
-          </a:xfrm>
-          <a:prstGeom prst="ellipse">
-            <a:avLst/>
-          </a:prstGeom>
-          <a:solidFill>
-            <a:srgbClr val="A5ADBA"/>
-          </a:solidFill>
-          <a:ln w="6350">
-            <a:solidFill>
-              <a:srgbClr val="7D8794"/>
-            </a:solidFill>
-            <a:prstDash val="solid"/>
-          </a:ln>
-        </p:spPr>
-      </p:sp>
-      <p:sp>
-        <p:nvSpPr>
-          <p:cNvPr id="57" name="Shape 55"/>
-          <p:cNvSpPr/>
-          <p:nvPr/>
-        </p:nvSpPr>
-        <p:spPr>
-          <a:xfrm>
-            <a:off x="3493008" y="3584448"/>
-            <a:ext cx="109728" cy="109728"/>
-          </a:xfrm>
-          <a:prstGeom prst="ellipse">
-            <a:avLst/>
-          </a:prstGeom>
-          <a:solidFill>
-            <a:srgbClr val="A5ADBA"/>
-          </a:solidFill>
-          <a:ln w="6350">
-            <a:solidFill>
-              <a:srgbClr val="7D8794"/>
-            </a:solidFill>
-            <a:prstDash val="solid"/>
-          </a:ln>
-        </p:spPr>
-      </p:sp>
-      <p:sp>
-        <p:nvSpPr>
-          <p:cNvPr id="58" name="Shape 56"/>
-          <p:cNvSpPr/>
-          <p:nvPr/>
-        </p:nvSpPr>
-        <p:spPr>
-          <a:xfrm>
-            <a:off x="3694176" y="3584448"/>
-            <a:ext cx="109728" cy="109728"/>
-          </a:xfrm>
-          <a:prstGeom prst="ellipse">
-            <a:avLst/>
-          </a:prstGeom>
-          <a:solidFill>
-            <a:srgbClr val="A5ADBA"/>
-          </a:solidFill>
-          <a:ln w="6350">
-            <a:solidFill>
-              <a:srgbClr val="7D8794"/>
-            </a:solidFill>
-            <a:prstDash val="solid"/>
-          </a:ln>
-        </p:spPr>
-      </p:sp>
-      <p:sp>
-        <p:nvSpPr>
-          <p:cNvPr id="59" name="Shape 57"/>
-          <p:cNvSpPr/>
-          <p:nvPr/>
-        </p:nvSpPr>
-        <p:spPr>
-          <a:xfrm>
-            <a:off x="3895344" y="3584448"/>
-            <a:ext cx="109728" cy="109728"/>
-          </a:xfrm>
-          <a:prstGeom prst="ellipse">
-            <a:avLst/>
-          </a:prstGeom>
-          <a:solidFill>
-            <a:srgbClr val="A5ADBA"/>
-          </a:solidFill>
-          <a:ln w="6350">
-            <a:solidFill>
-              <a:srgbClr val="7D8794"/>
-            </a:solidFill>
-            <a:prstDash val="solid"/>
-          </a:ln>
-        </p:spPr>
-      </p:sp>
-      <p:sp>
-        <p:nvSpPr>
-          <p:cNvPr id="60" name="Shape 58"/>
-          <p:cNvSpPr/>
-          <p:nvPr/>
-        </p:nvSpPr>
-        <p:spPr>
-          <a:xfrm>
-            <a:off x="4096512" y="3584448"/>
-            <a:ext cx="109728" cy="109728"/>
-          </a:xfrm>
-          <a:prstGeom prst="ellipse">
-            <a:avLst/>
-          </a:prstGeom>
-          <a:solidFill>
-            <a:srgbClr val="A5ADBA"/>
-          </a:solidFill>
-          <a:ln w="6350">
-            <a:solidFill>
-              <a:srgbClr val="7D8794"/>
-            </a:solidFill>
-            <a:prstDash val="solid"/>
-          </a:ln>
-        </p:spPr>
-      </p:sp>
-      <p:sp>
-        <p:nvSpPr>
-          <p:cNvPr id="61" name="Shape 59"/>
-          <p:cNvSpPr/>
-          <p:nvPr/>
-        </p:nvSpPr>
-        <p:spPr>
-          <a:xfrm>
-            <a:off x="4297680" y="3584448"/>
-            <a:ext cx="109728" cy="109728"/>
-          </a:xfrm>
-          <a:prstGeom prst="ellipse">
-            <a:avLst/>
-          </a:prstGeom>
-          <a:solidFill>
-            <a:srgbClr val="A5ADBA"/>
-          </a:solidFill>
-          <a:ln w="6350">
-            <a:solidFill>
-              <a:srgbClr val="7D8794"/>
-            </a:solidFill>
-            <a:prstDash val="solid"/>
-          </a:ln>
-        </p:spPr>
-      </p:sp>
-      <p:sp>
-        <p:nvSpPr>
-          <p:cNvPr id="62" name="Shape 60"/>
-          <p:cNvSpPr/>
-          <p:nvPr/>
-        </p:nvSpPr>
-        <p:spPr>
-          <a:xfrm>
-            <a:off x="4498848" y="3584448"/>
-            <a:ext cx="109728" cy="109728"/>
-          </a:xfrm>
-          <a:prstGeom prst="ellipse">
-            <a:avLst/>
-          </a:prstGeom>
-          <a:solidFill>
-            <a:srgbClr val="A5ADBA"/>
-          </a:solidFill>
-          <a:ln w="6350">
-            <a:solidFill>
-              <a:srgbClr val="7D8794"/>
-            </a:solidFill>
-            <a:prstDash val="solid"/>
-          </a:ln>
-        </p:spPr>
-      </p:sp>
-      <p:sp>
-        <p:nvSpPr>
-          <p:cNvPr id="63" name="Shape 61"/>
-          <p:cNvSpPr/>
-          <p:nvPr/>
-        </p:nvSpPr>
-        <p:spPr>
-          <a:xfrm>
-            <a:off x="4700016" y="3584448"/>
-            <a:ext cx="109728" cy="109728"/>
-          </a:xfrm>
-          <a:prstGeom prst="ellipse">
-            <a:avLst/>
-          </a:prstGeom>
-          <a:solidFill>
-            <a:srgbClr val="A5ADBA"/>
-          </a:solidFill>
-          <a:ln w="6350">
-            <a:solidFill>
-              <a:srgbClr val="7D8794"/>
-            </a:solidFill>
-            <a:prstDash val="solid"/>
-          </a:ln>
-        </p:spPr>
-      </p:sp>
-      <p:sp>
-        <p:nvSpPr>
-          <p:cNvPr id="64" name="Shape 62"/>
-          <p:cNvSpPr/>
-          <p:nvPr/>
-        </p:nvSpPr>
-        <p:spPr>
-          <a:xfrm>
-            <a:off x="4901184" y="3584448"/>
-            <a:ext cx="109728" cy="109728"/>
-          </a:xfrm>
-          <a:prstGeom prst="ellipse">
-            <a:avLst/>
-          </a:prstGeom>
-          <a:solidFill>
-            <a:srgbClr val="A5ADBA"/>
-          </a:solidFill>
-          <a:ln w="6350">
-            <a:solidFill>
-              <a:srgbClr val="7D8794"/>
-            </a:solidFill>
-            <a:prstDash val="solid"/>
-          </a:ln>
-        </p:spPr>
-      </p:sp>
-      <p:sp>
-        <p:nvSpPr>
-          <p:cNvPr id="65" name="Shape 63"/>
-          <p:cNvSpPr/>
-          <p:nvPr/>
-        </p:nvSpPr>
-        <p:spPr>
-          <a:xfrm>
-            <a:off x="5102352" y="3584448"/>
-            <a:ext cx="109728" cy="109728"/>
-          </a:xfrm>
-          <a:prstGeom prst="ellipse">
-            <a:avLst/>
-          </a:prstGeom>
-          <a:solidFill>
-            <a:srgbClr val="A5ADBA"/>
-          </a:solidFill>
-          <a:ln w="6350">
-            <a:solidFill>
-              <a:srgbClr val="7D8794"/>
-            </a:solidFill>
-            <a:prstDash val="solid"/>
-          </a:ln>
-        </p:spPr>
-      </p:sp>
-      <p:sp>
-        <p:nvSpPr>
-          <p:cNvPr id="66" name="Shape 64"/>
-          <p:cNvSpPr/>
-          <p:nvPr/>
-        </p:nvSpPr>
-        <p:spPr>
-          <a:xfrm>
-            <a:off x="5303520" y="3584448"/>
-            <a:ext cx="109728" cy="109728"/>
-          </a:xfrm>
-          <a:prstGeom prst="ellipse">
-            <a:avLst/>
-          </a:prstGeom>
-          <a:solidFill>
-            <a:srgbClr val="A5ADBA"/>
-          </a:solidFill>
-          <a:ln w="6350">
-            <a:solidFill>
-              <a:srgbClr val="7D8794"/>
-            </a:solidFill>
-            <a:prstDash val="solid"/>
-          </a:ln>
-        </p:spPr>
-      </p:sp>
-      <p:sp>
-        <p:nvSpPr>
-          <p:cNvPr id="67" name="Shape 65"/>
-          <p:cNvSpPr/>
-          <p:nvPr/>
-        </p:nvSpPr>
-        <p:spPr>
-          <a:xfrm>
-            <a:off x="822960" y="3200400"/>
-            <a:ext cx="2286000" cy="182880"/>
-          </a:xfrm>
-          <a:prstGeom prst="rect">
-            <a:avLst/>
-          </a:prstGeom>
-          <a:solidFill>
-            <a:srgbClr val="3A7BC8"/>
-          </a:solidFill>
-          <a:ln w="9525">
-            <a:solidFill>
-              <a:srgbClr val="1F4E8C"/>
-            </a:solidFill>
-            <a:prstDash val="solid"/>
-          </a:ln>
-        </p:spPr>
-      </p:sp>
-      <p:sp>
-        <p:nvSpPr>
-          <p:cNvPr id="68" name="Shape 66"/>
-          <p:cNvSpPr/>
-          <p:nvPr/>
-        </p:nvSpPr>
-        <p:spPr>
-          <a:xfrm>
-            <a:off x="3291840" y="3200400"/>
-            <a:ext cx="2286000" cy="182880"/>
-          </a:xfrm>
-          <a:prstGeom prst="rect">
-            <a:avLst/>
-          </a:prstGeom>
-          <a:solidFill>
-            <a:srgbClr val="3A7BC8"/>
-          </a:solidFill>
-          <a:ln w="9525">
-            <a:solidFill>
-              <a:srgbClr val="1F4E8C"/>
-            </a:solidFill>
-            <a:prstDash val="solid"/>
-          </a:ln>
-        </p:spPr>
-      </p:sp>
-      <p:sp>
-        <p:nvSpPr>
-          <p:cNvPr id="69" name="Shape 67"/>
-          <p:cNvSpPr/>
-          <p:nvPr/>
-        </p:nvSpPr>
-        <p:spPr>
-          <a:xfrm>
-            <a:off x="3008376" y="3300984"/>
-            <a:ext cx="384048" cy="201168"/>
-          </a:xfrm>
-          <a:prstGeom prst="ellipse">
-            <a:avLst/>
-          </a:prstGeom>
-          <a:solidFill>
-            <a:srgbClr val="B5541E"/>
-          </a:solidFill>
-          <a:ln w="9525">
-            <a:solidFill>
-              <a:srgbClr val="7A3510"/>
-            </a:solidFill>
-            <a:prstDash val="solid"/>
-          </a:ln>
-        </p:spPr>
-      </p:sp>
-      <p:sp>
-        <p:nvSpPr>
-          <p:cNvPr id="70" name="Shape 68"/>
-          <p:cNvSpPr/>
-          <p:nvPr/>
-        </p:nvSpPr>
-        <p:spPr>
-          <a:xfrm>
-            <a:off x="3200400" y="2926080"/>
-            <a:ext cx="91" cy="365760"/>
-          </a:xfrm>
-          <a:prstGeom prst="line">
-            <a:avLst/>
-          </a:prstGeom>
-          <a:noFill/>
-          <a:ln w="19050">
-            <a:solidFill>
-              <a:srgbClr val="5B9BD5"/>
-            </a:solidFill>
-            <a:prstDash val="solid"/>
-            <a:tailEnd type="triangle"/>
-          </a:ln>
-        </p:spPr>
-      </p:sp>
-      <p:sp>
-        <p:nvSpPr>
-          <p:cNvPr id="71" name="Text 69"/>
-          <p:cNvSpPr/>
-          <p:nvPr/>
-        </p:nvSpPr>
-        <p:spPr>
-          <a:xfrm>
-            <a:off x="3337560" y="2971800"/>
-            <a:ext cx="1463040" cy="201168"/>
-          </a:xfrm>
-          <a:prstGeom prst="rect">
-            <a:avLst/>
-          </a:prstGeom>
-          <a:noFill/>
-          <a:ln/>
-        </p:spPr>
-        <p:txBody>
-          <a:bodyPr wrap="square" lIns="0" tIns="0" rIns="0" bIns="0" rtlCol="0" anchor="ctr"/>
-          <a:lstStyle/>
-          <a:p>
-            <a:pPr algn="l" indent="0" marL="0">
-              <a:buNone/>
-            </a:pPr>
-            <a:r>
-              <a:rPr lang="en-US" sz="1000" b="1" dirty="0">
-                <a:solidFill>
-                  <a:srgbClr val="7A3510"/>
-                </a:solidFill>
-                <a:latin typeface="Calibri" pitchFamily="34" charset="0"/>
-                <a:ea typeface="Calibri" pitchFamily="34" charset="-122"/>
-                <a:cs typeface="Calibri" pitchFamily="34" charset="-120"/>
-              </a:rPr>
-              <a:t>rust spreads under paint</a:t>
-            </a:r>
-            <a:endParaRPr lang="en-US" sz="1000" dirty="0"/>
-          </a:p>
-        </p:txBody>
-      </p:sp>
-      <p:sp>
-        <p:nvSpPr>
-          <p:cNvPr id="72" name="Shape 70"/>
-          <p:cNvSpPr/>
-          <p:nvPr/>
-        </p:nvSpPr>
-        <p:spPr>
-          <a:xfrm>
-            <a:off x="640080" y="4160520"/>
-            <a:ext cx="1207008" cy="960120"/>
+          <p:cNvPr id="71" name="Shape 69"/>
+          <p:cNvSpPr/>
+          <p:nvPr/>
+        </p:nvSpPr>
+        <p:spPr>
+          <a:xfrm>
+            <a:off x="640080" y="4251960"/>
+            <a:ext cx="1207008" cy="914400"/>
           </a:xfrm>
           <a:prstGeom prst="roundRect">
             <a:avLst>
-              <a:gd name="adj" fmla="val 4762"/>
+              <a:gd name="adj" fmla="val 5000"/>
             </a:avLst>
           </a:prstGeom>
           <a:solidFill>
@@ -48244,13 +48317,13 @@
       </p:sp>
       <p:sp>
         <p:nvSpPr>
-          <p:cNvPr id="73" name="Shape 71"/>
-          <p:cNvSpPr/>
-          <p:nvPr/>
-        </p:nvSpPr>
-        <p:spPr>
-          <a:xfrm>
-            <a:off x="731520" y="4251960"/>
+          <p:cNvPr id="72" name="Shape 70"/>
+          <p:cNvSpPr/>
+          <p:nvPr/>
+        </p:nvSpPr>
+        <p:spPr>
+          <a:xfrm>
+            <a:off x="731520" y="4343400"/>
             <a:ext cx="1024128" cy="128016"/>
           </a:xfrm>
           <a:prstGeom prst="rect">
@@ -48269,14 +48342,53 @@
       </p:sp>
       <p:sp>
         <p:nvSpPr>
+          <p:cNvPr id="73" name="Text 71"/>
+          <p:cNvSpPr/>
+          <p:nvPr/>
+        </p:nvSpPr>
+        <p:spPr>
+          <a:xfrm>
+            <a:off x="667512" y="4498848"/>
+            <a:ext cx="1152144" cy="237744"/>
+          </a:xfrm>
+          <a:prstGeom prst="rect">
+            <a:avLst/>
+          </a:prstGeom>
+          <a:noFill/>
+          <a:ln/>
+        </p:spPr>
+        <p:txBody>
+          <a:bodyPr wrap="square" lIns="0" tIns="0" rIns="0" bIns="0" rtlCol="0" anchor="ctr"/>
+          <a:lstStyle/>
+          <a:p>
+            <a:pPr algn="ctr" indent="0" marL="0">
+              <a:buNone/>
+            </a:pPr>
+            <a:r>
+              <a:rPr lang="en-US" sz="1050" b="1" dirty="0">
+                <a:solidFill>
+                  <a:srgbClr val="262B3A"/>
+                </a:solidFill>
+                <a:latin typeface="Calibri" pitchFamily="34" charset="0"/>
+                <a:ea typeface="Calibri" pitchFamily="34" charset="-122"/>
+                <a:cs typeface="Calibri" pitchFamily="34" charset="-120"/>
+              </a:rPr>
+              <a:t>Paint</a:t>
+            </a:r>
+            <a:endParaRPr lang="en-US" sz="1050" dirty="0"/>
+          </a:p>
+        </p:txBody>
+      </p:sp>
+      <p:sp>
+        <p:nvSpPr>
           <p:cNvPr id="74" name="Text 72"/>
           <p:cNvSpPr/>
           <p:nvPr/>
         </p:nvSpPr>
         <p:spPr>
           <a:xfrm>
-            <a:off x="667512" y="4407408"/>
-            <a:ext cx="1152144" cy="237744"/>
+            <a:off x="667512" y="4736592"/>
+            <a:ext cx="1152144" cy="411480"/>
           </a:xfrm>
           <a:prstGeom prst="rect">
             <a:avLst/>
@@ -48285,52 +48397,13 @@
           <a:ln/>
         </p:spPr>
         <p:txBody>
-          <a:bodyPr wrap="square" lIns="0" tIns="0" rIns="0" bIns="0" rtlCol="0" anchor="ctr"/>
+          <a:bodyPr wrap="square" lIns="0" tIns="0" rIns="0" bIns="0" rtlCol="0" anchor="t"/>
           <a:lstStyle/>
           <a:p>
             <a:pPr algn="ctr" indent="0" marL="0">
               <a:buNone/>
             </a:pPr>
             <a:r>
-              <a:rPr lang="en-US" sz="1050" b="1" dirty="0">
-                <a:solidFill>
-                  <a:srgbClr val="262B3A"/>
-                </a:solidFill>
-                <a:latin typeface="Calibri" pitchFamily="34" charset="0"/>
-                <a:ea typeface="Calibri" pitchFamily="34" charset="-122"/>
-                <a:cs typeface="Calibri" pitchFamily="34" charset="-120"/>
-              </a:rPr>
-              <a:t>Paint</a:t>
-            </a:r>
-            <a:endParaRPr lang="en-US" sz="1050" dirty="0"/>
-          </a:p>
-        </p:txBody>
-      </p:sp>
-      <p:sp>
-        <p:nvSpPr>
-          <p:cNvPr id="75" name="Text 73"/>
-          <p:cNvSpPr/>
-          <p:nvPr/>
-        </p:nvSpPr>
-        <p:spPr>
-          <a:xfrm>
-            <a:off x="667512" y="4645152"/>
-            <a:ext cx="1152144" cy="411480"/>
-          </a:xfrm>
-          <a:prstGeom prst="rect">
-            <a:avLst/>
-          </a:prstGeom>
-          <a:noFill/>
-          <a:ln/>
-        </p:spPr>
-        <p:txBody>
-          <a:bodyPr wrap="square" lIns="0" tIns="0" rIns="0" bIns="0" rtlCol="0" anchor="t"/>
-          <a:lstStyle/>
-          <a:p>
-            <a:pPr algn="ctr" indent="0" marL="0">
-              <a:buNone/>
-            </a:pPr>
-            <a:r>
               <a:rPr lang="en-US" sz="1000" i="1" dirty="0">
                 <a:solidFill>
                   <a:srgbClr val="6B7385"/>
@@ -48347,18 +48420,18 @@
       </p:sp>
       <p:sp>
         <p:nvSpPr>
-          <p:cNvPr id="76" name="Shape 74"/>
-          <p:cNvSpPr/>
-          <p:nvPr/>
-        </p:nvSpPr>
-        <p:spPr>
-          <a:xfrm>
-            <a:off x="1938528" y="4160520"/>
-            <a:ext cx="1207008" cy="960120"/>
+          <p:cNvPr id="75" name="Shape 73"/>
+          <p:cNvSpPr/>
+          <p:nvPr/>
+        </p:nvSpPr>
+        <p:spPr>
+          <a:xfrm>
+            <a:off x="1938528" y="4251960"/>
+            <a:ext cx="1207008" cy="914400"/>
           </a:xfrm>
           <a:prstGeom prst="roundRect">
             <a:avLst>
-              <a:gd name="adj" fmla="val 4762"/>
+              <a:gd name="adj" fmla="val 5000"/>
             </a:avLst>
           </a:prstGeom>
           <a:solidFill>
@@ -48374,13 +48447,13 @@
       </p:sp>
       <p:sp>
         <p:nvSpPr>
-          <p:cNvPr id="77" name="Shape 75"/>
-          <p:cNvSpPr/>
-          <p:nvPr/>
-        </p:nvSpPr>
-        <p:spPr>
-          <a:xfrm>
-            <a:off x="2029968" y="4251960"/>
+          <p:cNvPr id="76" name="Shape 74"/>
+          <p:cNvSpPr/>
+          <p:nvPr/>
+        </p:nvSpPr>
+        <p:spPr>
+          <a:xfrm>
+            <a:off x="2029968" y="4343400"/>
             <a:ext cx="1024128" cy="128016"/>
           </a:xfrm>
           <a:prstGeom prst="rect">
@@ -48399,14 +48472,53 @@
       </p:sp>
       <p:sp>
         <p:nvSpPr>
+          <p:cNvPr id="77" name="Text 75"/>
+          <p:cNvSpPr/>
+          <p:nvPr/>
+        </p:nvSpPr>
+        <p:spPr>
+          <a:xfrm>
+            <a:off x="1965960" y="4498848"/>
+            <a:ext cx="1152144" cy="237744"/>
+          </a:xfrm>
+          <a:prstGeom prst="rect">
+            <a:avLst/>
+          </a:prstGeom>
+          <a:noFill/>
+          <a:ln/>
+        </p:spPr>
+        <p:txBody>
+          <a:bodyPr wrap="square" lIns="0" tIns="0" rIns="0" bIns="0" rtlCol="0" anchor="ctr"/>
+          <a:lstStyle/>
+          <a:p>
+            <a:pPr algn="ctr" indent="0" marL="0">
+              <a:buNone/>
+            </a:pPr>
+            <a:r>
+              <a:rPr lang="en-US" sz="1050" b="1" dirty="0">
+                <a:solidFill>
+                  <a:srgbClr val="262B3A"/>
+                </a:solidFill>
+                <a:latin typeface="Calibri" pitchFamily="34" charset="0"/>
+                <a:ea typeface="Calibri" pitchFamily="34" charset="-122"/>
+                <a:cs typeface="Calibri" pitchFamily="34" charset="-120"/>
+              </a:rPr>
+              <a:t>Oil / grease</a:t>
+            </a:r>
+            <a:endParaRPr lang="en-US" sz="1050" dirty="0"/>
+          </a:p>
+        </p:txBody>
+      </p:sp>
+      <p:sp>
+        <p:nvSpPr>
           <p:cNvPr id="78" name="Text 76"/>
           <p:cNvSpPr/>
           <p:nvPr/>
         </p:nvSpPr>
         <p:spPr>
           <a:xfrm>
-            <a:off x="1965960" y="4407408"/>
-            <a:ext cx="1152144" cy="237744"/>
+            <a:off x="1965960" y="4736592"/>
+            <a:ext cx="1152144" cy="411480"/>
           </a:xfrm>
           <a:prstGeom prst="rect">
             <a:avLst/>
@@ -48415,52 +48527,13 @@
           <a:ln/>
         </p:spPr>
         <p:txBody>
-          <a:bodyPr wrap="square" lIns="0" tIns="0" rIns="0" bIns="0" rtlCol="0" anchor="ctr"/>
+          <a:bodyPr wrap="square" lIns="0" tIns="0" rIns="0" bIns="0" rtlCol="0" anchor="t"/>
           <a:lstStyle/>
           <a:p>
             <a:pPr algn="ctr" indent="0" marL="0">
               <a:buNone/>
             </a:pPr>
             <a:r>
-              <a:rPr lang="en-US" sz="1050" b="1" dirty="0">
-                <a:solidFill>
-                  <a:srgbClr val="262B3A"/>
-                </a:solidFill>
-                <a:latin typeface="Calibri" pitchFamily="34" charset="0"/>
-                <a:ea typeface="Calibri" pitchFamily="34" charset="-122"/>
-                <a:cs typeface="Calibri" pitchFamily="34" charset="-120"/>
-              </a:rPr>
-              <a:t>Oil / grease</a:t>
-            </a:r>
-            <a:endParaRPr lang="en-US" sz="1050" dirty="0"/>
-          </a:p>
-        </p:txBody>
-      </p:sp>
-      <p:sp>
-        <p:nvSpPr>
-          <p:cNvPr id="79" name="Text 77"/>
-          <p:cNvSpPr/>
-          <p:nvPr/>
-        </p:nvSpPr>
-        <p:spPr>
-          <a:xfrm>
-            <a:off x="1965960" y="4645152"/>
-            <a:ext cx="1152144" cy="411480"/>
-          </a:xfrm>
-          <a:prstGeom prst="rect">
-            <a:avLst/>
-          </a:prstGeom>
-          <a:noFill/>
-          <a:ln/>
-        </p:spPr>
-        <p:txBody>
-          <a:bodyPr wrap="square" lIns="0" tIns="0" rIns="0" bIns="0" rtlCol="0" anchor="t"/>
-          <a:lstStyle/>
-          <a:p>
-            <a:pPr algn="ctr" indent="0" marL="0">
-              <a:buNone/>
-            </a:pPr>
-            <a:r>
               <a:rPr lang="en-US" sz="1000" i="1" dirty="0">
                 <a:solidFill>
                   <a:srgbClr val="6B7385"/>
@@ -48477,18 +48550,18 @@
       </p:sp>
       <p:sp>
         <p:nvSpPr>
-          <p:cNvPr id="80" name="Shape 78"/>
-          <p:cNvSpPr/>
-          <p:nvPr/>
-        </p:nvSpPr>
-        <p:spPr>
-          <a:xfrm>
-            <a:off x="3236976" y="4160520"/>
-            <a:ext cx="1207008" cy="960120"/>
+          <p:cNvPr id="79" name="Shape 77"/>
+          <p:cNvSpPr/>
+          <p:nvPr/>
+        </p:nvSpPr>
+        <p:spPr>
+          <a:xfrm>
+            <a:off x="3236976" y="4251960"/>
+            <a:ext cx="1207008" cy="914400"/>
           </a:xfrm>
           <a:prstGeom prst="roundRect">
             <a:avLst>
-              <a:gd name="adj" fmla="val 4762"/>
+              <a:gd name="adj" fmla="val 5000"/>
             </a:avLst>
           </a:prstGeom>
           <a:solidFill>
@@ -48504,13 +48577,13 @@
       </p:sp>
       <p:sp>
         <p:nvSpPr>
-          <p:cNvPr id="81" name="Shape 79"/>
-          <p:cNvSpPr/>
-          <p:nvPr/>
-        </p:nvSpPr>
-        <p:spPr>
-          <a:xfrm>
-            <a:off x="3328416" y="4251960"/>
+          <p:cNvPr id="80" name="Shape 78"/>
+          <p:cNvSpPr/>
+          <p:nvPr/>
+        </p:nvSpPr>
+        <p:spPr>
+          <a:xfrm>
+            <a:off x="3328416" y="4343400"/>
             <a:ext cx="1024128" cy="128016"/>
           </a:xfrm>
           <a:prstGeom prst="rect">
@@ -48529,14 +48602,53 @@
       </p:sp>
       <p:sp>
         <p:nvSpPr>
+          <p:cNvPr id="81" name="Text 79"/>
+          <p:cNvSpPr/>
+          <p:nvPr/>
+        </p:nvSpPr>
+        <p:spPr>
+          <a:xfrm>
+            <a:off x="3264408" y="4498848"/>
+            <a:ext cx="1152144" cy="237744"/>
+          </a:xfrm>
+          <a:prstGeom prst="rect">
+            <a:avLst/>
+          </a:prstGeom>
+          <a:noFill/>
+          <a:ln/>
+        </p:spPr>
+        <p:txBody>
+          <a:bodyPr wrap="square" lIns="0" tIns="0" rIns="0" bIns="0" rtlCol="0" anchor="ctr"/>
+          <a:lstStyle/>
+          <a:p>
+            <a:pPr algn="ctr" indent="0" marL="0">
+              <a:buNone/>
+            </a:pPr>
+            <a:r>
+              <a:rPr lang="en-US" sz="1050" b="1" dirty="0">
+                <a:solidFill>
+                  <a:srgbClr val="262B3A"/>
+                </a:solidFill>
+                <a:latin typeface="Calibri" pitchFamily="34" charset="0"/>
+                <a:ea typeface="Calibri" pitchFamily="34" charset="-122"/>
+                <a:cs typeface="Calibri" pitchFamily="34" charset="-120"/>
+              </a:rPr>
+              <a:t>Plastic</a:t>
+            </a:r>
+            <a:endParaRPr lang="en-US" sz="1050" dirty="0"/>
+          </a:p>
+        </p:txBody>
+      </p:sp>
+      <p:sp>
+        <p:nvSpPr>
           <p:cNvPr id="82" name="Text 80"/>
           <p:cNvSpPr/>
           <p:nvPr/>
         </p:nvSpPr>
         <p:spPr>
           <a:xfrm>
-            <a:off x="3264408" y="4407408"/>
-            <a:ext cx="1152144" cy="237744"/>
+            <a:off x="3264408" y="4736592"/>
+            <a:ext cx="1152144" cy="411480"/>
           </a:xfrm>
           <a:prstGeom prst="rect">
             <a:avLst/>
@@ -48545,52 +48657,13 @@
           <a:ln/>
         </p:spPr>
         <p:txBody>
-          <a:bodyPr wrap="square" lIns="0" tIns="0" rIns="0" bIns="0" rtlCol="0" anchor="ctr"/>
+          <a:bodyPr wrap="square" lIns="0" tIns="0" rIns="0" bIns="0" rtlCol="0" anchor="t"/>
           <a:lstStyle/>
           <a:p>
             <a:pPr algn="ctr" indent="0" marL="0">
               <a:buNone/>
             </a:pPr>
             <a:r>
-              <a:rPr lang="en-US" sz="1050" b="1" dirty="0">
-                <a:solidFill>
-                  <a:srgbClr val="262B3A"/>
-                </a:solidFill>
-                <a:latin typeface="Calibri" pitchFamily="34" charset="0"/>
-                <a:ea typeface="Calibri" pitchFamily="34" charset="-122"/>
-                <a:cs typeface="Calibri" pitchFamily="34" charset="-120"/>
-              </a:rPr>
-              <a:t>Plastic</a:t>
-            </a:r>
-            <a:endParaRPr lang="en-US" sz="1050" dirty="0"/>
-          </a:p>
-        </p:txBody>
-      </p:sp>
-      <p:sp>
-        <p:nvSpPr>
-          <p:cNvPr id="83" name="Text 81"/>
-          <p:cNvSpPr/>
-          <p:nvPr/>
-        </p:nvSpPr>
-        <p:spPr>
-          <a:xfrm>
-            <a:off x="3264408" y="4645152"/>
-            <a:ext cx="1152144" cy="411480"/>
-          </a:xfrm>
-          <a:prstGeom prst="rect">
-            <a:avLst/>
-          </a:prstGeom>
-          <a:noFill/>
-          <a:ln/>
-        </p:spPr>
-        <p:txBody>
-          <a:bodyPr wrap="square" lIns="0" tIns="0" rIns="0" bIns="0" rtlCol="0" anchor="t"/>
-          <a:lstStyle/>
-          <a:p>
-            <a:pPr algn="ctr" indent="0" marL="0">
-              <a:buNone/>
-            </a:pPr>
-            <a:r>
               <a:rPr lang="en-US" sz="1000" i="1" dirty="0">
                 <a:solidFill>
                   <a:srgbClr val="6B7385"/>
@@ -48607,18 +48680,18 @@
       </p:sp>
       <p:sp>
         <p:nvSpPr>
-          <p:cNvPr id="84" name="Shape 82"/>
-          <p:cNvSpPr/>
-          <p:nvPr/>
-        </p:nvSpPr>
-        <p:spPr>
-          <a:xfrm>
-            <a:off x="4535424" y="4160520"/>
-            <a:ext cx="1207008" cy="960120"/>
+          <p:cNvPr id="83" name="Shape 81"/>
+          <p:cNvSpPr/>
+          <p:nvPr/>
+        </p:nvSpPr>
+        <p:spPr>
+          <a:xfrm>
+            <a:off x="4535424" y="4251960"/>
+            <a:ext cx="1207008" cy="914400"/>
           </a:xfrm>
           <a:prstGeom prst="roundRect">
             <a:avLst>
-              <a:gd name="adj" fmla="val 4762"/>
+              <a:gd name="adj" fmla="val 5000"/>
             </a:avLst>
           </a:prstGeom>
           <a:solidFill>
@@ -48634,13 +48707,13 @@
       </p:sp>
       <p:sp>
         <p:nvSpPr>
-          <p:cNvPr id="85" name="Shape 83"/>
-          <p:cNvSpPr/>
-          <p:nvPr/>
-        </p:nvSpPr>
-        <p:spPr>
-          <a:xfrm>
-            <a:off x="4626864" y="4251960"/>
+          <p:cNvPr id="84" name="Shape 82"/>
+          <p:cNvSpPr/>
+          <p:nvPr/>
+        </p:nvSpPr>
+        <p:spPr>
+          <a:xfrm>
+            <a:off x="4626864" y="4343400"/>
             <a:ext cx="1024128" cy="128016"/>
           </a:xfrm>
           <a:prstGeom prst="rect">
@@ -48659,14 +48732,53 @@
       </p:sp>
       <p:sp>
         <p:nvSpPr>
+          <p:cNvPr id="85" name="Text 83"/>
+          <p:cNvSpPr/>
+          <p:nvPr/>
+        </p:nvSpPr>
+        <p:spPr>
+          <a:xfrm>
+            <a:off x="4562856" y="4498848"/>
+            <a:ext cx="1152144" cy="237744"/>
+          </a:xfrm>
+          <a:prstGeom prst="rect">
+            <a:avLst/>
+          </a:prstGeom>
+          <a:noFill/>
+          <a:ln/>
+        </p:spPr>
+        <p:txBody>
+          <a:bodyPr wrap="square" lIns="0" tIns="0" rIns="0" bIns="0" rtlCol="0" anchor="ctr"/>
+          <a:lstStyle/>
+          <a:p>
+            <a:pPr algn="ctr" indent="0" marL="0">
+              <a:buNone/>
+            </a:pPr>
+            <a:r>
+              <a:rPr lang="en-US" sz="1050" b="1" dirty="0">
+                <a:solidFill>
+                  <a:srgbClr val="262B3A"/>
+                </a:solidFill>
+                <a:latin typeface="Calibri" pitchFamily="34" charset="0"/>
+                <a:ea typeface="Calibri" pitchFamily="34" charset="-122"/>
+                <a:cs typeface="Calibri" pitchFamily="34" charset="-120"/>
+              </a:rPr>
+              <a:t>Tin plating</a:t>
+            </a:r>
+            <a:endParaRPr lang="en-US" sz="1050" dirty="0"/>
+          </a:p>
+        </p:txBody>
+      </p:sp>
+      <p:sp>
+        <p:nvSpPr>
           <p:cNvPr id="86" name="Text 84"/>
           <p:cNvSpPr/>
           <p:nvPr/>
         </p:nvSpPr>
         <p:spPr>
           <a:xfrm>
-            <a:off x="4562856" y="4407408"/>
-            <a:ext cx="1152144" cy="237744"/>
+            <a:off x="4562856" y="4736592"/>
+            <a:ext cx="1152144" cy="411480"/>
           </a:xfrm>
           <a:prstGeom prst="rect">
             <a:avLst/>
@@ -48675,52 +48787,13 @@
           <a:ln/>
         </p:spPr>
         <p:txBody>
-          <a:bodyPr wrap="square" lIns="0" tIns="0" rIns="0" bIns="0" rtlCol="0" anchor="ctr"/>
+          <a:bodyPr wrap="square" lIns="0" tIns="0" rIns="0" bIns="0" rtlCol="0" anchor="t"/>
           <a:lstStyle/>
           <a:p>
             <a:pPr algn="ctr" indent="0" marL="0">
               <a:buNone/>
             </a:pPr>
             <a:r>
-              <a:rPr lang="en-US" sz="1050" b="1" dirty="0">
-                <a:solidFill>
-                  <a:srgbClr val="262B3A"/>
-                </a:solidFill>
-                <a:latin typeface="Calibri" pitchFamily="34" charset="0"/>
-                <a:ea typeface="Calibri" pitchFamily="34" charset="-122"/>
-                <a:cs typeface="Calibri" pitchFamily="34" charset="-120"/>
-              </a:rPr>
-              <a:t>Tin plating</a:t>
-            </a:r>
-            <a:endParaRPr lang="en-US" sz="1050" dirty="0"/>
-          </a:p>
-        </p:txBody>
-      </p:sp>
-      <p:sp>
-        <p:nvSpPr>
-          <p:cNvPr id="87" name="Text 85"/>
-          <p:cNvSpPr/>
-          <p:nvPr/>
-        </p:nvSpPr>
-        <p:spPr>
-          <a:xfrm>
-            <a:off x="4562856" y="4645152"/>
-            <a:ext cx="1152144" cy="411480"/>
-          </a:xfrm>
-          <a:prstGeom prst="rect">
-            <a:avLst/>
-          </a:prstGeom>
-          <a:noFill/>
-          <a:ln/>
-        </p:spPr>
-        <p:txBody>
-          <a:bodyPr wrap="square" lIns="0" tIns="0" rIns="0" bIns="0" rtlCol="0" anchor="t"/>
-          <a:lstStyle/>
-          <a:p>
-            <a:pPr algn="ctr" indent="0" marL="0">
-              <a:buNone/>
-            </a:pPr>
-            <a:r>
               <a:rPr lang="en-US" sz="1000" i="1" dirty="0">
                 <a:solidFill>
                   <a:srgbClr val="6B7385"/>
@@ -48737,7 +48810,7 @@
       </p:sp>
       <p:sp>
         <p:nvSpPr>
-          <p:cNvPr id="88" name="Shape 86"/>
+          <p:cNvPr id="87" name="Shape 85"/>
           <p:cNvSpPr/>
           <p:nvPr/>
         </p:nvSpPr>
@@ -48764,7 +48837,7 @@
       </p:sp>
       <p:sp>
         <p:nvSpPr>
-          <p:cNvPr id="89" name="Text 87"/>
+          <p:cNvPr id="88" name="Text 86"/>
           <p:cNvSpPr/>
           <p:nvPr/>
         </p:nvSpPr>
@@ -48803,7 +48876,7 @@
       </p:sp>
       <p:sp>
         <p:nvSpPr>
-          <p:cNvPr id="90" name="Text 88"/>
+          <p:cNvPr id="89" name="Text 87"/>
           <p:cNvSpPr/>
           <p:nvPr/>
         </p:nvSpPr>
@@ -49150,7 +49223,7 @@
       </p:sp>
       <p:sp>
         <p:nvSpPr>
-          <p:cNvPr id="91" name="Shape 89"/>
+          <p:cNvPr id="90" name="Shape 88"/>
           <p:cNvSpPr/>
           <p:nvPr/>
         </p:nvSpPr>
@@ -49177,7 +49250,7 @@
       </p:sp>
       <p:sp>
         <p:nvSpPr>
-          <p:cNvPr id="92" name="Text 90"/>
+          <p:cNvPr id="91" name="Text 89"/>
           <p:cNvSpPr/>
           <p:nvPr/>
         </p:nvSpPr>
@@ -49216,7 +49289,7 @@
       </p:sp>
       <p:sp>
         <p:nvSpPr>
-          <p:cNvPr id="93" name="Text 91"/>
+          <p:cNvPr id="92" name="Text 90"/>
           <p:cNvSpPr/>
           <p:nvPr/>
         </p:nvSpPr>
@@ -49339,7 +49412,7 @@
       </p:sp>
       <p:sp>
         <p:nvSpPr>
-          <p:cNvPr id="94" name="Shape 92"/>
+          <p:cNvPr id="93" name="Shape 91"/>
           <p:cNvSpPr/>
           <p:nvPr/>
         </p:nvSpPr>
@@ -49364,7 +49437,7 @@
       </p:sp>
       <p:sp>
         <p:nvSpPr>
-          <p:cNvPr id="95" name="Shape 93"/>
+          <p:cNvPr id="94" name="Shape 92"/>
           <p:cNvSpPr/>
           <p:nvPr/>
         </p:nvSpPr>
@@ -49389,7 +49462,7 @@
       </p:sp>
       <p:sp>
         <p:nvSpPr>
-          <p:cNvPr id="96" name="Text 94"/>
+          <p:cNvPr id="95" name="Text 93"/>
           <p:cNvSpPr/>
           <p:nvPr/>
         </p:nvSpPr>
@@ -49865,7 +49938,7 @@
         </p:nvSpPr>
         <p:spPr>
           <a:xfrm>
-            <a:off x="822960" y="1874520"/>
+            <a:off x="822960" y="2103120"/>
             <a:ext cx="3291840" cy="502920"/>
           </a:xfrm>
           <a:prstGeom prst="rect">
@@ -49890,7 +49963,7 @@
         </p:nvSpPr>
         <p:spPr>
           <a:xfrm>
-            <a:off x="877824" y="2075688"/>
+            <a:off x="877824" y="2304288"/>
             <a:ext cx="109728" cy="109728"/>
           </a:xfrm>
           <a:prstGeom prst="ellipse">
@@ -49915,7 +49988,7 @@
         </p:nvSpPr>
         <p:spPr>
           <a:xfrm>
-            <a:off x="1078992" y="2075688"/>
+            <a:off x="1078992" y="2304288"/>
             <a:ext cx="109728" cy="109728"/>
           </a:xfrm>
           <a:prstGeom prst="ellipse">
@@ -49940,7 +50013,7 @@
         </p:nvSpPr>
         <p:spPr>
           <a:xfrm>
-            <a:off x="1280160" y="2075688"/>
+            <a:off x="1280160" y="2304288"/>
             <a:ext cx="109728" cy="109728"/>
           </a:xfrm>
           <a:prstGeom prst="ellipse">
@@ -49965,7 +50038,7 @@
         </p:nvSpPr>
         <p:spPr>
           <a:xfrm>
-            <a:off x="1481328" y="2075688"/>
+            <a:off x="1481328" y="2304288"/>
             <a:ext cx="109728" cy="109728"/>
           </a:xfrm>
           <a:prstGeom prst="ellipse">
@@ -49990,7 +50063,7 @@
         </p:nvSpPr>
         <p:spPr>
           <a:xfrm>
-            <a:off x="1682496" y="2075688"/>
+            <a:off x="1682496" y="2304288"/>
             <a:ext cx="109728" cy="109728"/>
           </a:xfrm>
           <a:prstGeom prst="ellipse">
@@ -50015,7 +50088,7 @@
         </p:nvSpPr>
         <p:spPr>
           <a:xfrm>
-            <a:off x="1883664" y="2075688"/>
+            <a:off x="1883664" y="2304288"/>
             <a:ext cx="109728" cy="109728"/>
           </a:xfrm>
           <a:prstGeom prst="ellipse">
@@ -50040,7 +50113,7 @@
         </p:nvSpPr>
         <p:spPr>
           <a:xfrm>
-            <a:off x="2084832" y="2075688"/>
+            <a:off x="2084832" y="2304288"/>
             <a:ext cx="109728" cy="109728"/>
           </a:xfrm>
           <a:prstGeom prst="ellipse">
@@ -50065,7 +50138,7 @@
         </p:nvSpPr>
         <p:spPr>
           <a:xfrm>
-            <a:off x="2286000" y="2075688"/>
+            <a:off x="2286000" y="2304288"/>
             <a:ext cx="109728" cy="109728"/>
           </a:xfrm>
           <a:prstGeom prst="ellipse">
@@ -50090,7 +50163,7 @@
         </p:nvSpPr>
         <p:spPr>
           <a:xfrm>
-            <a:off x="2487168" y="2075688"/>
+            <a:off x="2487168" y="2304288"/>
             <a:ext cx="109728" cy="109728"/>
           </a:xfrm>
           <a:prstGeom prst="ellipse">
@@ -50115,7 +50188,7 @@
         </p:nvSpPr>
         <p:spPr>
           <a:xfrm>
-            <a:off x="2688336" y="2075688"/>
+            <a:off x="2688336" y="2304288"/>
             <a:ext cx="109728" cy="109728"/>
           </a:xfrm>
           <a:prstGeom prst="ellipse">
@@ -50140,7 +50213,7 @@
         </p:nvSpPr>
         <p:spPr>
           <a:xfrm>
-            <a:off x="2889504" y="2075688"/>
+            <a:off x="2889504" y="2304288"/>
             <a:ext cx="109728" cy="109728"/>
           </a:xfrm>
           <a:prstGeom prst="ellipse">
@@ -50165,7 +50238,7 @@
         </p:nvSpPr>
         <p:spPr>
           <a:xfrm>
-            <a:off x="3090672" y="2075688"/>
+            <a:off x="3090672" y="2304288"/>
             <a:ext cx="109728" cy="109728"/>
           </a:xfrm>
           <a:prstGeom prst="ellipse">
@@ -50190,7 +50263,7 @@
         </p:nvSpPr>
         <p:spPr>
           <a:xfrm>
-            <a:off x="3291840" y="2075688"/>
+            <a:off x="3291840" y="2304288"/>
             <a:ext cx="109728" cy="109728"/>
           </a:xfrm>
           <a:prstGeom prst="ellipse">
@@ -50215,7 +50288,7 @@
         </p:nvSpPr>
         <p:spPr>
           <a:xfrm>
-            <a:off x="3493008" y="2075688"/>
+            <a:off x="3493008" y="2304288"/>
             <a:ext cx="109728" cy="109728"/>
           </a:xfrm>
           <a:prstGeom prst="ellipse">
@@ -50240,7 +50313,7 @@
         </p:nvSpPr>
         <p:spPr>
           <a:xfrm>
-            <a:off x="3694176" y="2075688"/>
+            <a:off x="3694176" y="2304288"/>
             <a:ext cx="109728" cy="109728"/>
           </a:xfrm>
           <a:prstGeom prst="ellipse">
@@ -50265,7 +50338,7 @@
         </p:nvSpPr>
         <p:spPr>
           <a:xfrm>
-            <a:off x="3895344" y="2075688"/>
+            <a:off x="3895344" y="2304288"/>
             <a:ext cx="109728" cy="109728"/>
           </a:xfrm>
           <a:prstGeom prst="ellipse">
@@ -50290,7 +50363,7 @@
         </p:nvSpPr>
         <p:spPr>
           <a:xfrm>
-            <a:off x="822960" y="1691640"/>
+            <a:off x="822960" y="1920240"/>
             <a:ext cx="1554480" cy="182880"/>
           </a:xfrm>
           <a:prstGeom prst="rect">
@@ -50315,7 +50388,7 @@
         </p:nvSpPr>
         <p:spPr>
           <a:xfrm>
-            <a:off x="2560320" y="1691640"/>
+            <a:off x="2560320" y="1920240"/>
             <a:ext cx="1554480" cy="182880"/>
           </a:xfrm>
           <a:prstGeom prst="rect">
@@ -50340,8 +50413,8 @@
         </p:nvSpPr>
         <p:spPr>
           <a:xfrm>
-            <a:off x="822960" y="1463040"/>
-            <a:ext cx="822960" cy="201168"/>
+            <a:off x="3017520" y="1664208"/>
+            <a:ext cx="1097280" cy="201168"/>
           </a:xfrm>
           <a:prstGeom prst="rect">
             <a:avLst/>
@@ -50353,19 +50426,193 @@
           <a:bodyPr wrap="square" lIns="0" tIns="0" rIns="0" bIns="0" rtlCol="0" anchor="ctr"/>
           <a:lstStyle/>
           <a:p>
+            <a:pPr algn="r" indent="0" marL="0">
+              <a:buNone/>
+            </a:pPr>
+            <a:r>
+              <a:rPr lang="en-US" sz="1000" b="1" dirty="0">
+                <a:solidFill>
+                  <a:srgbClr val="7D8794"/>
+                </a:solidFill>
+                <a:latin typeface="Calibri" pitchFamily="34" charset="0"/>
+                <a:ea typeface="Calibri" pitchFamily="34" charset="-122"/>
+                <a:cs typeface="Calibri" pitchFamily="34" charset="-120"/>
+              </a:rPr>
+              <a:t>zinc layer</a:t>
+            </a:r>
+            <a:endParaRPr lang="en-US" sz="1000" dirty="0"/>
+          </a:p>
+        </p:txBody>
+      </p:sp>
+      <p:sp>
+        <p:nvSpPr>
+          <p:cNvPr id="31" name="Shape 29"/>
+          <p:cNvSpPr/>
+          <p:nvPr/>
+        </p:nvSpPr>
+        <p:spPr>
+          <a:xfrm>
+            <a:off x="2468880" y="1627632"/>
+            <a:ext cx="91" cy="365760"/>
+          </a:xfrm>
+          <a:prstGeom prst="line">
+            <a:avLst/>
+          </a:prstGeom>
+          <a:noFill/>
+          <a:ln w="19050">
+            <a:solidFill>
+              <a:srgbClr val="5B9BD5"/>
+            </a:solidFill>
+            <a:prstDash val="solid"/>
+            <a:tailEnd type="triangle"/>
+          </a:ln>
+        </p:spPr>
+      </p:sp>
+      <p:sp>
+        <p:nvSpPr>
+          <p:cNvPr id="32" name="Text 30"/>
+          <p:cNvSpPr/>
+          <p:nvPr/>
+        </p:nvSpPr>
+        <p:spPr>
+          <a:xfrm>
+            <a:off x="1188720" y="1664208"/>
+            <a:ext cx="1188720" cy="201168"/>
+          </a:xfrm>
+          <a:prstGeom prst="rect">
+            <a:avLst/>
+          </a:prstGeom>
+          <a:noFill/>
+          <a:ln/>
+        </p:spPr>
+        <p:txBody>
+          <a:bodyPr wrap="square" lIns="0" tIns="0" rIns="0" bIns="0" rtlCol="0" anchor="ctr"/>
+          <a:lstStyle/>
+          <a:p>
+            <a:pPr algn="r" indent="0" marL="0">
+              <a:buNone/>
+            </a:pPr>
+            <a:r>
+              <a:rPr lang="en-US" sz="1000" i="1" dirty="0">
+                <a:solidFill>
+                  <a:srgbClr val="5B9BD5"/>
+                </a:solidFill>
+                <a:latin typeface="Calibri" pitchFamily="34" charset="0"/>
+                <a:ea typeface="Calibri" pitchFamily="34" charset="-122"/>
+                <a:cs typeface="Calibri" pitchFamily="34" charset="-120"/>
+              </a:rPr>
+              <a:t>O₂ and H₂O</a:t>
+            </a:r>
+            <a:endParaRPr lang="en-US" sz="1000" dirty="0"/>
+          </a:p>
+        </p:txBody>
+      </p:sp>
+      <p:sp>
+        <p:nvSpPr>
+          <p:cNvPr id="33" name="Shape 31"/>
+          <p:cNvSpPr/>
+          <p:nvPr/>
+        </p:nvSpPr>
+        <p:spPr>
+          <a:xfrm>
+            <a:off x="2221992" y="1856232"/>
+            <a:ext cx="128016" cy="128016"/>
+          </a:xfrm>
+          <a:prstGeom prst="ellipse">
+            <a:avLst/>
+          </a:prstGeom>
+          <a:solidFill>
+            <a:srgbClr val="F4F4F4"/>
+          </a:solidFill>
+          <a:ln w="9525">
+            <a:solidFill>
+              <a:srgbClr val="9AA3B0"/>
+            </a:solidFill>
+            <a:prstDash val="solid"/>
+          </a:ln>
+        </p:spPr>
+      </p:sp>
+      <p:sp>
+        <p:nvSpPr>
+          <p:cNvPr id="34" name="Shape 32"/>
+          <p:cNvSpPr/>
+          <p:nvPr/>
+        </p:nvSpPr>
+        <p:spPr>
+          <a:xfrm>
+            <a:off x="2587752" y="1856232"/>
+            <a:ext cx="128016" cy="128016"/>
+          </a:xfrm>
+          <a:prstGeom prst="ellipse">
+            <a:avLst/>
+          </a:prstGeom>
+          <a:solidFill>
+            <a:srgbClr val="F4F4F4"/>
+          </a:solidFill>
+          <a:ln w="9525">
+            <a:solidFill>
+              <a:srgbClr val="9AA3B0"/>
+            </a:solidFill>
+            <a:prstDash val="solid"/>
+          </a:ln>
+        </p:spPr>
+      </p:sp>
+      <p:sp>
+        <p:nvSpPr>
+          <p:cNvPr id="35" name="Text 33"/>
+          <p:cNvSpPr/>
+          <p:nvPr/>
+        </p:nvSpPr>
+        <p:spPr>
+          <a:xfrm>
+            <a:off x="640080" y="2670048"/>
+            <a:ext cx="3566160" cy="365760"/>
+          </a:xfrm>
+          <a:prstGeom prst="rect">
+            <a:avLst/>
+          </a:prstGeom>
+          <a:noFill/>
+          <a:ln/>
+        </p:spPr>
+        <p:txBody>
+          <a:bodyPr wrap="square" lIns="0" tIns="0" rIns="0" bIns="0" rtlCol="0" anchor="t"/>
+          <a:lstStyle/>
+          <a:p>
             <a:pPr algn="l" indent="0" marL="0">
               <a:buNone/>
             </a:pPr>
             <a:r>
-              <a:rPr lang="en-US" sz="1000" b="1" dirty="0">
-                <a:solidFill>
-                  <a:srgbClr val="7D8794"/>
-                </a:solidFill>
-                <a:latin typeface="Calibri" pitchFamily="34" charset="0"/>
-                <a:ea typeface="Calibri" pitchFamily="34" charset="-122"/>
-                <a:cs typeface="Calibri" pitchFamily="34" charset="-120"/>
-              </a:rPr>
-              <a:t>zinc</a:t>
+              <a:rPr lang="en-US" sz="1000" i="1" dirty="0">
+                <a:solidFill>
+                  <a:srgbClr val="2E8B57"/>
+                </a:solidFill>
+                <a:latin typeface="Calibri" pitchFamily="34" charset="0"/>
+                <a:ea typeface="Calibri" pitchFamily="34" charset="-122"/>
+                <a:cs typeface="Calibri" pitchFamily="34" charset="-120"/>
+              </a:rPr>
+              <a:t>Zinc next to the scratch corrodes </a:t>
+            </a:r>
+            <a:r>
+              <a:rPr lang="en-US" sz="1000" b="1" i="1" dirty="0">
+                <a:solidFill>
+                  <a:srgbClr val="2E8B57"/>
+                </a:solidFill>
+                <a:latin typeface="Calibri" pitchFamily="34" charset="0"/>
+                <a:ea typeface="Calibri" pitchFamily="34" charset="-122"/>
+                <a:cs typeface="Calibri" pitchFamily="34" charset="-120"/>
+              </a:rPr>
+              <a:t>instead of</a:t>
+            </a:r>
+            <a:r>
+              <a:rPr lang="en-US" sz="1000" i="1" dirty="0">
+                <a:solidFill>
+                  <a:srgbClr val="2E8B57"/>
+                </a:solidFill>
+                <a:latin typeface="Calibri" pitchFamily="34" charset="0"/>
+                <a:ea typeface="Calibri" pitchFamily="34" charset="-122"/>
+                <a:cs typeface="Calibri" pitchFamily="34" charset="-120"/>
+              </a:rPr>
+              <a:t> the iron: no rust</a:t>
             </a:r>
             <a:endParaRPr lang="en-US" sz="1000" dirty="0"/>
           </a:p>
@@ -50373,92 +50620,7 @@
       </p:sp>
       <p:sp>
         <p:nvSpPr>
-          <p:cNvPr id="31" name="Shape 29"/>
-          <p:cNvSpPr/>
-          <p:nvPr/>
-        </p:nvSpPr>
-        <p:spPr>
-          <a:xfrm>
-            <a:off x="2468880" y="1417320"/>
-            <a:ext cx="91" cy="365760"/>
-          </a:xfrm>
-          <a:prstGeom prst="line">
-            <a:avLst/>
-          </a:prstGeom>
-          <a:noFill/>
-          <a:ln w="19050">
-            <a:solidFill>
-              <a:srgbClr val="5B9BD5"/>
-            </a:solidFill>
-            <a:prstDash val="solid"/>
-            <a:tailEnd type="triangle"/>
-          </a:ln>
-        </p:spPr>
-      </p:sp>
-      <p:sp>
-        <p:nvSpPr>
-          <p:cNvPr id="32" name="Text 30"/>
-          <p:cNvSpPr/>
-          <p:nvPr/>
-        </p:nvSpPr>
-        <p:spPr>
-          <a:xfrm>
-            <a:off x="640080" y="2468880"/>
-            <a:ext cx="3566160" cy="228600"/>
-          </a:xfrm>
-          <a:prstGeom prst="rect">
-            <a:avLst/>
-          </a:prstGeom>
-          <a:noFill/>
-          <a:ln/>
-        </p:spPr>
-        <p:txBody>
-          <a:bodyPr wrap="square" lIns="0" tIns="0" rIns="0" bIns="0" rtlCol="0" anchor="ctr"/>
-          <a:lstStyle/>
-          <a:p>
-            <a:pPr algn="l" indent="0" marL="0">
-              <a:buNone/>
-            </a:pPr>
-            <a:r>
-              <a:rPr lang="en-US" sz="1000" i="1" dirty="0">
-                <a:solidFill>
-                  <a:srgbClr val="2E8B57"/>
-                </a:solidFill>
-                <a:latin typeface="Calibri" pitchFamily="34" charset="0"/>
-                <a:ea typeface="Calibri" pitchFamily="34" charset="-122"/>
-                <a:cs typeface="Calibri" pitchFamily="34" charset="-120"/>
-              </a:rPr>
-              <a:t>Zinc still corrodes </a:t>
-            </a:r>
-            <a:r>
-              <a:rPr lang="en-US" sz="1000" b="1" i="1" dirty="0">
-                <a:solidFill>
-                  <a:srgbClr val="2E8B57"/>
-                </a:solidFill>
-                <a:latin typeface="Calibri" pitchFamily="34" charset="0"/>
-                <a:ea typeface="Calibri" pitchFamily="34" charset="-122"/>
-                <a:cs typeface="Calibri" pitchFamily="34" charset="-120"/>
-              </a:rPr>
-              <a:t>instead of</a:t>
-            </a:r>
-            <a:r>
-              <a:rPr lang="en-US" sz="1000" i="1" dirty="0">
-                <a:solidFill>
-                  <a:srgbClr val="2E8B57"/>
-                </a:solidFill>
-                <a:latin typeface="Calibri" pitchFamily="34" charset="0"/>
-                <a:ea typeface="Calibri" pitchFamily="34" charset="-122"/>
-                <a:cs typeface="Calibri" pitchFamily="34" charset="-120"/>
-              </a:rPr>
-              <a:t> the iron: no rust</a:t>
-            </a:r>
-            <a:endParaRPr lang="en-US" sz="1000" dirty="0"/>
-          </a:p>
-        </p:txBody>
-      </p:sp>
-      <p:sp>
-        <p:nvSpPr>
-          <p:cNvPr id="33" name="Text 31"/>
+          <p:cNvPr id="36" name="Text 34"/>
           <p:cNvSpPr/>
           <p:nvPr/>
         </p:nvSpPr>
@@ -50508,7 +50670,7 @@
       </p:sp>
       <p:sp>
         <p:nvSpPr>
-          <p:cNvPr id="34" name="Shape 32"/>
+          <p:cNvPr id="37" name="Shape 35"/>
           <p:cNvSpPr/>
           <p:nvPr/>
         </p:nvSpPr>
@@ -50535,7 +50697,7 @@
       </p:sp>
       <p:sp>
         <p:nvSpPr>
-          <p:cNvPr id="35" name="Text 33"/>
+          <p:cNvPr id="38" name="Text 36"/>
           <p:cNvSpPr/>
           <p:nvPr/>
         </p:nvSpPr>
@@ -50574,7 +50736,7 @@
       </p:sp>
       <p:sp>
         <p:nvSpPr>
-          <p:cNvPr id="36" name="Shape 34"/>
+          <p:cNvPr id="39" name="Shape 37"/>
           <p:cNvSpPr/>
           <p:nvPr/>
         </p:nvSpPr>
@@ -50601,7 +50763,7 @@
       </p:sp>
       <p:sp>
         <p:nvSpPr>
-          <p:cNvPr id="37" name="Text 35"/>
+          <p:cNvPr id="40" name="Text 38"/>
           <p:cNvSpPr/>
           <p:nvPr/>
         </p:nvSpPr>
@@ -50640,7 +50802,7 @@
       </p:sp>
       <p:sp>
         <p:nvSpPr>
-          <p:cNvPr id="38" name="Shape 36"/>
+          <p:cNvPr id="41" name="Shape 39"/>
           <p:cNvSpPr/>
           <p:nvPr/>
         </p:nvSpPr>
@@ -50667,7 +50829,7 @@
       </p:sp>
       <p:sp>
         <p:nvSpPr>
-          <p:cNvPr id="39" name="Text 37"/>
+          <p:cNvPr id="42" name="Text 40"/>
           <p:cNvSpPr/>
           <p:nvPr/>
         </p:nvSpPr>
@@ -50706,7 +50868,7 @@
       </p:sp>
       <p:sp>
         <p:nvSpPr>
-          <p:cNvPr id="40" name="Shape 38"/>
+          <p:cNvPr id="43" name="Shape 41"/>
           <p:cNvSpPr/>
           <p:nvPr/>
         </p:nvSpPr>
@@ -50733,7 +50895,7 @@
       </p:sp>
       <p:sp>
         <p:nvSpPr>
-          <p:cNvPr id="41" name="Text 39"/>
+          <p:cNvPr id="44" name="Text 42"/>
           <p:cNvSpPr/>
           <p:nvPr/>
         </p:nvSpPr>
@@ -50772,7 +50934,7 @@
       </p:sp>
       <p:sp>
         <p:nvSpPr>
-          <p:cNvPr id="42" name="Shape 40"/>
+          <p:cNvPr id="45" name="Shape 43"/>
           <p:cNvSpPr/>
           <p:nvPr/>
         </p:nvSpPr>
@@ -50799,7 +50961,7 @@
       </p:sp>
       <p:sp>
         <p:nvSpPr>
-          <p:cNvPr id="43" name="Text 41"/>
+          <p:cNvPr id="46" name="Text 44"/>
           <p:cNvSpPr/>
           <p:nvPr/>
         </p:nvSpPr>
@@ -50838,7 +51000,7 @@
       </p:sp>
       <p:sp>
         <p:nvSpPr>
-          <p:cNvPr id="44" name="Shape 42"/>
+          <p:cNvPr id="47" name="Shape 45"/>
           <p:cNvSpPr/>
           <p:nvPr/>
         </p:nvSpPr>
@@ -50865,7 +51027,7 @@
       </p:sp>
       <p:sp>
         <p:nvSpPr>
-          <p:cNvPr id="45" name="Text 43"/>
+          <p:cNvPr id="48" name="Text 46"/>
           <p:cNvSpPr/>
           <p:nvPr/>
         </p:nvSpPr>
@@ -50904,7 +51066,7 @@
       </p:sp>
       <p:sp>
         <p:nvSpPr>
-          <p:cNvPr id="46" name="Shape 44"/>
+          <p:cNvPr id="49" name="Shape 47"/>
           <p:cNvSpPr/>
           <p:nvPr/>
         </p:nvSpPr>
@@ -50928,7 +51090,7 @@
       </p:sp>
       <p:sp>
         <p:nvSpPr>
-          <p:cNvPr id="47" name="Text 45"/>
+          <p:cNvPr id="50" name="Text 48"/>
           <p:cNvSpPr/>
           <p:nvPr/>
         </p:nvSpPr>
@@ -50967,13 +51129,13 @@
       </p:sp>
       <p:sp>
         <p:nvSpPr>
-          <p:cNvPr id="48" name="Shape 46"/>
-          <p:cNvSpPr/>
-          <p:nvPr/>
-        </p:nvSpPr>
-        <p:spPr>
-          <a:xfrm>
-            <a:off x="731520" y="3977640"/>
+          <p:cNvPr id="51" name="Shape 49"/>
+          <p:cNvSpPr/>
+          <p:nvPr/>
+        </p:nvSpPr>
+        <p:spPr>
+          <a:xfrm>
+            <a:off x="731520" y="3611880"/>
             <a:ext cx="3291840" cy="822960"/>
           </a:xfrm>
           <a:custGeom>
@@ -51013,14 +51175,14 @@
       </p:sp>
       <p:sp>
         <p:nvSpPr>
-          <p:cNvPr id="49" name="Shape 47"/>
-          <p:cNvSpPr/>
-          <p:nvPr/>
-        </p:nvSpPr>
-        <p:spPr>
-          <a:xfrm>
-            <a:off x="548640" y="4343400"/>
-            <a:ext cx="4846320" cy="822960"/>
+          <p:cNvPr id="52" name="Shape 50"/>
+          <p:cNvSpPr/>
+          <p:nvPr/>
+        </p:nvSpPr>
+        <p:spPr>
+          <a:xfrm>
+            <a:off x="548640" y="3977640"/>
+            <a:ext cx="4846320" cy="1005840"/>
           </a:xfrm>
           <a:prstGeom prst="rect">
             <a:avLst/>
@@ -51035,13 +51197,13 @@
       </p:sp>
       <p:sp>
         <p:nvSpPr>
-          <p:cNvPr id="50" name="Shape 48"/>
-          <p:cNvSpPr/>
-          <p:nvPr/>
-        </p:nvSpPr>
-        <p:spPr>
-          <a:xfrm>
-            <a:off x="548640" y="4343400"/>
+          <p:cNvPr id="53" name="Shape 51"/>
+          <p:cNvSpPr/>
+          <p:nvPr/>
+        </p:nvSpPr>
+        <p:spPr>
+          <a:xfrm>
+            <a:off x="548640" y="3977640"/>
             <a:ext cx="4846320" cy="91"/>
           </a:xfrm>
           <a:prstGeom prst="line">
@@ -51058,13 +51220,13 @@
       </p:sp>
       <p:sp>
         <p:nvSpPr>
-          <p:cNvPr id="51" name="Shape 49"/>
-          <p:cNvSpPr/>
-          <p:nvPr/>
-        </p:nvSpPr>
-        <p:spPr>
-          <a:xfrm>
-            <a:off x="1399032" y="4663440"/>
+          <p:cNvPr id="54" name="Shape 52"/>
+          <p:cNvSpPr/>
+          <p:nvPr/>
+        </p:nvSpPr>
+        <p:spPr>
+          <a:xfrm>
+            <a:off x="1399032" y="4297680"/>
             <a:ext cx="310896" cy="146304"/>
           </a:xfrm>
           <a:prstGeom prst="rect">
@@ -51083,13 +51245,13 @@
       </p:sp>
       <p:sp>
         <p:nvSpPr>
-          <p:cNvPr id="52" name="Shape 50"/>
-          <p:cNvSpPr/>
-          <p:nvPr/>
-        </p:nvSpPr>
-        <p:spPr>
-          <a:xfrm>
-            <a:off x="2221992" y="4663440"/>
+          <p:cNvPr id="55" name="Shape 53"/>
+          <p:cNvSpPr/>
+          <p:nvPr/>
+        </p:nvSpPr>
+        <p:spPr>
+          <a:xfrm>
+            <a:off x="2221992" y="4297680"/>
             <a:ext cx="310896" cy="146304"/>
           </a:xfrm>
           <a:prstGeom prst="rect">
@@ -51108,13 +51270,13 @@
       </p:sp>
       <p:sp>
         <p:nvSpPr>
-          <p:cNvPr id="53" name="Shape 51"/>
-          <p:cNvSpPr/>
-          <p:nvPr/>
-        </p:nvSpPr>
-        <p:spPr>
-          <a:xfrm>
-            <a:off x="3044952" y="4663440"/>
+          <p:cNvPr id="56" name="Shape 54"/>
+          <p:cNvSpPr/>
+          <p:nvPr/>
+        </p:nvSpPr>
+        <p:spPr>
+          <a:xfrm>
+            <a:off x="3044952" y="4297680"/>
             <a:ext cx="310896" cy="146304"/>
           </a:xfrm>
           <a:prstGeom prst="rect">
@@ -51133,13 +51295,13 @@
       </p:sp>
       <p:sp>
         <p:nvSpPr>
-          <p:cNvPr id="54" name="Text 52"/>
-          <p:cNvSpPr/>
-          <p:nvPr/>
-        </p:nvSpPr>
-        <p:spPr>
-          <a:xfrm>
-            <a:off x="3794760" y="4526280"/>
+          <p:cNvPr id="57" name="Text 55"/>
+          <p:cNvSpPr/>
+          <p:nvPr/>
+        </p:nvSpPr>
+        <p:spPr>
+          <a:xfrm>
+            <a:off x="3794760" y="4160520"/>
             <a:ext cx="1600200" cy="548640"/>
           </a:xfrm>
           <a:prstGeom prst="rect">
@@ -51172,13 +51334,13 @@
       </p:sp>
       <p:sp>
         <p:nvSpPr>
-          <p:cNvPr id="55" name="Text 53"/>
-          <p:cNvSpPr/>
-          <p:nvPr/>
-        </p:nvSpPr>
-        <p:spPr>
-          <a:xfrm>
-            <a:off x="731520" y="3703320"/>
+          <p:cNvPr id="58" name="Text 56"/>
+          <p:cNvSpPr/>
+          <p:nvPr/>
+        </p:nvSpPr>
+        <p:spPr>
+          <a:xfrm>
+            <a:off x="731520" y="3337560"/>
             <a:ext cx="3291840" cy="228600"/>
           </a:xfrm>
           <a:prstGeom prst="rect">
@@ -51211,7 +51373,7 @@
       </p:sp>
       <p:sp>
         <p:nvSpPr>
-          <p:cNvPr id="56" name="Shape 54"/>
+          <p:cNvPr id="59" name="Shape 57"/>
           <p:cNvSpPr/>
           <p:nvPr/>
         </p:nvSpPr>
@@ -51238,7 +51400,7 @@
       </p:sp>
       <p:sp>
         <p:nvSpPr>
-          <p:cNvPr id="57" name="Text 55"/>
+          <p:cNvPr id="60" name="Text 58"/>
           <p:cNvSpPr/>
           <p:nvPr/>
         </p:nvSpPr>
@@ -51277,7 +51439,7 @@
       </p:sp>
       <p:sp>
         <p:nvSpPr>
-          <p:cNvPr id="58" name="Text 56"/>
+          <p:cNvPr id="61" name="Text 59"/>
           <p:cNvSpPr/>
           <p:nvPr/>
         </p:nvSpPr>
@@ -51668,7 +51830,7 @@
       </p:sp>
       <p:sp>
         <p:nvSpPr>
-          <p:cNvPr id="59" name="Shape 57"/>
+          <p:cNvPr id="62" name="Shape 60"/>
           <p:cNvSpPr/>
           <p:nvPr/>
         </p:nvSpPr>
@@ -51695,7 +51857,7 @@
       </p:sp>
       <p:sp>
         <p:nvSpPr>
-          <p:cNvPr id="60" name="Text 58"/>
+          <p:cNvPr id="63" name="Text 61"/>
           <p:cNvSpPr/>
           <p:nvPr/>
         </p:nvSpPr>
@@ -51734,7 +51896,7 @@
       </p:sp>
       <p:sp>
         <p:nvSpPr>
-          <p:cNvPr id="61" name="Text 59"/>
+          <p:cNvPr id="64" name="Text 62"/>
           <p:cNvSpPr/>
           <p:nvPr/>
         </p:nvSpPr>
@@ -51857,7 +52019,7 @@
       </p:sp>
       <p:sp>
         <p:nvSpPr>
-          <p:cNvPr id="62" name="Shape 60"/>
+          <p:cNvPr id="65" name="Shape 63"/>
           <p:cNvSpPr/>
           <p:nvPr/>
         </p:nvSpPr>
@@ -51882,7 +52044,7 @@
       </p:sp>
       <p:sp>
         <p:nvSpPr>
-          <p:cNvPr id="63" name="Shape 61"/>
+          <p:cNvPr id="66" name="Shape 64"/>
           <p:cNvSpPr/>
           <p:nvPr/>
         </p:nvSpPr>
@@ -51907,7 +52069,7 @@
       </p:sp>
       <p:sp>
         <p:nvSpPr>
-          <p:cNvPr id="64" name="Text 62"/>
+          <p:cNvPr id="67" name="Text 65"/>
           <p:cNvSpPr/>
           <p:nvPr/>
         </p:nvSpPr>
